--- a/notes/mansion/修繕委員会_第1回定例_キックオフ.pptx
+++ b/notes/mansion/修繕委員会_第1回定例_キックオフ.pptx
@@ -3204,7 +3204,7 @@
           <a:p>
             <a:pPr algn="ctr"/>
             <a:r>
-              <a:rPr sz="2400" b="0">
+              <a:rPr sz="2600" b="0">
                 <a:solidFill>
                   <a:srgbClr val="D6E4F0"/>
                 </a:solidFill>
@@ -3238,7 +3238,7 @@
           <a:p>
             <a:pPr algn="ctr"/>
             <a:r>
-              <a:rPr sz="3400" b="1">
+              <a:rPr sz="3600" b="1">
                 <a:solidFill>
                   <a:srgbClr val="FFFFFF"/>
                 </a:solidFill>
@@ -3256,8 +3256,8 @@
         </p:nvSpPr>
         <p:spPr>
           <a:xfrm>
-            <a:off x="0" y="3520440"/>
-            <a:ext cx="12188952" cy="502920"/>
+            <a:off x="0" y="3547872"/>
+            <a:ext cx="12188952" cy="548640"/>
           </a:xfrm>
           <a:prstGeom prst="rect">
             <a:avLst/>
@@ -3272,7 +3272,7 @@
           <a:p>
             <a:pPr algn="ctr"/>
             <a:r>
-              <a:rPr sz="1800" b="0">
+              <a:rPr sz="2000" b="0">
                 <a:solidFill>
                   <a:srgbClr val="D6E4F0"/>
                 </a:solidFill>
@@ -3290,8 +3290,8 @@
         </p:nvSpPr>
         <p:spPr>
           <a:xfrm>
-            <a:off x="0" y="3977639"/>
-            <a:ext cx="12188952" cy="411480"/>
+            <a:off x="0" y="4114800"/>
+            <a:ext cx="12188952" cy="457200"/>
           </a:xfrm>
           <a:prstGeom prst="rect">
             <a:avLst/>
@@ -3306,7 +3306,7 @@
           <a:p>
             <a:pPr algn="ctr"/>
             <a:r>
-              <a:rPr sz="1400" b="0">
+              <a:rPr sz="1600" b="0">
                 <a:solidFill>
                   <a:srgbClr val="D6E4F0"/>
                 </a:solidFill>
@@ -3324,8 +3324,8 @@
         </p:nvSpPr>
         <p:spPr>
           <a:xfrm>
-            <a:off x="0" y="5120640"/>
-            <a:ext cx="12188952" cy="411480"/>
+            <a:off x="0" y="5212080"/>
+            <a:ext cx="12188952" cy="457200"/>
           </a:xfrm>
           <a:prstGeom prst="rect">
             <a:avLst/>
@@ -3340,7 +3340,7 @@
           <a:p>
             <a:pPr algn="ctr"/>
             <a:r>
-              <a:rPr sz="1300" b="0">
+              <a:rPr sz="1500" b="0">
                 <a:solidFill>
                   <a:srgbClr val="CCDDEE"/>
                 </a:solidFill>
@@ -3377,7 +3377,7 @@
         <p:spPr>
           <a:xfrm>
             <a:off x="0" y="0"/>
-            <a:ext cx="12188952" cy="914400"/>
+            <a:ext cx="12188952" cy="960120"/>
           </a:xfrm>
           <a:prstGeom prst="rect">
             <a:avLst/>
@@ -3420,7 +3420,7 @@
         <p:spPr>
           <a:xfrm>
             <a:off x="365760" y="137160"/>
-            <a:ext cx="10972800" cy="640080"/>
+            <a:ext cx="10972800" cy="685800"/>
           </a:xfrm>
           <a:prstGeom prst="rect">
             <a:avLst/>
@@ -3435,7 +3435,7 @@
           <a:p>
             <a:pPr algn="l"/>
             <a:r>
-              <a:rPr sz="2200" b="1">
+              <a:rPr sz="2400" b="1">
                 <a:solidFill>
                   <a:srgbClr val="FFFFFF"/>
                 </a:solidFill>
@@ -3469,7 +3469,7 @@
           <a:p>
             <a:pPr algn="l"/>
             <a:r>
-              <a:rPr sz="900" b="0">
+              <a:rPr sz="1000" b="0">
                 <a:solidFill>
                   <a:srgbClr val="808080"/>
                 </a:solidFill>
@@ -3503,7 +3503,7 @@
           <a:p>
             <a:pPr algn="r"/>
             <a:r>
-              <a:rPr sz="900" b="0">
+              <a:rPr sz="1000" b="0">
                 <a:solidFill>
                   <a:srgbClr val="808080"/>
                 </a:solidFill>
@@ -3521,8 +3521,8 @@
         </p:nvSpPr>
         <p:spPr>
           <a:xfrm>
-            <a:off x="365760" y="1005840"/>
-            <a:ext cx="5486400" cy="365760"/>
+            <a:off x="365760" y="1051560"/>
+            <a:ext cx="5669280" cy="420624"/>
           </a:xfrm>
           <a:prstGeom prst="rect">
             <a:avLst/>
@@ -3564,8 +3564,8 @@
         </p:nvSpPr>
         <p:spPr>
           <a:xfrm>
-            <a:off x="502920" y="1033271"/>
-            <a:ext cx="5303520" cy="320040"/>
+            <a:off x="502920" y="1078992"/>
+            <a:ext cx="5486400" cy="365760"/>
           </a:xfrm>
           <a:prstGeom prst="rect">
             <a:avLst/>
@@ -3580,7 +3580,7 @@
           <a:p>
             <a:pPr algn="l"/>
             <a:r>
-              <a:rPr sz="1400" b="1">
+              <a:rPr sz="1600" b="1">
                 <a:solidFill>
                   <a:srgbClr val="FFFFFF"/>
                 </a:solidFill>
@@ -3598,8 +3598,8 @@
         </p:nvSpPr>
         <p:spPr>
           <a:xfrm>
-            <a:off x="457200" y="1463040"/>
-            <a:ext cx="5303520" cy="640080"/>
+            <a:off x="502920" y="1600200"/>
+            <a:ext cx="5394960" cy="749808"/>
           </a:xfrm>
           <a:prstGeom prst="rect">
             <a:avLst/>
@@ -3614,7 +3614,7 @@
           <a:p>
             <a:pPr algn="l"/>
             <a:r>
-              <a:rPr sz="1300" b="0">
+              <a:rPr sz="1500" b="0">
                 <a:solidFill>
                   <a:srgbClr val="262626"/>
                 </a:solidFill>
@@ -3633,8 +3633,8 @@
         </p:nvSpPr>
         <p:spPr>
           <a:xfrm>
-            <a:off x="457200" y="2121408"/>
-            <a:ext cx="5303520" cy="640080"/>
+            <a:off x="502920" y="2377440"/>
+            <a:ext cx="5394960" cy="749808"/>
           </a:xfrm>
           <a:prstGeom prst="rect">
             <a:avLst/>
@@ -3649,7 +3649,7 @@
           <a:p>
             <a:pPr algn="l"/>
             <a:r>
-              <a:rPr sz="1300" b="0">
+              <a:rPr sz="1500" b="0">
                 <a:solidFill>
                   <a:srgbClr val="262626"/>
                 </a:solidFill>
@@ -3667,8 +3667,8 @@
         </p:nvSpPr>
         <p:spPr>
           <a:xfrm>
-            <a:off x="457200" y="2779776"/>
-            <a:ext cx="5303520" cy="640080"/>
+            <a:off x="502920" y="3154680"/>
+            <a:ext cx="5394960" cy="749808"/>
           </a:xfrm>
           <a:prstGeom prst="rect">
             <a:avLst/>
@@ -3683,7 +3683,7 @@
           <a:p>
             <a:pPr algn="l"/>
             <a:r>
-              <a:rPr sz="1300" b="0">
+              <a:rPr sz="1500" b="0">
                 <a:solidFill>
                   <a:srgbClr val="262626"/>
                 </a:solidFill>
@@ -3702,8 +3702,8 @@
         </p:nvSpPr>
         <p:spPr>
           <a:xfrm>
-            <a:off x="365760" y="3474720"/>
-            <a:ext cx="5486400" cy="45720"/>
+            <a:off x="365760" y="4069080"/>
+            <a:ext cx="5669280" cy="36576"/>
           </a:xfrm>
           <a:prstGeom prst="rect">
             <a:avLst/>
@@ -3745,8 +3745,8 @@
         </p:nvSpPr>
         <p:spPr>
           <a:xfrm>
-            <a:off x="457200" y="3566160"/>
-            <a:ext cx="5303520" cy="320040"/>
+            <a:off x="502920" y="4160520"/>
+            <a:ext cx="5486400" cy="457200"/>
           </a:xfrm>
           <a:prstGeom prst="rect">
             <a:avLst/>
@@ -3761,61 +3761,26 @@
           <a:p>
             <a:pPr algn="l"/>
             <a:r>
-              <a:rPr sz="1200" b="1">
+              <a:rPr sz="1400" b="0">
                 <a:solidFill>
                   <a:srgbClr val="1F3564"/>
                 </a:solidFill>
               </a:rPr>
-              <a:t>委員会の位置づけ</a:t>
-            </a:r>
-          </a:p>
-        </p:txBody>
-      </p:sp>
-      <p:sp>
-        <p:nvSpPr>
-          <p:cNvPr id="13" name="TextBox 12"/>
-          <p:cNvSpPr txBox="1"/>
-          <p:nvPr/>
-        </p:nvSpPr>
-        <p:spPr>
-          <a:xfrm>
-            <a:off x="457200" y="3931920"/>
-            <a:ext cx="5303520" cy="548640"/>
-          </a:xfrm>
-          <a:prstGeom prst="rect">
-            <a:avLst/>
-          </a:prstGeom>
-          <a:noFill/>
-        </p:spPr>
-        <p:txBody>
-          <a:bodyPr wrap="square">
-            <a:spAutoFit/>
-          </a:bodyPr>
-          <a:lstStyle/>
-          <a:p>
-            <a:pPr algn="l"/>
-            <a:r>
-              <a:rPr sz="1200" b="0">
-                <a:solidFill>
-                  <a:srgbClr val="262626"/>
-                </a:solidFill>
-              </a:rPr>
-              <a:t>理事会と連携する住民委員会
-決定機関は理事会・総会</a:t>
-            </a:r>
-          </a:p>
-        </p:txBody>
-      </p:sp>
-      <p:sp>
-        <p:nvSpPr>
-          <p:cNvPr id="14" name="Rectangle 13"/>
+              <a:t>位置づけ：理事会と連携する住民委員会　決定機関は理事会・総会</a:t>
+            </a:r>
+          </a:p>
+        </p:txBody>
+      </p:sp>
+      <p:sp>
+        <p:nvSpPr>
+          <p:cNvPr id="13" name="Rectangle 12"/>
           <p:cNvSpPr/>
           <p:nvPr/>
         </p:nvSpPr>
         <p:spPr>
           <a:xfrm>
-            <a:off x="6217920" y="1005840"/>
-            <a:ext cx="5577840" cy="365760"/>
+            <a:off x="6400800" y="1051560"/>
+            <a:ext cx="5394960" cy="420624"/>
           </a:xfrm>
           <a:prstGeom prst="rect">
             <a:avLst/>
@@ -3851,14 +3816,14 @@
       </p:sp>
       <p:sp>
         <p:nvSpPr>
-          <p:cNvPr id="15" name="TextBox 14"/>
+          <p:cNvPr id="14" name="TextBox 13"/>
           <p:cNvSpPr txBox="1"/>
           <p:nvPr/>
         </p:nvSpPr>
         <p:spPr>
           <a:xfrm>
-            <a:off x="6355080" y="1033271"/>
-            <a:ext cx="5394960" cy="320040"/>
+            <a:off x="6537960" y="1078992"/>
+            <a:ext cx="5212080" cy="365760"/>
           </a:xfrm>
           <a:prstGeom prst="rect">
             <a:avLst/>
@@ -3873,7 +3838,7 @@
           <a:p>
             <a:pPr algn="l"/>
             <a:r>
-              <a:rPr sz="1400" b="1">
+              <a:rPr sz="1600" b="1">
                 <a:solidFill>
                   <a:srgbClr val="FFFFFF"/>
                 </a:solidFill>
@@ -3885,14 +3850,14 @@
       </p:sp>
       <p:sp>
         <p:nvSpPr>
-          <p:cNvPr id="16" name="Rectangle 15"/>
+          <p:cNvPr id="15" name="Rectangle 14"/>
           <p:cNvSpPr/>
           <p:nvPr/>
         </p:nvSpPr>
         <p:spPr>
           <a:xfrm>
-            <a:off x="6309360" y="1508760"/>
-            <a:ext cx="411480" cy="384048"/>
+            <a:off x="6400800" y="1600200"/>
+            <a:ext cx="457200" cy="475488"/>
           </a:xfrm>
           <a:prstGeom prst="rect">
             <a:avLst/>
@@ -3928,14 +3893,14 @@
       </p:sp>
       <p:sp>
         <p:nvSpPr>
-          <p:cNvPr id="17" name="TextBox 16"/>
+          <p:cNvPr id="16" name="TextBox 15"/>
           <p:cNvSpPr txBox="1"/>
           <p:nvPr/>
         </p:nvSpPr>
         <p:spPr>
           <a:xfrm>
-            <a:off x="6309360" y="1545336"/>
-            <a:ext cx="411480" cy="347472"/>
+            <a:off x="6400800" y="1645920"/>
+            <a:ext cx="457200" cy="402336"/>
           </a:xfrm>
           <a:prstGeom prst="rect">
             <a:avLst/>
@@ -3950,7 +3915,7 @@
           <a:p>
             <a:pPr algn="ctr"/>
             <a:r>
-              <a:rPr sz="1400" b="1">
+              <a:rPr sz="1600" b="1">
                 <a:solidFill>
                   <a:srgbClr val="FFFFFF"/>
                 </a:solidFill>
@@ -3962,14 +3927,14 @@
       </p:sp>
       <p:sp>
         <p:nvSpPr>
-          <p:cNvPr id="18" name="Rectangle 17"/>
+          <p:cNvPr id="17" name="Rectangle 16"/>
           <p:cNvSpPr/>
           <p:nvPr/>
         </p:nvSpPr>
         <p:spPr>
           <a:xfrm>
-            <a:off x="6748272" y="1508760"/>
-            <a:ext cx="4846320" cy="384048"/>
+            <a:off x="6885432" y="1600200"/>
+            <a:ext cx="4892040" cy="475488"/>
           </a:xfrm>
           <a:prstGeom prst="rect">
             <a:avLst/>
@@ -4007,14 +3972,14 @@
       </p:sp>
       <p:sp>
         <p:nvSpPr>
-          <p:cNvPr id="19" name="TextBox 18"/>
+          <p:cNvPr id="18" name="TextBox 17"/>
           <p:cNvSpPr txBox="1"/>
           <p:nvPr/>
         </p:nvSpPr>
         <p:spPr>
           <a:xfrm>
-            <a:off x="6858000" y="1545336"/>
-            <a:ext cx="4663440" cy="347472"/>
+            <a:off x="7022592" y="1664208"/>
+            <a:ext cx="4663440" cy="402336"/>
           </a:xfrm>
           <a:prstGeom prst="rect">
             <a:avLst/>
@@ -4029,7 +3994,7 @@
           <a:p>
             <a:pPr algn="l"/>
             <a:r>
-              <a:rPr sz="1300" b="0">
+              <a:rPr sz="1500" b="0">
                 <a:solidFill>
                   <a:srgbClr val="262626"/>
                 </a:solidFill>
@@ -4041,14 +4006,14 @@
       </p:sp>
       <p:sp>
         <p:nvSpPr>
-          <p:cNvPr id="20" name="Rectangle 19"/>
+          <p:cNvPr id="19" name="Rectangle 18"/>
           <p:cNvSpPr/>
           <p:nvPr/>
         </p:nvSpPr>
         <p:spPr>
           <a:xfrm>
-            <a:off x="6309360" y="1965960"/>
-            <a:ext cx="411480" cy="384048"/>
+            <a:off x="6400800" y="2148840"/>
+            <a:ext cx="457200" cy="475488"/>
           </a:xfrm>
           <a:prstGeom prst="rect">
             <a:avLst/>
@@ -4084,14 +4049,14 @@
       </p:sp>
       <p:sp>
         <p:nvSpPr>
-          <p:cNvPr id="21" name="TextBox 20"/>
+          <p:cNvPr id="20" name="TextBox 19"/>
           <p:cNvSpPr txBox="1"/>
           <p:nvPr/>
         </p:nvSpPr>
         <p:spPr>
           <a:xfrm>
-            <a:off x="6309360" y="2002536"/>
-            <a:ext cx="411480" cy="347472"/>
+            <a:off x="6400800" y="2194560"/>
+            <a:ext cx="457200" cy="402336"/>
           </a:xfrm>
           <a:prstGeom prst="rect">
             <a:avLst/>
@@ -4106,7 +4071,7 @@
           <a:p>
             <a:pPr algn="ctr"/>
             <a:r>
-              <a:rPr sz="1400" b="1">
+              <a:rPr sz="1600" b="1">
                 <a:solidFill>
                   <a:srgbClr val="FFFFFF"/>
                 </a:solidFill>
@@ -4118,14 +4083,14 @@
       </p:sp>
       <p:sp>
         <p:nvSpPr>
-          <p:cNvPr id="22" name="Rectangle 21"/>
+          <p:cNvPr id="21" name="Rectangle 20"/>
           <p:cNvSpPr/>
           <p:nvPr/>
         </p:nvSpPr>
         <p:spPr>
           <a:xfrm>
-            <a:off x="6748272" y="1965960"/>
-            <a:ext cx="4846320" cy="384048"/>
+            <a:off x="6885432" y="2148840"/>
+            <a:ext cx="4892040" cy="475488"/>
           </a:xfrm>
           <a:prstGeom prst="rect">
             <a:avLst/>
@@ -4163,14 +4128,14 @@
       </p:sp>
       <p:sp>
         <p:nvSpPr>
-          <p:cNvPr id="23" name="TextBox 22"/>
+          <p:cNvPr id="22" name="TextBox 21"/>
           <p:cNvSpPr txBox="1"/>
           <p:nvPr/>
         </p:nvSpPr>
         <p:spPr>
           <a:xfrm>
-            <a:off x="6858000" y="2002536"/>
-            <a:ext cx="4663440" cy="347472"/>
+            <a:off x="7022592" y="2212848"/>
+            <a:ext cx="4663440" cy="402336"/>
           </a:xfrm>
           <a:prstGeom prst="rect">
             <a:avLst/>
@@ -4185,7 +4150,7 @@
           <a:p>
             <a:pPr algn="l"/>
             <a:r>
-              <a:rPr sz="1300" b="0">
+              <a:rPr sz="1500" b="0">
                 <a:solidFill>
                   <a:srgbClr val="262626"/>
                 </a:solidFill>
@@ -4197,14 +4162,14 @@
       </p:sp>
       <p:sp>
         <p:nvSpPr>
-          <p:cNvPr id="24" name="Rectangle 23"/>
+          <p:cNvPr id="23" name="Rectangle 22"/>
           <p:cNvSpPr/>
           <p:nvPr/>
         </p:nvSpPr>
         <p:spPr>
           <a:xfrm>
-            <a:off x="6309360" y="2423160"/>
-            <a:ext cx="411480" cy="384048"/>
+            <a:off x="6400800" y="2697480"/>
+            <a:ext cx="457200" cy="475488"/>
           </a:xfrm>
           <a:prstGeom prst="rect">
             <a:avLst/>
@@ -4240,14 +4205,14 @@
       </p:sp>
       <p:sp>
         <p:nvSpPr>
-          <p:cNvPr id="25" name="TextBox 24"/>
+          <p:cNvPr id="24" name="TextBox 23"/>
           <p:cNvSpPr txBox="1"/>
           <p:nvPr/>
         </p:nvSpPr>
         <p:spPr>
           <a:xfrm>
-            <a:off x="6309360" y="2459736"/>
-            <a:ext cx="411480" cy="347472"/>
+            <a:off x="6400800" y="2743200"/>
+            <a:ext cx="457200" cy="402336"/>
           </a:xfrm>
           <a:prstGeom prst="rect">
             <a:avLst/>
@@ -4262,7 +4227,7 @@
           <a:p>
             <a:pPr algn="ctr"/>
             <a:r>
-              <a:rPr sz="1400" b="1">
+              <a:rPr sz="1600" b="1">
                 <a:solidFill>
                   <a:srgbClr val="FFFFFF"/>
                 </a:solidFill>
@@ -4274,14 +4239,14 @@
       </p:sp>
       <p:sp>
         <p:nvSpPr>
-          <p:cNvPr id="26" name="Rectangle 25"/>
+          <p:cNvPr id="25" name="Rectangle 24"/>
           <p:cNvSpPr/>
           <p:nvPr/>
         </p:nvSpPr>
         <p:spPr>
           <a:xfrm>
-            <a:off x="6748272" y="2423160"/>
-            <a:ext cx="4846320" cy="384048"/>
+            <a:off x="6885432" y="2697480"/>
+            <a:ext cx="4892040" cy="475488"/>
           </a:xfrm>
           <a:prstGeom prst="rect">
             <a:avLst/>
@@ -4319,14 +4284,14 @@
       </p:sp>
       <p:sp>
         <p:nvSpPr>
-          <p:cNvPr id="27" name="TextBox 26"/>
+          <p:cNvPr id="26" name="TextBox 25"/>
           <p:cNvSpPr txBox="1"/>
           <p:nvPr/>
         </p:nvSpPr>
         <p:spPr>
           <a:xfrm>
-            <a:off x="6858000" y="2459736"/>
-            <a:ext cx="4663440" cy="347472"/>
+            <a:off x="7022592" y="2761488"/>
+            <a:ext cx="4663440" cy="402336"/>
           </a:xfrm>
           <a:prstGeom prst="rect">
             <a:avLst/>
@@ -4341,7 +4306,7 @@
           <a:p>
             <a:pPr algn="l"/>
             <a:r>
-              <a:rPr sz="1300" b="0">
+              <a:rPr sz="1500" b="0">
                 <a:solidFill>
                   <a:srgbClr val="262626"/>
                 </a:solidFill>
@@ -4353,14 +4318,14 @@
       </p:sp>
       <p:sp>
         <p:nvSpPr>
-          <p:cNvPr id="28" name="Rectangle 27"/>
+          <p:cNvPr id="27" name="Rectangle 26"/>
           <p:cNvSpPr/>
           <p:nvPr/>
         </p:nvSpPr>
         <p:spPr>
           <a:xfrm>
-            <a:off x="6309360" y="2880360"/>
-            <a:ext cx="411480" cy="384048"/>
+            <a:off x="6400800" y="3246120"/>
+            <a:ext cx="457200" cy="475488"/>
           </a:xfrm>
           <a:prstGeom prst="rect">
             <a:avLst/>
@@ -4396,14 +4361,14 @@
       </p:sp>
       <p:sp>
         <p:nvSpPr>
-          <p:cNvPr id="29" name="TextBox 28"/>
+          <p:cNvPr id="28" name="TextBox 27"/>
           <p:cNvSpPr txBox="1"/>
           <p:nvPr/>
         </p:nvSpPr>
         <p:spPr>
           <a:xfrm>
-            <a:off x="6309360" y="2916936"/>
-            <a:ext cx="411480" cy="347472"/>
+            <a:off x="6400800" y="3291840"/>
+            <a:ext cx="457200" cy="402336"/>
           </a:xfrm>
           <a:prstGeom prst="rect">
             <a:avLst/>
@@ -4418,7 +4383,7 @@
           <a:p>
             <a:pPr algn="ctr"/>
             <a:r>
-              <a:rPr sz="1400" b="1">
+              <a:rPr sz="1600" b="1">
                 <a:solidFill>
                   <a:srgbClr val="FFFFFF"/>
                 </a:solidFill>
@@ -4430,14 +4395,14 @@
       </p:sp>
       <p:sp>
         <p:nvSpPr>
-          <p:cNvPr id="30" name="Rectangle 29"/>
+          <p:cNvPr id="29" name="Rectangle 28"/>
           <p:cNvSpPr/>
           <p:nvPr/>
         </p:nvSpPr>
         <p:spPr>
           <a:xfrm>
-            <a:off x="6748272" y="2880360"/>
-            <a:ext cx="4846320" cy="384048"/>
+            <a:off x="6885432" y="3246120"/>
+            <a:ext cx="4892040" cy="475488"/>
           </a:xfrm>
           <a:prstGeom prst="rect">
             <a:avLst/>
@@ -4475,14 +4440,14 @@
       </p:sp>
       <p:sp>
         <p:nvSpPr>
-          <p:cNvPr id="31" name="TextBox 30"/>
+          <p:cNvPr id="30" name="TextBox 29"/>
           <p:cNvSpPr txBox="1"/>
           <p:nvPr/>
         </p:nvSpPr>
         <p:spPr>
           <a:xfrm>
-            <a:off x="6858000" y="2916936"/>
-            <a:ext cx="4663440" cy="347472"/>
+            <a:off x="7022592" y="3310128"/>
+            <a:ext cx="4663440" cy="402336"/>
           </a:xfrm>
           <a:prstGeom prst="rect">
             <a:avLst/>
@@ -4497,7 +4462,7 @@
           <a:p>
             <a:pPr algn="l"/>
             <a:r>
-              <a:rPr sz="1300" b="0">
+              <a:rPr sz="1500" b="0">
                 <a:solidFill>
                   <a:srgbClr val="262626"/>
                 </a:solidFill>
@@ -4509,14 +4474,14 @@
       </p:sp>
       <p:sp>
         <p:nvSpPr>
-          <p:cNvPr id="32" name="Rectangle 31"/>
+          <p:cNvPr id="31" name="Rectangle 30"/>
           <p:cNvSpPr/>
           <p:nvPr/>
         </p:nvSpPr>
         <p:spPr>
           <a:xfrm>
-            <a:off x="6309360" y="3337560"/>
-            <a:ext cx="411480" cy="384048"/>
+            <a:off x="6400800" y="3794760"/>
+            <a:ext cx="457200" cy="475488"/>
           </a:xfrm>
           <a:prstGeom prst="rect">
             <a:avLst/>
@@ -4552,14 +4517,14 @@
       </p:sp>
       <p:sp>
         <p:nvSpPr>
-          <p:cNvPr id="33" name="TextBox 32"/>
+          <p:cNvPr id="32" name="TextBox 31"/>
           <p:cNvSpPr txBox="1"/>
           <p:nvPr/>
         </p:nvSpPr>
         <p:spPr>
           <a:xfrm>
-            <a:off x="6309360" y="3374136"/>
-            <a:ext cx="411480" cy="347472"/>
+            <a:off x="6400800" y="3840480"/>
+            <a:ext cx="457200" cy="402336"/>
           </a:xfrm>
           <a:prstGeom prst="rect">
             <a:avLst/>
@@ -4574,7 +4539,7 @@
           <a:p>
             <a:pPr algn="ctr"/>
             <a:r>
-              <a:rPr sz="1400" b="1">
+              <a:rPr sz="1600" b="1">
                 <a:solidFill>
                   <a:srgbClr val="FFFFFF"/>
                 </a:solidFill>
@@ -4586,14 +4551,14 @@
       </p:sp>
       <p:sp>
         <p:nvSpPr>
-          <p:cNvPr id="34" name="Rectangle 33"/>
+          <p:cNvPr id="33" name="Rectangle 32"/>
           <p:cNvSpPr/>
           <p:nvPr/>
         </p:nvSpPr>
         <p:spPr>
           <a:xfrm>
-            <a:off x="6748272" y="3337560"/>
-            <a:ext cx="4846320" cy="384048"/>
+            <a:off x="6885432" y="3794760"/>
+            <a:ext cx="4892040" cy="475488"/>
           </a:xfrm>
           <a:prstGeom prst="rect">
             <a:avLst/>
@@ -4631,14 +4596,14 @@
       </p:sp>
       <p:sp>
         <p:nvSpPr>
-          <p:cNvPr id="35" name="TextBox 34"/>
+          <p:cNvPr id="34" name="TextBox 33"/>
           <p:cNvSpPr txBox="1"/>
           <p:nvPr/>
         </p:nvSpPr>
         <p:spPr>
           <a:xfrm>
-            <a:off x="6858000" y="3374136"/>
-            <a:ext cx="4663440" cy="347472"/>
+            <a:off x="7022592" y="3858768"/>
+            <a:ext cx="4663440" cy="402336"/>
           </a:xfrm>
           <a:prstGeom prst="rect">
             <a:avLst/>
@@ -4653,7 +4618,7 @@
           <a:p>
             <a:pPr algn="l"/>
             <a:r>
-              <a:rPr sz="1300" b="0">
+              <a:rPr sz="1500" b="0">
                 <a:solidFill>
                   <a:srgbClr val="262626"/>
                 </a:solidFill>
@@ -4690,7 +4655,7 @@
         <p:spPr>
           <a:xfrm>
             <a:off x="0" y="0"/>
-            <a:ext cx="12188952" cy="914400"/>
+            <a:ext cx="12188952" cy="960120"/>
           </a:xfrm>
           <a:prstGeom prst="rect">
             <a:avLst/>
@@ -4733,7 +4698,7 @@
         <p:spPr>
           <a:xfrm>
             <a:off x="365760" y="137160"/>
-            <a:ext cx="10972800" cy="640080"/>
+            <a:ext cx="10972800" cy="685800"/>
           </a:xfrm>
           <a:prstGeom prst="rect">
             <a:avLst/>
@@ -4748,7 +4713,7 @@
           <a:p>
             <a:pPr algn="l"/>
             <a:r>
-              <a:rPr sz="2200" b="1">
+              <a:rPr sz="2400" b="1">
                 <a:solidFill>
                   <a:srgbClr val="FFFFFF"/>
                 </a:solidFill>
@@ -4782,7 +4747,7 @@
           <a:p>
             <a:pPr algn="l"/>
             <a:r>
-              <a:rPr sz="900" b="0">
+              <a:rPr sz="1000" b="0">
                 <a:solidFill>
                   <a:srgbClr val="808080"/>
                 </a:solidFill>
@@ -4816,7 +4781,7 @@
           <a:p>
             <a:pPr algn="r"/>
             <a:r>
-              <a:rPr sz="900" b="0">
+              <a:rPr sz="1000" b="0">
                 <a:solidFill>
                   <a:srgbClr val="808080"/>
                 </a:solidFill>
@@ -4834,8 +4799,8 @@
         </p:nvSpPr>
         <p:spPr>
           <a:xfrm>
-            <a:off x="365760" y="1005840"/>
-            <a:ext cx="11430000" cy="411480"/>
+            <a:off x="365760" y="1051560"/>
+            <a:ext cx="11430000" cy="457200"/>
           </a:xfrm>
           <a:prstGeom prst="rect">
             <a:avLst/>
@@ -4877,8 +4842,8 @@
         </p:nvSpPr>
         <p:spPr>
           <a:xfrm>
-            <a:off x="502920" y="1033271"/>
-            <a:ext cx="2743200" cy="347472"/>
+            <a:off x="502920" y="1078992"/>
+            <a:ext cx="2743200" cy="384048"/>
           </a:xfrm>
           <a:prstGeom prst="rect">
             <a:avLst/>
@@ -4893,7 +4858,7 @@
           <a:p>
             <a:pPr algn="l"/>
             <a:r>
-              <a:rPr sz="1400" b="1">
+              <a:rPr sz="1600" b="1">
                 <a:solidFill>
                   <a:srgbClr val="FFFFFF"/>
                 </a:solidFill>
@@ -4911,8 +4876,8 @@
         </p:nvSpPr>
         <p:spPr>
           <a:xfrm>
-            <a:off x="3474720" y="1033271"/>
-            <a:ext cx="8229600" cy="347472"/>
+            <a:off x="3474720" y="1078992"/>
+            <a:ext cx="8229600" cy="384048"/>
           </a:xfrm>
           <a:prstGeom prst="rect">
             <a:avLst/>
@@ -4927,7 +4892,7 @@
           <a:p>
             <a:pPr algn="ctr"/>
             <a:r>
-              <a:rPr sz="1400" b="1">
+              <a:rPr sz="1600" b="1">
                 <a:solidFill>
                   <a:srgbClr val="FFFFFF"/>
                 </a:solidFill>
@@ -4945,8 +4910,8 @@
         </p:nvSpPr>
         <p:spPr>
           <a:xfrm>
-            <a:off x="365760" y="1600200"/>
-            <a:ext cx="11430000" cy="411480"/>
+            <a:off x="365760" y="1691640"/>
+            <a:ext cx="11430000" cy="457200"/>
           </a:xfrm>
           <a:prstGeom prst="rect">
             <a:avLst/>
@@ -4988,8 +4953,8 @@
         </p:nvSpPr>
         <p:spPr>
           <a:xfrm>
-            <a:off x="502920" y="1627632"/>
-            <a:ext cx="10972800" cy="365760"/>
+            <a:off x="502920" y="1728216"/>
+            <a:ext cx="10972800" cy="402336"/>
           </a:xfrm>
           <a:prstGeom prst="rect">
             <a:avLst/>
@@ -5004,7 +4969,7 @@
           <a:p>
             <a:pPr algn="l"/>
             <a:r>
-              <a:rPr sz="1600" b="1">
+              <a:rPr sz="1800" b="1">
                 <a:solidFill>
                   <a:srgbClr val="FFFFFF"/>
                 </a:solidFill>
@@ -5023,8 +4988,8 @@
           <p:nvPr/>
         </p:nvGraphicFramePr>
         <p:xfrm>
-          <a:off x="548640" y="2103120"/>
-          <a:ext cx="11064240" cy="1005840"/>
+          <a:off x="548640" y="2240280"/>
+          <a:ext cx="11064240" cy="1188720"/>
         </p:xfrm>
         <a:graphic>
           <a:graphicData uri="http://schemas.openxmlformats.org/drawingml/2006/table">
@@ -5033,10 +4998,10 @@
                 <a:tableStyleId>{5C22544A-7EE6-4342-B048-85BDC9FD1C3A}</a:tableStyleId>
               </a:tblPr>
               <a:tblGrid>
-                <a:gridCol w="5532120"/>
-                <a:gridCol w="5532120"/>
+                <a:gridCol w="2011680"/>
+                <a:gridCol w="9052560"/>
               </a:tblGrid>
-              <a:tr h="335280">
+              <a:tr h="396240">
                 <a:tc>
                   <a:txBody>
                     <a:bodyPr/>
@@ -5044,7 +5009,7 @@
                     <a:p>
                       <a:pPr algn="ctr"/>
                       <a:r>
-                        <a:rPr sz="1100" b="1">
+                        <a:rPr sz="1500" b="1">
                           <a:solidFill>
                             <a:srgbClr val="FFFFFF"/>
                           </a:solidFill>
@@ -5066,7 +5031,7 @@
                     <a:p>
                       <a:pPr algn="ctr"/>
                       <a:r>
-                        <a:rPr sz="1100" b="1">
+                        <a:rPr sz="1500" b="1">
                           <a:solidFill>
                             <a:srgbClr val="FFFFFF"/>
                           </a:solidFill>
@@ -5082,14 +5047,14 @@
                   </a:tcPr>
                 </a:tc>
               </a:tr>
-              <a:tr h="335280">
+              <a:tr h="396240">
                 <a:tc>
                   <a:txBody>
                     <a:bodyPr/>
                     <a:lstStyle/>
                     <a:p>
                       <a:r>
-                        <a:rPr sz="1000">
+                        <a:rPr sz="1500">
                           <a:solidFill>
                             <a:srgbClr val="262626"/>
                           </a:solidFill>
@@ -5110,7 +5075,7 @@
                     <a:lstStyle/>
                     <a:p>
                       <a:r>
-                        <a:rPr sz="1000">
+                        <a:rPr sz="1500">
                           <a:solidFill>
                             <a:srgbClr val="262626"/>
                           </a:solidFill>
@@ -5126,14 +5091,14 @@
                   </a:tcPr>
                 </a:tc>
               </a:tr>
-              <a:tr h="335280">
+              <a:tr h="396240">
                 <a:tc>
                   <a:txBody>
                     <a:bodyPr/>
                     <a:lstStyle/>
                     <a:p>
                       <a:r>
-                        <a:rPr sz="1000">
+                        <a:rPr sz="1500">
                           <a:solidFill>
                             <a:srgbClr val="262626"/>
                           </a:solidFill>
@@ -5154,7 +5119,7 @@
                     <a:lstStyle/>
                     <a:p>
                       <a:r>
-                        <a:rPr sz="1000">
+                        <a:rPr sz="1500">
                           <a:solidFill>
                             <a:srgbClr val="262626"/>
                           </a:solidFill>
@@ -5182,8 +5147,8 @@
         </p:nvSpPr>
         <p:spPr>
           <a:xfrm>
-            <a:off x="365760" y="3291840"/>
-            <a:ext cx="11430000" cy="365760"/>
+            <a:off x="365760" y="3611880"/>
+            <a:ext cx="11430000" cy="420624"/>
           </a:xfrm>
           <a:prstGeom prst="rect">
             <a:avLst/>
@@ -5225,8 +5190,8 @@
         </p:nvSpPr>
         <p:spPr>
           <a:xfrm>
-            <a:off x="502920" y="3319272"/>
-            <a:ext cx="10972800" cy="320040"/>
+            <a:off x="502920" y="3639312"/>
+            <a:ext cx="10972800" cy="365760"/>
           </a:xfrm>
           <a:prstGeom prst="rect">
             <a:avLst/>
@@ -5241,7 +5206,7 @@
           <a:p>
             <a:pPr algn="l"/>
             <a:r>
-              <a:rPr sz="1300" b="1">
+              <a:rPr sz="1500" b="1">
                 <a:solidFill>
                   <a:srgbClr val="1F3564"/>
                 </a:solidFill>
@@ -5259,8 +5224,8 @@
         </p:nvSpPr>
         <p:spPr>
           <a:xfrm>
-            <a:off x="640080" y="3749039"/>
-            <a:ext cx="10972800" cy="411480"/>
+            <a:off x="640080" y="4160520"/>
+            <a:ext cx="10972800" cy="502920"/>
           </a:xfrm>
           <a:prstGeom prst="rect">
             <a:avLst/>
@@ -5275,7 +5240,7 @@
           <a:p>
             <a:pPr algn="l"/>
             <a:r>
-              <a:rPr sz="1300" b="0">
+              <a:rPr sz="1500" b="0">
                 <a:solidFill>
                   <a:srgbClr val="262626"/>
                 </a:solidFill>
@@ -5293,8 +5258,8 @@
         </p:nvSpPr>
         <p:spPr>
           <a:xfrm>
-            <a:off x="640080" y="4187951"/>
-            <a:ext cx="10972800" cy="411480"/>
+            <a:off x="640080" y="4690872"/>
+            <a:ext cx="10972800" cy="502920"/>
           </a:xfrm>
           <a:prstGeom prst="rect">
             <a:avLst/>
@@ -5309,7 +5274,7 @@
           <a:p>
             <a:pPr algn="l"/>
             <a:r>
-              <a:rPr sz="1300" b="0">
+              <a:rPr sz="1500" b="0">
                 <a:solidFill>
                   <a:srgbClr val="262626"/>
                 </a:solidFill>
@@ -5346,7 +5311,7 @@
         <p:spPr>
           <a:xfrm>
             <a:off x="0" y="0"/>
-            <a:ext cx="12188952" cy="914400"/>
+            <a:ext cx="12188952" cy="960120"/>
           </a:xfrm>
           <a:prstGeom prst="rect">
             <a:avLst/>
@@ -5389,7 +5354,7 @@
         <p:spPr>
           <a:xfrm>
             <a:off x="365760" y="137160"/>
-            <a:ext cx="10972800" cy="640080"/>
+            <a:ext cx="10972800" cy="685800"/>
           </a:xfrm>
           <a:prstGeom prst="rect">
             <a:avLst/>
@@ -5404,7 +5369,7 @@
           <a:p>
             <a:pPr algn="l"/>
             <a:r>
-              <a:rPr sz="2200" b="1">
+              <a:rPr sz="2400" b="1">
                 <a:solidFill>
                   <a:srgbClr val="FFFFFF"/>
                 </a:solidFill>
@@ -5438,7 +5403,7 @@
           <a:p>
             <a:pPr algn="l"/>
             <a:r>
-              <a:rPr sz="900" b="0">
+              <a:rPr sz="1000" b="0">
                 <a:solidFill>
                   <a:srgbClr val="808080"/>
                 </a:solidFill>
@@ -5472,7 +5437,7 @@
           <a:p>
             <a:pPr algn="r"/>
             <a:r>
-              <a:rPr sz="900" b="0">
+              <a:rPr sz="1000" b="0">
                 <a:solidFill>
                   <a:srgbClr val="808080"/>
                 </a:solidFill>
@@ -5490,8 +5455,8 @@
         </p:nvSpPr>
         <p:spPr>
           <a:xfrm>
-            <a:off x="365760" y="960120"/>
-            <a:ext cx="11430000" cy="411480"/>
+            <a:off x="365760" y="1005840"/>
+            <a:ext cx="11430000" cy="457200"/>
           </a:xfrm>
           <a:prstGeom prst="rect">
             <a:avLst/>
@@ -5533,8 +5498,8 @@
         </p:nvSpPr>
         <p:spPr>
           <a:xfrm>
-            <a:off x="502920" y="987552"/>
-            <a:ext cx="10972800" cy="365760"/>
+            <a:off x="502920" y="1042416"/>
+            <a:ext cx="10972800" cy="402336"/>
           </a:xfrm>
           <a:prstGeom prst="rect">
             <a:avLst/>
@@ -5549,7 +5514,7 @@
           <a:p>
             <a:pPr algn="l"/>
             <a:r>
-              <a:rPr sz="1600" b="1">
+              <a:rPr sz="1800" b="1">
                 <a:solidFill>
                   <a:srgbClr val="FFFFFF"/>
                 </a:solidFill>
@@ -5567,8 +5532,8 @@
         </p:nvSpPr>
         <p:spPr>
           <a:xfrm>
-            <a:off x="365760" y="1463040"/>
-            <a:ext cx="457200" cy="502920"/>
+            <a:off x="365760" y="1572768"/>
+            <a:ext cx="502920" cy="548640"/>
           </a:xfrm>
           <a:prstGeom prst="rect">
             <a:avLst/>
@@ -5610,8 +5575,8 @@
         </p:nvSpPr>
         <p:spPr>
           <a:xfrm>
-            <a:off x="365760" y="1508760"/>
-            <a:ext cx="457200" cy="411480"/>
+            <a:off x="365760" y="1627632"/>
+            <a:ext cx="502920" cy="457200"/>
           </a:xfrm>
           <a:prstGeom prst="rect">
             <a:avLst/>
@@ -5626,7 +5591,7 @@
           <a:p>
             <a:pPr algn="ctr"/>
             <a:r>
-              <a:rPr sz="1400" b="1">
+              <a:rPr sz="1500" b="1">
                 <a:solidFill>
                   <a:srgbClr val="FFFFFF"/>
                 </a:solidFill>
@@ -5644,8 +5609,8 @@
         </p:nvSpPr>
         <p:spPr>
           <a:xfrm>
-            <a:off x="868680" y="1463040"/>
-            <a:ext cx="10927080" cy="502920"/>
+            <a:off x="896112" y="1572768"/>
+            <a:ext cx="10899648" cy="548640"/>
           </a:xfrm>
           <a:prstGeom prst="rect">
             <a:avLst/>
@@ -5689,8 +5654,8 @@
         </p:nvSpPr>
         <p:spPr>
           <a:xfrm>
-            <a:off x="1005840" y="1508760"/>
-            <a:ext cx="10607040" cy="411480"/>
+            <a:off x="1024128" y="1636776"/>
+            <a:ext cx="10607040" cy="457200"/>
           </a:xfrm>
           <a:prstGeom prst="rect">
             <a:avLst/>
@@ -5705,7 +5670,7 @@
           <a:p>
             <a:pPr algn="l"/>
             <a:r>
-              <a:rPr sz="1200" b="0">
+              <a:rPr sz="1300" b="0">
                 <a:solidFill>
                   <a:srgbClr val="262626"/>
                 </a:solidFill>
@@ -5723,8 +5688,8 @@
         </p:nvSpPr>
         <p:spPr>
           <a:xfrm>
-            <a:off x="365760" y="2039112"/>
-            <a:ext cx="457200" cy="502920"/>
+            <a:off x="365760" y="2194560"/>
+            <a:ext cx="502920" cy="548640"/>
           </a:xfrm>
           <a:prstGeom prst="rect">
             <a:avLst/>
@@ -5766,8 +5731,8 @@
         </p:nvSpPr>
         <p:spPr>
           <a:xfrm>
-            <a:off x="365760" y="2084832"/>
-            <a:ext cx="457200" cy="411480"/>
+            <a:off x="365760" y="2249424"/>
+            <a:ext cx="502920" cy="457200"/>
           </a:xfrm>
           <a:prstGeom prst="rect">
             <a:avLst/>
@@ -5782,7 +5747,7 @@
           <a:p>
             <a:pPr algn="ctr"/>
             <a:r>
-              <a:rPr sz="1400" b="1">
+              <a:rPr sz="1500" b="1">
                 <a:solidFill>
                   <a:srgbClr val="FFFFFF"/>
                 </a:solidFill>
@@ -5800,8 +5765,8 @@
         </p:nvSpPr>
         <p:spPr>
           <a:xfrm>
-            <a:off x="868680" y="2039112"/>
-            <a:ext cx="10927080" cy="502920"/>
+            <a:off x="896112" y="2194560"/>
+            <a:ext cx="10899648" cy="548640"/>
           </a:xfrm>
           <a:prstGeom prst="rect">
             <a:avLst/>
@@ -5845,8 +5810,8 @@
         </p:nvSpPr>
         <p:spPr>
           <a:xfrm>
-            <a:off x="1005840" y="2084832"/>
-            <a:ext cx="10607040" cy="411480"/>
+            <a:off x="1024128" y="2258568"/>
+            <a:ext cx="10607040" cy="457200"/>
           </a:xfrm>
           <a:prstGeom prst="rect">
             <a:avLst/>
@@ -5861,7 +5826,7 @@
           <a:p>
             <a:pPr algn="l"/>
             <a:r>
-              <a:rPr sz="1200" b="0">
+              <a:rPr sz="1300" b="0">
                 <a:solidFill>
                   <a:srgbClr val="262626"/>
                 </a:solidFill>
@@ -5879,8 +5844,8 @@
         </p:nvSpPr>
         <p:spPr>
           <a:xfrm>
-            <a:off x="365760" y="2615184"/>
-            <a:ext cx="457200" cy="502920"/>
+            <a:off x="365760" y="2816352"/>
+            <a:ext cx="502920" cy="548640"/>
           </a:xfrm>
           <a:prstGeom prst="rect">
             <a:avLst/>
@@ -5922,8 +5887,8 @@
         </p:nvSpPr>
         <p:spPr>
           <a:xfrm>
-            <a:off x="365760" y="2660904"/>
-            <a:ext cx="457200" cy="411480"/>
+            <a:off x="365760" y="2871216"/>
+            <a:ext cx="502920" cy="457200"/>
           </a:xfrm>
           <a:prstGeom prst="rect">
             <a:avLst/>
@@ -5938,7 +5903,7 @@
           <a:p>
             <a:pPr algn="ctr"/>
             <a:r>
-              <a:rPr sz="1400" b="1">
+              <a:rPr sz="1500" b="1">
                 <a:solidFill>
                   <a:srgbClr val="FFFFFF"/>
                 </a:solidFill>
@@ -5956,8 +5921,8 @@
         </p:nvSpPr>
         <p:spPr>
           <a:xfrm>
-            <a:off x="868680" y="2615184"/>
-            <a:ext cx="10927080" cy="502920"/>
+            <a:off x="896112" y="2816352"/>
+            <a:ext cx="10899648" cy="548640"/>
           </a:xfrm>
           <a:prstGeom prst="rect">
             <a:avLst/>
@@ -6001,8 +5966,8 @@
         </p:nvSpPr>
         <p:spPr>
           <a:xfrm>
-            <a:off x="1005840" y="2660904"/>
-            <a:ext cx="10607040" cy="411480"/>
+            <a:off x="1024128" y="2880360"/>
+            <a:ext cx="10607040" cy="457200"/>
           </a:xfrm>
           <a:prstGeom prst="rect">
             <a:avLst/>
@@ -6017,7 +5982,7 @@
           <a:p>
             <a:pPr algn="l"/>
             <a:r>
-              <a:rPr sz="1200" b="0">
+              <a:rPr sz="1300" b="0">
                 <a:solidFill>
                   <a:srgbClr val="262626"/>
                 </a:solidFill>
@@ -6035,8 +6000,8 @@
         </p:nvSpPr>
         <p:spPr>
           <a:xfrm>
-            <a:off x="365760" y="3255264"/>
-            <a:ext cx="11430000" cy="274320"/>
+            <a:off x="365760" y="3493008"/>
+            <a:ext cx="11430000" cy="329184"/>
           </a:xfrm>
           <a:prstGeom prst="rect">
             <a:avLst/>
@@ -6051,7 +6016,7 @@
           <a:p>
             <a:pPr algn="l"/>
             <a:r>
-              <a:rPr sz="1000" b="0">
+              <a:rPr sz="1200" b="0">
                 <a:solidFill>
                   <a:srgbClr val="806000"/>
                 </a:solidFill>
@@ -6069,8 +6034,8 @@
         </p:nvSpPr>
         <p:spPr>
           <a:xfrm>
-            <a:off x="365760" y="3566160"/>
-            <a:ext cx="5760720" cy="320040"/>
+            <a:off x="365760" y="3858768"/>
+            <a:ext cx="5852160" cy="365760"/>
           </a:xfrm>
           <a:prstGeom prst="rect">
             <a:avLst/>
@@ -6112,8 +6077,8 @@
         </p:nvSpPr>
         <p:spPr>
           <a:xfrm>
-            <a:off x="502920" y="3593592"/>
-            <a:ext cx="5577840" cy="274320"/>
+            <a:off x="502920" y="3886200"/>
+            <a:ext cx="5669280" cy="310896"/>
           </a:xfrm>
           <a:prstGeom prst="rect">
             <a:avLst/>
@@ -6128,7 +6093,7 @@
           <a:p>
             <a:pPr algn="l"/>
             <a:r>
-              <a:rPr sz="1200" b="1">
+              <a:rPr sz="1400" b="1">
                 <a:solidFill>
                   <a:srgbClr val="FFFFFF"/>
                 </a:solidFill>
@@ -6147,8 +6112,8 @@
           <p:nvPr/>
         </p:nvGraphicFramePr>
         <p:xfrm>
-          <a:off x="365760" y="3931920"/>
-          <a:ext cx="5760720" cy="2560320"/>
+          <a:off x="365760" y="4261104"/>
+          <a:ext cx="5852160" cy="2331720"/>
         </p:xfrm>
         <a:graphic>
           <a:graphicData uri="http://schemas.openxmlformats.org/drawingml/2006/table">
@@ -6157,10 +6122,10 @@
                 <a:tableStyleId>{5C22544A-7EE6-4342-B048-85BDC9FD1C3A}</a:tableStyleId>
               </a:tblPr>
               <a:tblGrid>
-                <a:gridCol w="2880360"/>
-                <a:gridCol w="2880360"/>
+                <a:gridCol w="1097280"/>
+                <a:gridCol w="4754880"/>
               </a:tblGrid>
-              <a:tr h="284480">
+              <a:tr h="259080">
                 <a:tc>
                   <a:txBody>
                     <a:bodyPr/>
@@ -6168,7 +6133,7 @@
                     <a:p>
                       <a:pPr algn="ctr"/>
                       <a:r>
-                        <a:rPr sz="1100" b="1">
+                        <a:rPr sz="1300" b="1">
                           <a:solidFill>
                             <a:srgbClr val="FFFFFF"/>
                           </a:solidFill>
@@ -6190,7 +6155,7 @@
                     <a:p>
                       <a:pPr algn="ctr"/>
                       <a:r>
-                        <a:rPr sz="1100" b="1">
+                        <a:rPr sz="1300" b="1">
                           <a:solidFill>
                             <a:srgbClr val="FFFFFF"/>
                           </a:solidFill>
@@ -6206,14 +6171,14 @@
                   </a:tcPr>
                 </a:tc>
               </a:tr>
-              <a:tr h="284480">
+              <a:tr h="259080">
                 <a:tc>
                   <a:txBody>
                     <a:bodyPr/>
                     <a:lstStyle/>
                     <a:p>
                       <a:r>
-                        <a:rPr sz="1000">
+                        <a:rPr sz="1200">
                           <a:solidFill>
                             <a:srgbClr val="262626"/>
                           </a:solidFill>
@@ -6234,7 +6199,7 @@
                     <a:lstStyle/>
                     <a:p>
                       <a:r>
-                        <a:rPr sz="1000">
+                        <a:rPr sz="1200">
                           <a:solidFill>
                             <a:srgbClr val="262626"/>
                           </a:solidFill>
@@ -6250,14 +6215,14 @@
                   </a:tcPr>
                 </a:tc>
               </a:tr>
-              <a:tr h="284480">
+              <a:tr h="259080">
                 <a:tc>
                   <a:txBody>
                     <a:bodyPr/>
                     <a:lstStyle/>
                     <a:p>
                       <a:r>
-                        <a:rPr sz="1000">
+                        <a:rPr sz="1200">
                           <a:solidFill>
                             <a:srgbClr val="262626"/>
                           </a:solidFill>
@@ -6278,7 +6243,7 @@
                     <a:lstStyle/>
                     <a:p>
                       <a:r>
-                        <a:rPr sz="1000">
+                        <a:rPr sz="1200">
                           <a:solidFill>
                             <a:srgbClr val="262626"/>
                           </a:solidFill>
@@ -6294,14 +6259,14 @@
                   </a:tcPr>
                 </a:tc>
               </a:tr>
-              <a:tr h="284480">
+              <a:tr h="259080">
                 <a:tc>
                   <a:txBody>
                     <a:bodyPr/>
                     <a:lstStyle/>
                     <a:p>
                       <a:r>
-                        <a:rPr sz="1000">
+                        <a:rPr sz="1200">
                           <a:solidFill>
                             <a:srgbClr val="262626"/>
                           </a:solidFill>
@@ -6322,7 +6287,7 @@
                     <a:lstStyle/>
                     <a:p>
                       <a:r>
-                        <a:rPr sz="1000">
+                        <a:rPr sz="1200">
                           <a:solidFill>
                             <a:srgbClr val="262626"/>
                           </a:solidFill>
@@ -6338,14 +6303,14 @@
                   </a:tcPr>
                 </a:tc>
               </a:tr>
-              <a:tr h="284480">
+              <a:tr h="259080">
                 <a:tc>
                   <a:txBody>
                     <a:bodyPr/>
                     <a:lstStyle/>
                     <a:p>
                       <a:r>
-                        <a:rPr sz="1000">
+                        <a:rPr sz="1200">
                           <a:solidFill>
                             <a:srgbClr val="262626"/>
                           </a:solidFill>
@@ -6366,7 +6331,7 @@
                     <a:lstStyle/>
                     <a:p>
                       <a:r>
-                        <a:rPr sz="1000">
+                        <a:rPr sz="1200">
                           <a:solidFill>
                             <a:srgbClr val="262626"/>
                           </a:solidFill>
@@ -6382,14 +6347,14 @@
                   </a:tcPr>
                 </a:tc>
               </a:tr>
-              <a:tr h="284480">
+              <a:tr h="259080">
                 <a:tc>
                   <a:txBody>
                     <a:bodyPr/>
                     <a:lstStyle/>
                     <a:p>
                       <a:r>
-                        <a:rPr sz="1000">
+                        <a:rPr sz="1200">
                           <a:solidFill>
                             <a:srgbClr val="262626"/>
                           </a:solidFill>
@@ -6410,7 +6375,7 @@
                     <a:lstStyle/>
                     <a:p>
                       <a:r>
-                        <a:rPr sz="1000">
+                        <a:rPr sz="1200">
                           <a:solidFill>
                             <a:srgbClr val="262626"/>
                           </a:solidFill>
@@ -6426,14 +6391,14 @@
                   </a:tcPr>
                 </a:tc>
               </a:tr>
-              <a:tr h="284480">
+              <a:tr h="259080">
                 <a:tc>
                   <a:txBody>
                     <a:bodyPr/>
                     <a:lstStyle/>
                     <a:p>
                       <a:r>
-                        <a:rPr sz="1000">
+                        <a:rPr sz="1200">
                           <a:solidFill>
                             <a:srgbClr val="262626"/>
                           </a:solidFill>
@@ -6454,7 +6419,7 @@
                     <a:lstStyle/>
                     <a:p>
                       <a:r>
-                        <a:rPr sz="1000">
+                        <a:rPr sz="1200">
                           <a:solidFill>
                             <a:srgbClr val="262626"/>
                           </a:solidFill>
@@ -6470,14 +6435,14 @@
                   </a:tcPr>
                 </a:tc>
               </a:tr>
-              <a:tr h="284480">
+              <a:tr h="259080">
                 <a:tc>
                   <a:txBody>
                     <a:bodyPr/>
                     <a:lstStyle/>
                     <a:p>
                       <a:r>
-                        <a:rPr sz="1000">
+                        <a:rPr sz="1200">
                           <a:solidFill>
                             <a:srgbClr val="262626"/>
                           </a:solidFill>
@@ -6498,7 +6463,7 @@
                     <a:lstStyle/>
                     <a:p>
                       <a:r>
-                        <a:rPr sz="1000">
+                        <a:rPr sz="1200">
                           <a:solidFill>
                             <a:srgbClr val="262626"/>
                           </a:solidFill>
@@ -6514,14 +6479,14 @@
                   </a:tcPr>
                 </a:tc>
               </a:tr>
-              <a:tr h="284480">
+              <a:tr h="259080">
                 <a:tc>
                   <a:txBody>
                     <a:bodyPr/>
                     <a:lstStyle/>
                     <a:p>
                       <a:r>
-                        <a:rPr sz="1000">
+                        <a:rPr sz="1200">
                           <a:solidFill>
                             <a:srgbClr val="262626"/>
                           </a:solidFill>
@@ -6542,7 +6507,7 @@
                     <a:lstStyle/>
                     <a:p>
                       <a:r>
-                        <a:rPr sz="1000">
+                        <a:rPr sz="1200">
                           <a:solidFill>
                             <a:srgbClr val="262626"/>
                           </a:solidFill>
@@ -6570,8 +6535,8 @@
         </p:nvSpPr>
         <p:spPr>
           <a:xfrm>
-            <a:off x="6400800" y="3566160"/>
-            <a:ext cx="5394960" cy="320040"/>
+            <a:off x="6492240" y="3858768"/>
+            <a:ext cx="5303520" cy="365760"/>
           </a:xfrm>
           <a:prstGeom prst="rect">
             <a:avLst/>
@@ -6613,8 +6578,8 @@
         </p:nvSpPr>
         <p:spPr>
           <a:xfrm>
-            <a:off x="6537960" y="3593592"/>
-            <a:ext cx="5212080" cy="274320"/>
+            <a:off x="6629400" y="3886200"/>
+            <a:ext cx="5120640" cy="310896"/>
           </a:xfrm>
           <a:prstGeom prst="rect">
             <a:avLst/>
@@ -6629,7 +6594,7 @@
           <a:p>
             <a:pPr algn="l"/>
             <a:r>
-              <a:rPr sz="1200" b="1">
+              <a:rPr sz="1400" b="1">
                 <a:solidFill>
                   <a:srgbClr val="FFFFFF"/>
                 </a:solidFill>
@@ -6648,8 +6613,8 @@
           <p:nvPr/>
         </p:nvGraphicFramePr>
         <p:xfrm>
-          <a:off x="6400800" y="3931920"/>
-          <a:ext cx="5394960" cy="2011680"/>
+          <a:off x="6492240" y="4261104"/>
+          <a:ext cx="5303520" cy="1920240"/>
         </p:xfrm>
         <a:graphic>
           <a:graphicData uri="http://schemas.openxmlformats.org/drawingml/2006/table">
@@ -6658,10 +6623,10 @@
                 <a:tableStyleId>{5C22544A-7EE6-4342-B048-85BDC9FD1C3A}</a:tableStyleId>
               </a:tblPr>
               <a:tblGrid>
-                <a:gridCol w="2697480"/>
-                <a:gridCol w="2697480"/>
+                <a:gridCol w="1097280"/>
+                <a:gridCol w="4206240"/>
               </a:tblGrid>
-              <a:tr h="335280">
+              <a:tr h="320040">
                 <a:tc>
                   <a:txBody>
                     <a:bodyPr/>
@@ -6669,7 +6634,7 @@
                     <a:p>
                       <a:pPr algn="ctr"/>
                       <a:r>
-                        <a:rPr sz="1100" b="1">
+                        <a:rPr sz="1300" b="1">
                           <a:solidFill>
                             <a:srgbClr val="FFFFFF"/>
                           </a:solidFill>
@@ -6691,7 +6656,7 @@
                     <a:p>
                       <a:pPr algn="ctr"/>
                       <a:r>
-                        <a:rPr sz="1100" b="1">
+                        <a:rPr sz="1300" b="1">
                           <a:solidFill>
                             <a:srgbClr val="FFFFFF"/>
                           </a:solidFill>
@@ -6707,14 +6672,14 @@
                   </a:tcPr>
                 </a:tc>
               </a:tr>
-              <a:tr h="335280">
+              <a:tr h="320040">
                 <a:tc>
                   <a:txBody>
                     <a:bodyPr/>
                     <a:lstStyle/>
                     <a:p>
                       <a:r>
-                        <a:rPr sz="1000">
+                        <a:rPr sz="1200">
                           <a:solidFill>
                             <a:srgbClr val="262626"/>
                           </a:solidFill>
@@ -6735,7 +6700,7 @@
                     <a:lstStyle/>
                     <a:p>
                       <a:r>
-                        <a:rPr sz="1000">
+                        <a:rPr sz="1200">
                           <a:solidFill>
                             <a:srgbClr val="262626"/>
                           </a:solidFill>
@@ -6751,14 +6716,14 @@
                   </a:tcPr>
                 </a:tc>
               </a:tr>
-              <a:tr h="335280">
+              <a:tr h="320040">
                 <a:tc>
                   <a:txBody>
                     <a:bodyPr/>
                     <a:lstStyle/>
                     <a:p>
                       <a:r>
-                        <a:rPr sz="1000">
+                        <a:rPr sz="1200">
                           <a:solidFill>
                             <a:srgbClr val="262626"/>
                           </a:solidFill>
@@ -6779,7 +6744,7 @@
                     <a:lstStyle/>
                     <a:p>
                       <a:r>
-                        <a:rPr sz="1000">
+                        <a:rPr sz="1200">
                           <a:solidFill>
                             <a:srgbClr val="262626"/>
                           </a:solidFill>
@@ -6795,14 +6760,14 @@
                   </a:tcPr>
                 </a:tc>
               </a:tr>
-              <a:tr h="335280">
+              <a:tr h="320040">
                 <a:tc>
                   <a:txBody>
                     <a:bodyPr/>
                     <a:lstStyle/>
                     <a:p>
                       <a:r>
-                        <a:rPr sz="1000">
+                        <a:rPr sz="1200">
                           <a:solidFill>
                             <a:srgbClr val="262626"/>
                           </a:solidFill>
@@ -6823,7 +6788,7 @@
                     <a:lstStyle/>
                     <a:p>
                       <a:r>
-                        <a:rPr sz="1000">
+                        <a:rPr sz="1200">
                           <a:solidFill>
                             <a:srgbClr val="262626"/>
                           </a:solidFill>
@@ -6839,14 +6804,14 @@
                   </a:tcPr>
                 </a:tc>
               </a:tr>
-              <a:tr h="335280">
+              <a:tr h="320040">
                 <a:tc>
                   <a:txBody>
                     <a:bodyPr/>
                     <a:lstStyle/>
                     <a:p>
                       <a:r>
-                        <a:rPr sz="1000">
+                        <a:rPr sz="1200">
                           <a:solidFill>
                             <a:srgbClr val="262626"/>
                           </a:solidFill>
@@ -6867,7 +6832,7 @@
                     <a:lstStyle/>
                     <a:p>
                       <a:r>
-                        <a:rPr sz="1000">
+                        <a:rPr sz="1200">
                           <a:solidFill>
                             <a:srgbClr val="262626"/>
                           </a:solidFill>
@@ -6883,14 +6848,14 @@
                   </a:tcPr>
                 </a:tc>
               </a:tr>
-              <a:tr h="335280">
+              <a:tr h="320040">
                 <a:tc>
                   <a:txBody>
                     <a:bodyPr/>
                     <a:lstStyle/>
                     <a:p>
                       <a:r>
-                        <a:rPr sz="1000">
+                        <a:rPr sz="1200">
                           <a:solidFill>
                             <a:srgbClr val="262626"/>
                           </a:solidFill>
@@ -6911,7 +6876,7 @@
                     <a:lstStyle/>
                     <a:p>
                       <a:r>
-                        <a:rPr sz="1000">
+                        <a:rPr sz="1200">
                           <a:solidFill>
                             <a:srgbClr val="262626"/>
                           </a:solidFill>
@@ -6958,7 +6923,7 @@
         <p:spPr>
           <a:xfrm>
             <a:off x="0" y="0"/>
-            <a:ext cx="12188952" cy="914400"/>
+            <a:ext cx="12188952" cy="960120"/>
           </a:xfrm>
           <a:prstGeom prst="rect">
             <a:avLst/>
@@ -7001,7 +6966,7 @@
         <p:spPr>
           <a:xfrm>
             <a:off x="365760" y="137160"/>
-            <a:ext cx="10972800" cy="640080"/>
+            <a:ext cx="10972800" cy="685800"/>
           </a:xfrm>
           <a:prstGeom prst="rect">
             <a:avLst/>
@@ -7016,7 +6981,7 @@
           <a:p>
             <a:pPr algn="l"/>
             <a:r>
-              <a:rPr sz="2200" b="1">
+              <a:rPr sz="2400" b="1">
                 <a:solidFill>
                   <a:srgbClr val="FFFFFF"/>
                 </a:solidFill>
@@ -7050,7 +7015,7 @@
           <a:p>
             <a:pPr algn="l"/>
             <a:r>
-              <a:rPr sz="900" b="0">
+              <a:rPr sz="1000" b="0">
                 <a:solidFill>
                   <a:srgbClr val="808080"/>
                 </a:solidFill>
@@ -7084,7 +7049,7 @@
           <a:p>
             <a:pPr algn="r"/>
             <a:r>
-              <a:rPr sz="900" b="0">
+              <a:rPr sz="1000" b="0">
                 <a:solidFill>
                   <a:srgbClr val="808080"/>
                 </a:solidFill>
@@ -7102,8 +7067,8 @@
         </p:nvSpPr>
         <p:spPr>
           <a:xfrm>
-            <a:off x="365760" y="960120"/>
-            <a:ext cx="11430000" cy="411480"/>
+            <a:off x="365760" y="1005840"/>
+            <a:ext cx="11430000" cy="457200"/>
           </a:xfrm>
           <a:prstGeom prst="rect">
             <a:avLst/>
@@ -7145,8 +7110,8 @@
         </p:nvSpPr>
         <p:spPr>
           <a:xfrm>
-            <a:off x="502920" y="987552"/>
-            <a:ext cx="10972800" cy="365760"/>
+            <a:off x="502920" y="1042416"/>
+            <a:ext cx="10972800" cy="402336"/>
           </a:xfrm>
           <a:prstGeom prst="rect">
             <a:avLst/>
@@ -7161,7 +7126,7 @@
           <a:p>
             <a:pPr algn="l"/>
             <a:r>
-              <a:rPr sz="1600" b="1">
+              <a:rPr sz="1800" b="1">
                 <a:solidFill>
                   <a:srgbClr val="FFFFFF"/>
                 </a:solidFill>
@@ -7179,8 +7144,8 @@
         </p:nvSpPr>
         <p:spPr>
           <a:xfrm>
-            <a:off x="365760" y="1508760"/>
-            <a:ext cx="5303520" cy="320040"/>
+            <a:off x="365760" y="1600200"/>
+            <a:ext cx="5394960" cy="365760"/>
           </a:xfrm>
           <a:prstGeom prst="rect">
             <a:avLst/>
@@ -7222,8 +7187,8 @@
         </p:nvSpPr>
         <p:spPr>
           <a:xfrm>
-            <a:off x="502920" y="1536192"/>
-            <a:ext cx="5120640" cy="274320"/>
+            <a:off x="502920" y="1627632"/>
+            <a:ext cx="5212080" cy="310896"/>
           </a:xfrm>
           <a:prstGeom prst="rect">
             <a:avLst/>
@@ -7238,7 +7203,7 @@
           <a:p>
             <a:pPr algn="l"/>
             <a:r>
-              <a:rPr sz="1300" b="1">
+              <a:rPr sz="1500" b="1">
                 <a:solidFill>
                   <a:srgbClr val="FFFFFF"/>
                 </a:solidFill>
@@ -7256,8 +7221,8 @@
         </p:nvSpPr>
         <p:spPr>
           <a:xfrm>
-            <a:off x="548640" y="1920240"/>
-            <a:ext cx="5029200" cy="502920"/>
+            <a:off x="548640" y="2057400"/>
+            <a:ext cx="5120640" cy="594360"/>
           </a:xfrm>
           <a:prstGeom prst="rect">
             <a:avLst/>
@@ -7272,7 +7237,7 @@
           <a:p>
             <a:pPr algn="l"/>
             <a:r>
-              <a:rPr sz="1200" b="0">
+              <a:rPr sz="1400" b="0">
                 <a:solidFill>
                   <a:srgbClr val="262626"/>
                 </a:solidFill>
@@ -7290,8 +7255,8 @@
         </p:nvSpPr>
         <p:spPr>
           <a:xfrm>
-            <a:off x="548640" y="2423160"/>
-            <a:ext cx="5029200" cy="502920"/>
+            <a:off x="548640" y="2651760"/>
+            <a:ext cx="5120640" cy="594360"/>
           </a:xfrm>
           <a:prstGeom prst="rect">
             <a:avLst/>
@@ -7306,7 +7271,7 @@
           <a:p>
             <a:pPr algn="l"/>
             <a:r>
-              <a:rPr sz="1200" b="0">
+              <a:rPr sz="1400" b="0">
                 <a:solidFill>
                   <a:srgbClr val="262626"/>
                 </a:solidFill>
@@ -7325,8 +7290,8 @@
         </p:nvSpPr>
         <p:spPr>
           <a:xfrm>
-            <a:off x="548640" y="2926080"/>
-            <a:ext cx="5029200" cy="502920"/>
+            <a:off x="548640" y="3246120"/>
+            <a:ext cx="5120640" cy="594360"/>
           </a:xfrm>
           <a:prstGeom prst="rect">
             <a:avLst/>
@@ -7341,7 +7306,7 @@
           <a:p>
             <a:pPr algn="l"/>
             <a:r>
-              <a:rPr sz="1200" b="0">
+              <a:rPr sz="1400" b="0">
                 <a:solidFill>
                   <a:srgbClr val="262626"/>
                 </a:solidFill>
@@ -7359,8 +7324,8 @@
         </p:nvSpPr>
         <p:spPr>
           <a:xfrm>
-            <a:off x="365760" y="3520440"/>
-            <a:ext cx="5303520" cy="320040"/>
+            <a:off x="365760" y="3886200"/>
+            <a:ext cx="5394960" cy="365760"/>
           </a:xfrm>
           <a:prstGeom prst="rect">
             <a:avLst/>
@@ -7402,8 +7367,8 @@
         </p:nvSpPr>
         <p:spPr>
           <a:xfrm>
-            <a:off x="502920" y="3547872"/>
-            <a:ext cx="5120640" cy="274320"/>
+            <a:off x="502920" y="3913632"/>
+            <a:ext cx="5212080" cy="310896"/>
           </a:xfrm>
           <a:prstGeom prst="rect">
             <a:avLst/>
@@ -7418,7 +7383,7 @@
           <a:p>
             <a:pPr algn="l"/>
             <a:r>
-              <a:rPr sz="1300" b="1">
+              <a:rPr sz="1500" b="1">
                 <a:solidFill>
                   <a:srgbClr val="FFFFFF"/>
                 </a:solidFill>
@@ -7436,8 +7401,8 @@
         </p:nvSpPr>
         <p:spPr>
           <a:xfrm>
-            <a:off x="548640" y="3931920"/>
-            <a:ext cx="5029200" cy="384048"/>
+            <a:off x="548640" y="4343400"/>
+            <a:ext cx="5120640" cy="457200"/>
           </a:xfrm>
           <a:prstGeom prst="rect">
             <a:avLst/>
@@ -7452,7 +7417,7 @@
           <a:p>
             <a:pPr algn="l"/>
             <a:r>
-              <a:rPr sz="1200" b="0">
+              <a:rPr sz="1400" b="0">
                 <a:solidFill>
                   <a:srgbClr val="262626"/>
                 </a:solidFill>
@@ -7470,8 +7435,8 @@
         </p:nvSpPr>
         <p:spPr>
           <a:xfrm>
-            <a:off x="548640" y="4315968"/>
-            <a:ext cx="5029200" cy="384048"/>
+            <a:off x="548640" y="4800600"/>
+            <a:ext cx="5120640" cy="457200"/>
           </a:xfrm>
           <a:prstGeom prst="rect">
             <a:avLst/>
@@ -7486,7 +7451,7 @@
           <a:p>
             <a:pPr algn="l"/>
             <a:r>
-              <a:rPr sz="1200" b="0">
+              <a:rPr sz="1400" b="0">
                 <a:solidFill>
                   <a:srgbClr val="262626"/>
                 </a:solidFill>
@@ -7504,8 +7469,8 @@
         </p:nvSpPr>
         <p:spPr>
           <a:xfrm>
-            <a:off x="548640" y="4700016"/>
-            <a:ext cx="5029200" cy="384048"/>
+            <a:off x="548640" y="5257800"/>
+            <a:ext cx="5120640" cy="457200"/>
           </a:xfrm>
           <a:prstGeom prst="rect">
             <a:avLst/>
@@ -7520,7 +7485,7 @@
           <a:p>
             <a:pPr algn="l"/>
             <a:r>
-              <a:rPr sz="1200" b="0">
+              <a:rPr sz="1400" b="0">
                 <a:solidFill>
                   <a:srgbClr val="262626"/>
                 </a:solidFill>
@@ -7538,8 +7503,8 @@
         </p:nvSpPr>
         <p:spPr>
           <a:xfrm>
-            <a:off x="548640" y="5084064"/>
-            <a:ext cx="5029200" cy="384048"/>
+            <a:off x="548640" y="5715000"/>
+            <a:ext cx="5120640" cy="457200"/>
           </a:xfrm>
           <a:prstGeom prst="rect">
             <a:avLst/>
@@ -7554,7 +7519,7 @@
           <a:p>
             <a:pPr algn="l"/>
             <a:r>
-              <a:rPr sz="1200" b="0">
+              <a:rPr sz="1400" b="0">
                 <a:solidFill>
                   <a:srgbClr val="262626"/>
                 </a:solidFill>
@@ -7572,8 +7537,8 @@
         </p:nvSpPr>
         <p:spPr>
           <a:xfrm>
-            <a:off x="6035040" y="1508760"/>
-            <a:ext cx="5760720" cy="320040"/>
+            <a:off x="6126480" y="1600200"/>
+            <a:ext cx="5669280" cy="365760"/>
           </a:xfrm>
           <a:prstGeom prst="rect">
             <a:avLst/>
@@ -7615,8 +7580,8 @@
         </p:nvSpPr>
         <p:spPr>
           <a:xfrm>
-            <a:off x="6172200" y="1536192"/>
-            <a:ext cx="5577840" cy="274320"/>
+            <a:off x="6263640" y="1627632"/>
+            <a:ext cx="5486400" cy="310896"/>
           </a:xfrm>
           <a:prstGeom prst="rect">
             <a:avLst/>
@@ -7631,7 +7596,7 @@
           <a:p>
             <a:pPr algn="l"/>
             <a:r>
-              <a:rPr sz="1300" b="1">
+              <a:rPr sz="1500" b="1">
                 <a:solidFill>
                   <a:srgbClr val="FFFFFF"/>
                 </a:solidFill>
@@ -7650,8 +7615,8 @@
           <p:nvPr/>
         </p:nvGraphicFramePr>
         <p:xfrm>
-          <a:off x="6035040" y="1901952"/>
-          <a:ext cx="5760720" cy="1188720"/>
+          <a:off x="6126480" y="2039112"/>
+          <a:ext cx="5669280" cy="1371600"/>
         </p:xfrm>
         <a:graphic>
           <a:graphicData uri="http://schemas.openxmlformats.org/drawingml/2006/table">
@@ -7660,10 +7625,10 @@
                 <a:tableStyleId>{5C22544A-7EE6-4342-B048-85BDC9FD1C3A}</a:tableStyleId>
               </a:tblPr>
               <a:tblGrid>
-                <a:gridCol w="2880360"/>
-                <a:gridCol w="2880360"/>
+                <a:gridCol w="457200"/>
+                <a:gridCol w="5212080"/>
               </a:tblGrid>
-              <a:tr h="297180">
+              <a:tr h="342900">
                 <a:tc>
                   <a:txBody>
                     <a:bodyPr/>
@@ -7671,7 +7636,7 @@
                     <a:p>
                       <a:pPr algn="ctr"/>
                       <a:r>
-                        <a:rPr sz="1100" b="1">
+                        <a:rPr sz="1400" b="1">
                           <a:solidFill>
                             <a:srgbClr val="FFFFFF"/>
                           </a:solidFill>
@@ -7693,7 +7658,7 @@
                     <a:p>
                       <a:pPr algn="ctr"/>
                       <a:r>
-                        <a:rPr sz="1100" b="1">
+                        <a:rPr sz="1400" b="1">
                           <a:solidFill>
                             <a:srgbClr val="FFFFFF"/>
                           </a:solidFill>
@@ -7709,14 +7674,14 @@
                   </a:tcPr>
                 </a:tc>
               </a:tr>
-              <a:tr h="297180">
+              <a:tr h="342900">
                 <a:tc>
                   <a:txBody>
                     <a:bodyPr/>
                     <a:lstStyle/>
                     <a:p>
                       <a:r>
-                        <a:rPr sz="1000">
+                        <a:rPr sz="1400">
                           <a:solidFill>
                             <a:srgbClr val="262626"/>
                           </a:solidFill>
@@ -7737,7 +7702,7 @@
                     <a:lstStyle/>
                     <a:p>
                       <a:r>
-                        <a:rPr sz="1000">
+                        <a:rPr sz="1400">
                           <a:solidFill>
                             <a:srgbClr val="262626"/>
                           </a:solidFill>
@@ -7753,14 +7718,14 @@
                   </a:tcPr>
                 </a:tc>
               </a:tr>
-              <a:tr h="297180">
+              <a:tr h="342900">
                 <a:tc>
                   <a:txBody>
                     <a:bodyPr/>
                     <a:lstStyle/>
                     <a:p>
                       <a:r>
-                        <a:rPr sz="1000">
+                        <a:rPr sz="1400">
                           <a:solidFill>
                             <a:srgbClr val="262626"/>
                           </a:solidFill>
@@ -7781,7 +7746,7 @@
                     <a:lstStyle/>
                     <a:p>
                       <a:r>
-                        <a:rPr sz="1000">
+                        <a:rPr sz="1400">
                           <a:solidFill>
                             <a:srgbClr val="262626"/>
                           </a:solidFill>
@@ -7797,14 +7762,14 @@
                   </a:tcPr>
                 </a:tc>
               </a:tr>
-              <a:tr h="297180">
+              <a:tr h="342900">
                 <a:tc>
                   <a:txBody>
                     <a:bodyPr/>
                     <a:lstStyle/>
                     <a:p>
                       <a:r>
-                        <a:rPr sz="1000">
+                        <a:rPr sz="1400">
                           <a:solidFill>
                             <a:srgbClr val="262626"/>
                           </a:solidFill>
@@ -7825,7 +7790,7 @@
                     <a:lstStyle/>
                     <a:p>
                       <a:r>
-                        <a:rPr sz="1000">
+                        <a:rPr sz="1400">
                           <a:solidFill>
                             <a:srgbClr val="262626"/>
                           </a:solidFill>
@@ -7853,8 +7818,8 @@
         </p:nvSpPr>
         <p:spPr>
           <a:xfrm>
-            <a:off x="6035040" y="3246120"/>
-            <a:ext cx="5760720" cy="347472"/>
+            <a:off x="6126480" y="3566160"/>
+            <a:ext cx="5669280" cy="402336"/>
           </a:xfrm>
           <a:prstGeom prst="rect">
             <a:avLst/>
@@ -7896,8 +7861,8 @@
         </p:nvSpPr>
         <p:spPr>
           <a:xfrm>
-            <a:off x="6172200" y="3264408"/>
-            <a:ext cx="5577840" cy="320040"/>
+            <a:off x="6263640" y="3593592"/>
+            <a:ext cx="5486400" cy="347472"/>
           </a:xfrm>
           <a:prstGeom prst="rect">
             <a:avLst/>
@@ -7912,7 +7877,7 @@
           <a:p>
             <a:pPr algn="l"/>
             <a:r>
-              <a:rPr sz="1200" b="1">
+              <a:rPr sz="1400" b="1">
                 <a:solidFill>
                   <a:srgbClr val="804000"/>
                 </a:solidFill>
@@ -7930,8 +7895,8 @@
         </p:nvSpPr>
         <p:spPr>
           <a:xfrm>
-            <a:off x="6172200" y="3657600"/>
-            <a:ext cx="5486400" cy="640080"/>
+            <a:off x="6263640" y="4069080"/>
+            <a:ext cx="5394960" cy="685800"/>
           </a:xfrm>
           <a:prstGeom prst="rect">
             <a:avLst/>
@@ -7946,7 +7911,7 @@
           <a:p>
             <a:pPr algn="l"/>
             <a:r>
-              <a:rPr sz="1100" b="0">
+              <a:rPr sz="1400" b="0">
                 <a:solidFill>
                   <a:srgbClr val="262626"/>
                 </a:solidFill>
@@ -7965,8 +7930,8 @@
         </p:nvSpPr>
         <p:spPr>
           <a:xfrm>
-            <a:off x="6172200" y="4297680"/>
-            <a:ext cx="5486400" cy="640080"/>
+            <a:off x="6263640" y="4754880"/>
+            <a:ext cx="5394960" cy="685800"/>
           </a:xfrm>
           <a:prstGeom prst="rect">
             <a:avLst/>
@@ -7981,13 +7946,13 @@
           <a:p>
             <a:pPr algn="l"/>
             <a:r>
-              <a:rPr sz="1100" b="0">
+              <a:rPr sz="1400" b="0">
                 <a:solidFill>
                   <a:srgbClr val="262626"/>
                 </a:solidFill>
               </a:rPr>
               <a:t>● 一方、現時点では計画策定が優先。
-　 プロセス設計はコンサル選定後でも整備可能</a:t>
+　 コンサル選定後に整備する選択肢もある</a:t>
             </a:r>
           </a:p>
         </p:txBody>
@@ -8000,8 +7965,8 @@
         </p:nvSpPr>
         <p:spPr>
           <a:xfrm>
-            <a:off x="6172200" y="4937760"/>
-            <a:ext cx="5486400" cy="640080"/>
+            <a:off x="6263640" y="5440680"/>
+            <a:ext cx="5394960" cy="685800"/>
           </a:xfrm>
           <a:prstGeom prst="rect">
             <a:avLst/>
@@ -8016,13 +7981,12 @@
           <a:p>
             <a:pPr algn="l"/>
             <a:r>
-              <a:rPr sz="1100" b="0">
+              <a:rPr sz="1400" b="0">
                 <a:solidFill>
                   <a:srgbClr val="262626"/>
                 </a:solidFill>
               </a:rPr>
-              <a:t>● 論点：今の段階で仕組みを検討するか、
-　 コンサル選定後に改めて議論するか</a:t>
+              <a:t>● 論点：今の段階で検討するか、後回しにするか</a:t>
             </a:r>
           </a:p>
         </p:txBody>
@@ -8054,7 +8018,7 @@
         <p:spPr>
           <a:xfrm>
             <a:off x="0" y="0"/>
-            <a:ext cx="12188952" cy="914400"/>
+            <a:ext cx="12188952" cy="960120"/>
           </a:xfrm>
           <a:prstGeom prst="rect">
             <a:avLst/>
@@ -8097,7 +8061,7 @@
         <p:spPr>
           <a:xfrm>
             <a:off x="365760" y="137160"/>
-            <a:ext cx="10972800" cy="640080"/>
+            <a:ext cx="10972800" cy="685800"/>
           </a:xfrm>
           <a:prstGeom prst="rect">
             <a:avLst/>
@@ -8112,7 +8076,7 @@
           <a:p>
             <a:pPr algn="l"/>
             <a:r>
-              <a:rPr sz="2200" b="1">
+              <a:rPr sz="2400" b="1">
                 <a:solidFill>
                   <a:srgbClr val="FFFFFF"/>
                 </a:solidFill>
@@ -8146,7 +8110,7 @@
           <a:p>
             <a:pPr algn="l"/>
             <a:r>
-              <a:rPr sz="900" b="0">
+              <a:rPr sz="1000" b="0">
                 <a:solidFill>
                   <a:srgbClr val="808080"/>
                 </a:solidFill>
@@ -8180,7 +8144,7 @@
           <a:p>
             <a:pPr algn="r"/>
             <a:r>
-              <a:rPr sz="900" b="0">
+              <a:rPr sz="1000" b="0">
                 <a:solidFill>
                   <a:srgbClr val="808080"/>
                 </a:solidFill>
@@ -8198,8 +8162,8 @@
         </p:nvSpPr>
         <p:spPr>
           <a:xfrm>
-            <a:off x="365760" y="987552"/>
-            <a:ext cx="11430000" cy="384048"/>
+            <a:off x="365760" y="1024128"/>
+            <a:ext cx="11430000" cy="438912"/>
           </a:xfrm>
           <a:prstGeom prst="rect">
             <a:avLst/>
@@ -8241,8 +8205,8 @@
         </p:nvSpPr>
         <p:spPr>
           <a:xfrm>
-            <a:off x="502920" y="1005840"/>
-            <a:ext cx="11155680" cy="347472"/>
+            <a:off x="502920" y="1042415"/>
+            <a:ext cx="11155680" cy="384048"/>
           </a:xfrm>
           <a:prstGeom prst="rect">
             <a:avLst/>
@@ -8257,12 +8221,12 @@
           <a:p>
             <a:pPr algn="l"/>
             <a:r>
-              <a:rPr sz="1200" b="0">
+              <a:rPr sz="1400" b="0">
                 <a:solidFill>
                   <a:srgbClr val="1F3564"/>
                 </a:solidFill>
               </a:rPr>
-              <a:t>長期計画策定と並行し、省エネ改修・緊急修繕は早期に独立した検討ラインで動く。　各提案は修繕積立金への影響を確認しながら進める。</a:t>
+              <a:t>長期計画策定と並行し、省エネ改修・緊急修繕は早期に独立した検討ラインで動く。各提案は修繕積立金への影響を確認しながら進める。</a:t>
             </a:r>
           </a:p>
         </p:txBody>
@@ -8276,8 +8240,8 @@
           <p:nvPr/>
         </p:nvGraphicFramePr>
         <p:xfrm>
-          <a:off x="365760" y="1508760"/>
-          <a:ext cx="11430000" cy="2377440"/>
+          <a:off x="365760" y="1572768"/>
+          <a:ext cx="11430000" cy="2651760"/>
         </p:xfrm>
         <a:graphic>
           <a:graphicData uri="http://schemas.openxmlformats.org/drawingml/2006/table">
@@ -8286,11 +8250,11 @@
                 <a:tableStyleId>{5C22544A-7EE6-4342-B048-85BDC9FD1C3A}</a:tableStyleId>
               </a:tblPr>
               <a:tblGrid>
-                <a:gridCol w="3810000"/>
-                <a:gridCol w="3810000"/>
-                <a:gridCol w="3810000"/>
+                <a:gridCol w="1645920"/>
+                <a:gridCol w="7772400"/>
+                <a:gridCol w="2011680"/>
               </a:tblGrid>
-              <a:tr h="792480">
+              <a:tr h="883920">
                 <a:tc>
                   <a:txBody>
                     <a:bodyPr/>
@@ -8298,7 +8262,7 @@
                     <a:p>
                       <a:pPr algn="ctr"/>
                       <a:r>
-                        <a:rPr sz="1100" b="1">
+                        <a:rPr sz="1500" b="1">
                           <a:solidFill>
                             <a:srgbClr val="FFFFFF"/>
                           </a:solidFill>
@@ -8320,7 +8284,7 @@
                     <a:p>
                       <a:pPr algn="ctr"/>
                       <a:r>
-                        <a:rPr sz="1100" b="1">
+                        <a:rPr sz="1500" b="1">
                           <a:solidFill>
                             <a:srgbClr val="FFFFFF"/>
                           </a:solidFill>
@@ -8342,7 +8306,7 @@
                     <a:p>
                       <a:pPr algn="ctr"/>
                       <a:r>
-                        <a:rPr sz="1100" b="1">
+                        <a:rPr sz="1500" b="1">
                           <a:solidFill>
                             <a:srgbClr val="FFFFFF"/>
                           </a:solidFill>
@@ -8358,14 +8322,14 @@
                   </a:tcPr>
                 </a:tc>
               </a:tr>
-              <a:tr h="792480">
+              <a:tr h="883920">
                 <a:tc>
                   <a:txBody>
                     <a:bodyPr/>
                     <a:lstStyle/>
                     <a:p>
                       <a:r>
-                        <a:rPr sz="1000">
+                        <a:rPr sz="1400">
                           <a:solidFill>
                             <a:srgbClr val="262626"/>
                           </a:solidFill>
@@ -8386,7 +8350,7 @@
                     <a:lstStyle/>
                     <a:p>
                       <a:r>
-                        <a:rPr sz="1000">
+                        <a:rPr sz="1400">
                           <a:solidFill>
                             <a:srgbClr val="262626"/>
                           </a:solidFill>
@@ -8409,7 +8373,7 @@
                     <a:lstStyle/>
                     <a:p>
                       <a:r>
-                        <a:rPr sz="1000">
+                        <a:rPr sz="1400">
                           <a:solidFill>
                             <a:srgbClr val="262626"/>
                           </a:solidFill>
@@ -8425,14 +8389,14 @@
                   </a:tcPr>
                 </a:tc>
               </a:tr>
-              <a:tr h="792480">
+              <a:tr h="883920">
                 <a:tc>
                   <a:txBody>
                     <a:bodyPr/>
                     <a:lstStyle/>
                     <a:p>
                       <a:r>
-                        <a:rPr sz="1000">
+                        <a:rPr sz="1400">
                           <a:solidFill>
                             <a:srgbClr val="262626"/>
                           </a:solidFill>
@@ -8453,7 +8417,7 @@
                     <a:lstStyle/>
                     <a:p>
                       <a:r>
-                        <a:rPr sz="1000">
+                        <a:rPr sz="1400">
                           <a:solidFill>
                             <a:srgbClr val="262626"/>
                           </a:solidFill>
@@ -8476,7 +8440,7 @@
                     <a:lstStyle/>
                     <a:p>
                       <a:r>
-                        <a:rPr sz="1000">
+                        <a:rPr sz="1400">
                           <a:solidFill>
                             <a:srgbClr val="262626"/>
                           </a:solidFill>
@@ -8504,8 +8468,8 @@
         </p:nvSpPr>
         <p:spPr>
           <a:xfrm>
-            <a:off x="365760" y="4069080"/>
-            <a:ext cx="11430000" cy="347472"/>
+            <a:off x="365760" y="4407408"/>
+            <a:ext cx="11430000" cy="402336"/>
           </a:xfrm>
           <a:prstGeom prst="rect">
             <a:avLst/>
@@ -8547,8 +8511,8 @@
         </p:nvSpPr>
         <p:spPr>
           <a:xfrm>
-            <a:off x="502920" y="4087368"/>
-            <a:ext cx="11155680" cy="320040"/>
+            <a:off x="502920" y="4434840"/>
+            <a:ext cx="11155680" cy="347472"/>
           </a:xfrm>
           <a:prstGeom prst="rect">
             <a:avLst/>
@@ -8563,7 +8527,7 @@
           <a:p>
             <a:pPr algn="l"/>
             <a:r>
-              <a:rPr sz="1300" b="1">
+              <a:rPr sz="1500" b="1">
                 <a:solidFill>
                   <a:srgbClr val="FFFFFF"/>
                 </a:solidFill>
@@ -8581,8 +8545,8 @@
         </p:nvSpPr>
         <p:spPr>
           <a:xfrm>
-            <a:off x="548640" y="4526280"/>
-            <a:ext cx="11155680" cy="411480"/>
+            <a:off x="548640" y="4937760"/>
+            <a:ext cx="11155680" cy="475488"/>
           </a:xfrm>
           <a:prstGeom prst="rect">
             <a:avLst/>
@@ -8597,7 +8561,7 @@
           <a:p>
             <a:pPr algn="l"/>
             <a:r>
-              <a:rPr sz="1300" b="0">
+              <a:rPr sz="1500" b="0">
                 <a:solidFill>
                   <a:srgbClr val="262626"/>
                 </a:solidFill>
@@ -8615,8 +8579,8 @@
         </p:nvSpPr>
         <p:spPr>
           <a:xfrm>
-            <a:off x="548640" y="4983480"/>
-            <a:ext cx="11155680" cy="411480"/>
+            <a:off x="548640" y="5440680"/>
+            <a:ext cx="11155680" cy="475488"/>
           </a:xfrm>
           <a:prstGeom prst="rect">
             <a:avLst/>
@@ -8631,7 +8595,7 @@
           <a:p>
             <a:pPr algn="l"/>
             <a:r>
-              <a:rPr sz="1300" b="0">
+              <a:rPr sz="1500" b="0">
                 <a:solidFill>
                   <a:srgbClr val="262626"/>
                 </a:solidFill>
@@ -8668,7 +8632,7 @@
         <p:spPr>
           <a:xfrm>
             <a:off x="0" y="0"/>
-            <a:ext cx="12188952" cy="914400"/>
+            <a:ext cx="12188952" cy="960120"/>
           </a:xfrm>
           <a:prstGeom prst="rect">
             <a:avLst/>
@@ -8711,7 +8675,7 @@
         <p:spPr>
           <a:xfrm>
             <a:off x="365760" y="137160"/>
-            <a:ext cx="10972800" cy="640080"/>
+            <a:ext cx="10972800" cy="685800"/>
           </a:xfrm>
           <a:prstGeom prst="rect">
             <a:avLst/>
@@ -8726,7 +8690,7 @@
           <a:p>
             <a:pPr algn="l"/>
             <a:r>
-              <a:rPr sz="2200" b="1">
+              <a:rPr sz="2400" b="1">
                 <a:solidFill>
                   <a:srgbClr val="FFFFFF"/>
                 </a:solidFill>
@@ -8760,7 +8724,7 @@
           <a:p>
             <a:pPr algn="l"/>
             <a:r>
-              <a:rPr sz="900" b="0">
+              <a:rPr sz="1000" b="0">
                 <a:solidFill>
                   <a:srgbClr val="808080"/>
                 </a:solidFill>
@@ -8794,7 +8758,7 @@
           <a:p>
             <a:pPr algn="r"/>
             <a:r>
-              <a:rPr sz="900" b="0">
+              <a:rPr sz="1000" b="0">
                 <a:solidFill>
                   <a:srgbClr val="808080"/>
                 </a:solidFill>
@@ -8812,8 +8776,8 @@
         </p:nvSpPr>
         <p:spPr>
           <a:xfrm>
-            <a:off x="365760" y="960120"/>
-            <a:ext cx="5303520" cy="365760"/>
+            <a:off x="365760" y="1024128"/>
+            <a:ext cx="5394960" cy="402336"/>
           </a:xfrm>
           <a:prstGeom prst="rect">
             <a:avLst/>
@@ -8855,8 +8819,8 @@
         </p:nvSpPr>
         <p:spPr>
           <a:xfrm>
-            <a:off x="502920" y="987552"/>
-            <a:ext cx="5120640" cy="320040"/>
+            <a:off x="502920" y="1051560"/>
+            <a:ext cx="5212080" cy="347472"/>
           </a:xfrm>
           <a:prstGeom prst="rect">
             <a:avLst/>
@@ -8871,7 +8835,7 @@
           <a:p>
             <a:pPr algn="l"/>
             <a:r>
-              <a:rPr sz="1400" b="1">
+              <a:rPr sz="1600" b="1">
                 <a:solidFill>
                   <a:srgbClr val="FFFFFF"/>
                 </a:solidFill>
@@ -8890,8 +8854,8 @@
           <p:nvPr/>
         </p:nvGraphicFramePr>
         <p:xfrm>
-          <a:off x="365760" y="1389888"/>
-          <a:ext cx="5303520" cy="1645920"/>
+          <a:off x="365760" y="1499616"/>
+          <a:ext cx="5394960" cy="1920240"/>
         </p:xfrm>
         <a:graphic>
           <a:graphicData uri="http://schemas.openxmlformats.org/drawingml/2006/table">
@@ -8900,10 +8864,10 @@
                 <a:tableStyleId>{5C22544A-7EE6-4342-B048-85BDC9FD1C3A}</a:tableStyleId>
               </a:tblPr>
               <a:tblGrid>
-                <a:gridCol w="2651760"/>
-                <a:gridCol w="2651760"/>
+                <a:gridCol w="1920240"/>
+                <a:gridCol w="3474720"/>
               </a:tblGrid>
-              <a:tr h="411480">
+              <a:tr h="480060">
                 <a:tc>
                   <a:txBody>
                     <a:bodyPr/>
@@ -8911,7 +8875,7 @@
                     <a:p>
                       <a:pPr algn="ctr"/>
                       <a:r>
-                        <a:rPr sz="1100" b="1">
+                        <a:rPr sz="1500" b="1">
                           <a:solidFill>
                             <a:srgbClr val="FFFFFF"/>
                           </a:solidFill>
@@ -8933,7 +8897,7 @@
                     <a:p>
                       <a:pPr algn="ctr"/>
                       <a:r>
-                        <a:rPr sz="1100" b="1">
+                        <a:rPr sz="1500" b="1">
                           <a:solidFill>
                             <a:srgbClr val="FFFFFF"/>
                           </a:solidFill>
@@ -8949,14 +8913,14 @@
                   </a:tcPr>
                 </a:tc>
               </a:tr>
-              <a:tr h="411480">
+              <a:tr h="480060">
                 <a:tc>
                   <a:txBody>
                     <a:bodyPr/>
                     <a:lstStyle/>
                     <a:p>
                       <a:r>
-                        <a:rPr sz="1000">
+                        <a:rPr sz="1500">
                           <a:solidFill>
                             <a:srgbClr val="262626"/>
                           </a:solidFill>
@@ -8977,7 +8941,7 @@
                     <a:lstStyle/>
                     <a:p>
                       <a:r>
-                        <a:rPr sz="1000">
+                        <a:rPr sz="1500">
                           <a:solidFill>
                             <a:srgbClr val="262626"/>
                           </a:solidFill>
@@ -8993,14 +8957,14 @@
                   </a:tcPr>
                 </a:tc>
               </a:tr>
-              <a:tr h="411480">
+              <a:tr h="480060">
                 <a:tc>
                   <a:txBody>
                     <a:bodyPr/>
                     <a:lstStyle/>
                     <a:p>
                       <a:r>
-                        <a:rPr sz="1000">
+                        <a:rPr sz="1500">
                           <a:solidFill>
                             <a:srgbClr val="262626"/>
                           </a:solidFill>
@@ -9021,7 +8985,7 @@
                     <a:lstStyle/>
                     <a:p>
                       <a:r>
-                        <a:rPr sz="1000">
+                        <a:rPr sz="1500">
                           <a:solidFill>
                             <a:srgbClr val="262626"/>
                           </a:solidFill>
@@ -9038,14 +9002,14 @@
                   </a:tcPr>
                 </a:tc>
               </a:tr>
-              <a:tr h="411480">
+              <a:tr h="480060">
                 <a:tc>
                   <a:txBody>
                     <a:bodyPr/>
                     <a:lstStyle/>
                     <a:p>
                       <a:r>
-                        <a:rPr sz="1000">
+                        <a:rPr sz="1500">
                           <a:solidFill>
                             <a:srgbClr val="262626"/>
                           </a:solidFill>
@@ -9066,7 +9030,7 @@
                     <a:lstStyle/>
                     <a:p>
                       <a:r>
-                        <a:rPr sz="1000">
+                        <a:rPr sz="1500">
                           <a:solidFill>
                             <a:srgbClr val="262626"/>
                           </a:solidFill>
@@ -9094,8 +9058,8 @@
         </p:nvSpPr>
         <p:spPr>
           <a:xfrm>
-            <a:off x="6126480" y="960120"/>
-            <a:ext cx="5669280" cy="365760"/>
+            <a:off x="6126480" y="1024128"/>
+            <a:ext cx="5669280" cy="402336"/>
           </a:xfrm>
           <a:prstGeom prst="rect">
             <a:avLst/>
@@ -9137,8 +9101,8 @@
         </p:nvSpPr>
         <p:spPr>
           <a:xfrm>
-            <a:off x="6263640" y="987552"/>
-            <a:ext cx="5486400" cy="320040"/>
+            <a:off x="6263640" y="1051560"/>
+            <a:ext cx="5486400" cy="347472"/>
           </a:xfrm>
           <a:prstGeom prst="rect">
             <a:avLst/>
@@ -9153,7 +9117,7 @@
           <a:p>
             <a:pPr algn="l"/>
             <a:r>
-              <a:rPr sz="1400" b="1">
+              <a:rPr sz="1600" b="1">
                 <a:solidFill>
                   <a:srgbClr val="FFFFFF"/>
                 </a:solidFill>
@@ -9171,8 +9135,8 @@
         </p:nvSpPr>
         <p:spPr>
           <a:xfrm>
-            <a:off x="6126480" y="1444752"/>
-            <a:ext cx="5669280" cy="384048"/>
+            <a:off x="6126480" y="1499616"/>
+            <a:ext cx="5669280" cy="457200"/>
           </a:xfrm>
           <a:prstGeom prst="rect">
             <a:avLst/>
@@ -9216,8 +9180,8 @@
         </p:nvSpPr>
         <p:spPr>
           <a:xfrm>
-            <a:off x="6263640" y="1481328"/>
-            <a:ext cx="5394960" cy="347472"/>
+            <a:off x="6291072" y="1554480"/>
+            <a:ext cx="5394960" cy="384048"/>
           </a:xfrm>
           <a:prstGeom prst="rect">
             <a:avLst/>
@@ -9232,7 +9196,7 @@
           <a:p>
             <a:pPr algn="l"/>
             <a:r>
-              <a:rPr sz="1200" b="0">
+              <a:rPr sz="1400" b="0">
                 <a:solidFill>
                   <a:srgbClr val="262626"/>
                 </a:solidFill>
@@ -9250,8 +9214,8 @@
         </p:nvSpPr>
         <p:spPr>
           <a:xfrm>
-            <a:off x="6126480" y="1828800"/>
-            <a:ext cx="5669280" cy="384048"/>
+            <a:off x="6126480" y="1956816"/>
+            <a:ext cx="5669280" cy="457200"/>
           </a:xfrm>
           <a:prstGeom prst="rect">
             <a:avLst/>
@@ -9295,8 +9259,8 @@
         </p:nvSpPr>
         <p:spPr>
           <a:xfrm>
-            <a:off x="6263640" y="1865376"/>
-            <a:ext cx="5394960" cy="347472"/>
+            <a:off x="6291072" y="2011680"/>
+            <a:ext cx="5394960" cy="384048"/>
           </a:xfrm>
           <a:prstGeom prst="rect">
             <a:avLst/>
@@ -9311,7 +9275,7 @@
           <a:p>
             <a:pPr algn="l"/>
             <a:r>
-              <a:rPr sz="1200" b="0">
+              <a:rPr sz="1400" b="0">
                 <a:solidFill>
                   <a:srgbClr val="262626"/>
                 </a:solidFill>
@@ -9329,8 +9293,8 @@
         </p:nvSpPr>
         <p:spPr>
           <a:xfrm>
-            <a:off x="6126480" y="2212848"/>
-            <a:ext cx="5669280" cy="384048"/>
+            <a:off x="6126480" y="2414016"/>
+            <a:ext cx="5669280" cy="457200"/>
           </a:xfrm>
           <a:prstGeom prst="rect">
             <a:avLst/>
@@ -9374,8 +9338,8 @@
         </p:nvSpPr>
         <p:spPr>
           <a:xfrm>
-            <a:off x="6263640" y="2249424"/>
-            <a:ext cx="5394960" cy="347472"/>
+            <a:off x="6291072" y="2468880"/>
+            <a:ext cx="5394960" cy="384048"/>
           </a:xfrm>
           <a:prstGeom prst="rect">
             <a:avLst/>
@@ -9390,7 +9354,7 @@
           <a:p>
             <a:pPr algn="l"/>
             <a:r>
-              <a:rPr sz="1200" b="0">
+              <a:rPr sz="1400" b="0">
                 <a:solidFill>
                   <a:srgbClr val="262626"/>
                 </a:solidFill>
@@ -9408,8 +9372,8 @@
         </p:nvSpPr>
         <p:spPr>
           <a:xfrm>
-            <a:off x="6126480" y="2596896"/>
-            <a:ext cx="5669280" cy="384048"/>
+            <a:off x="6126480" y="2871216"/>
+            <a:ext cx="5669280" cy="457200"/>
           </a:xfrm>
           <a:prstGeom prst="rect">
             <a:avLst/>
@@ -9453,8 +9417,8 @@
         </p:nvSpPr>
         <p:spPr>
           <a:xfrm>
-            <a:off x="6263640" y="2633472"/>
-            <a:ext cx="5394960" cy="347472"/>
+            <a:off x="6291072" y="2926080"/>
+            <a:ext cx="5394960" cy="384048"/>
           </a:xfrm>
           <a:prstGeom prst="rect">
             <a:avLst/>
@@ -9469,7 +9433,7 @@
           <a:p>
             <a:pPr algn="l"/>
             <a:r>
-              <a:rPr sz="1200" b="0">
+              <a:rPr sz="1400" b="0">
                 <a:solidFill>
                   <a:srgbClr val="262626"/>
                 </a:solidFill>
@@ -9487,8 +9451,8 @@
         </p:nvSpPr>
         <p:spPr>
           <a:xfrm>
-            <a:off x="6126480" y="2980944"/>
-            <a:ext cx="5669280" cy="384048"/>
+            <a:off x="6126480" y="3328416"/>
+            <a:ext cx="5669280" cy="457200"/>
           </a:xfrm>
           <a:prstGeom prst="rect">
             <a:avLst/>
@@ -9532,8 +9496,8 @@
         </p:nvSpPr>
         <p:spPr>
           <a:xfrm>
-            <a:off x="6263640" y="3017520"/>
-            <a:ext cx="5394960" cy="347472"/>
+            <a:off x="6291072" y="3383280"/>
+            <a:ext cx="5394960" cy="384048"/>
           </a:xfrm>
           <a:prstGeom prst="rect">
             <a:avLst/>
@@ -9548,7 +9512,7 @@
           <a:p>
             <a:pPr algn="l"/>
             <a:r>
-              <a:rPr sz="1200" b="0">
+              <a:rPr sz="1400" b="0">
                 <a:solidFill>
                   <a:srgbClr val="262626"/>
                 </a:solidFill>
@@ -9566,8 +9530,8 @@
         </p:nvSpPr>
         <p:spPr>
           <a:xfrm>
-            <a:off x="365760" y="3246120"/>
-            <a:ext cx="11430000" cy="365760"/>
+            <a:off x="365760" y="3611880"/>
+            <a:ext cx="11430000" cy="420624"/>
           </a:xfrm>
           <a:prstGeom prst="rect">
             <a:avLst/>
@@ -9609,8 +9573,8 @@
         </p:nvSpPr>
         <p:spPr>
           <a:xfrm>
-            <a:off x="502920" y="3264408"/>
-            <a:ext cx="11155680" cy="329184"/>
+            <a:off x="502920" y="3639312"/>
+            <a:ext cx="11155680" cy="365760"/>
           </a:xfrm>
           <a:prstGeom prst="rect">
             <a:avLst/>
@@ -9625,7 +9589,7 @@
           <a:p>
             <a:pPr algn="l"/>
             <a:r>
-              <a:rPr sz="1400" b="1">
+              <a:rPr sz="1600" b="1">
                 <a:solidFill>
                   <a:srgbClr val="FFFFFF"/>
                 </a:solidFill>
@@ -9643,8 +9607,8 @@
         </p:nvSpPr>
         <p:spPr>
           <a:xfrm>
-            <a:off x="548640" y="3749039"/>
-            <a:ext cx="11155680" cy="411480"/>
+            <a:off x="548640" y="4160520"/>
+            <a:ext cx="11155680" cy="502920"/>
           </a:xfrm>
           <a:prstGeom prst="rect">
             <a:avLst/>
@@ -9659,7 +9623,7 @@
           <a:p>
             <a:pPr algn="l"/>
             <a:r>
-              <a:rPr sz="1300" b="0">
+              <a:rPr sz="1500" b="0">
                 <a:solidFill>
                   <a:srgbClr val="262626"/>
                 </a:solidFill>
@@ -9677,8 +9641,8 @@
         </p:nvSpPr>
         <p:spPr>
           <a:xfrm>
-            <a:off x="548640" y="4187951"/>
-            <a:ext cx="11155680" cy="411480"/>
+            <a:off x="548640" y="4690872"/>
+            <a:ext cx="11155680" cy="502920"/>
           </a:xfrm>
           <a:prstGeom prst="rect">
             <a:avLst/>
@@ -9693,7 +9657,7 @@
           <a:p>
             <a:pPr algn="l"/>
             <a:r>
-              <a:rPr sz="1300" b="0">
+              <a:rPr sz="1500" b="0">
                 <a:solidFill>
                   <a:srgbClr val="262626"/>
                 </a:solidFill>
@@ -9711,8 +9675,8 @@
         </p:nvSpPr>
         <p:spPr>
           <a:xfrm>
-            <a:off x="548640" y="4626863"/>
-            <a:ext cx="11155680" cy="411480"/>
+            <a:off x="548640" y="5221224"/>
+            <a:ext cx="11155680" cy="502920"/>
           </a:xfrm>
           <a:prstGeom prst="rect">
             <a:avLst/>
@@ -9727,7 +9691,7 @@
           <a:p>
             <a:pPr algn="l"/>
             <a:r>
-              <a:rPr sz="1300" b="0">
+              <a:rPr sz="1500" b="0">
                 <a:solidFill>
                   <a:srgbClr val="262626"/>
                 </a:solidFill>

--- a/notes/mansion/修繕委員会_第1回定例_キックオフ.pptx
+++ b/notes/mansion/修繕委員会_第1回定例_キックオフ.pptx
@@ -13,7 +13,7 @@
     <p:sldId id="261" r:id="rId12"/>
     <p:sldId id="262" r:id="rId13"/>
   </p:sldIdLst>
-  <p:sldSz cx="12188952" cy="6858000" type="screen4x3"/>
+  <p:sldSz cx="7562088" cy="10689336" type="screen4x3"/>
   <p:notesSz cx="6858000" cy="9144000"/>
   <p:defaultTextStyle>
     <a:defPPr>
@@ -3103,13 +3103,13 @@
         <p:spPr>
           <a:xfrm>
             <a:off x="0" y="0"/>
-            <a:ext cx="12188952" cy="6858000"/>
+            <a:ext cx="7562088" cy="164592"/>
           </a:xfrm>
           <a:prstGeom prst="rect">
             <a:avLst/>
           </a:prstGeom>
           <a:solidFill>
-            <a:srgbClr val="1F3564"/>
+            <a:srgbClr val="4A7CB4"/>
           </a:solidFill>
           <a:ln>
             <a:noFill/>
@@ -3145,17 +3145,19 @@
         </p:nvSpPr>
         <p:spPr>
           <a:xfrm>
-            <a:off x="0" y="2560320"/>
-            <a:ext cx="12188952" cy="1737360"/>
+            <a:off x="548640" y="2560320"/>
+            <a:ext cx="6464808" cy="3200400"/>
           </a:xfrm>
           <a:prstGeom prst="rect">
             <a:avLst/>
           </a:prstGeom>
           <a:solidFill>
-            <a:srgbClr val="2E75B6"/>
+            <a:srgbClr val="F4F7FB"/>
           </a:solidFill>
-          <a:ln>
-            <a:noFill/>
+          <a:ln w="19050">
+            <a:solidFill>
+              <a:srgbClr val="4A7CB4"/>
+            </a:solidFill>
           </a:ln>
         </p:spPr>
         <p:style>
@@ -3188,8 +3190,8 @@
         </p:nvSpPr>
         <p:spPr>
           <a:xfrm>
-            <a:off x="0" y="1371600"/>
-            <a:ext cx="12188952" cy="731520"/>
+            <a:off x="548640" y="2743200"/>
+            <a:ext cx="6464808" cy="548640"/>
           </a:xfrm>
           <a:prstGeom prst="rect">
             <a:avLst/>
@@ -3204,9 +3206,9 @@
           <a:p>
             <a:pPr algn="ctr"/>
             <a:r>
-              <a:rPr sz="2600" b="0">
+              <a:rPr sz="2000" b="0" i="0">
                 <a:solidFill>
-                  <a:srgbClr val="D6E4F0"/>
+                  <a:srgbClr val="4A7CB4"/>
                 </a:solidFill>
               </a:rPr>
               <a:t>コンフォール井の頭公園南</a:t>
@@ -3216,14 +3218,57 @@
       </p:sp>
       <p:sp>
         <p:nvSpPr>
-          <p:cNvPr id="5" name="TextBox 4"/>
+          <p:cNvPr id="5" name="Rectangle 4"/>
+          <p:cNvSpPr/>
+          <p:nvPr/>
+        </p:nvSpPr>
+        <p:spPr>
+          <a:xfrm>
+            <a:off x="1371600" y="3291840"/>
+            <a:ext cx="4818888" cy="19050"/>
+          </a:xfrm>
+          <a:prstGeom prst="rect">
+            <a:avLst/>
+          </a:prstGeom>
+          <a:solidFill>
+            <a:srgbClr val="4A7CB4"/>
+          </a:solidFill>
+          <a:ln>
+            <a:noFill/>
+          </a:ln>
+        </p:spPr>
+        <p:style>
+          <a:lnRef idx="1">
+            <a:schemeClr val="accent1"/>
+          </a:lnRef>
+          <a:fillRef idx="3">
+            <a:schemeClr val="accent1"/>
+          </a:fillRef>
+          <a:effectRef idx="2">
+            <a:schemeClr val="accent1"/>
+          </a:effectRef>
+          <a:fontRef idx="minor">
+            <a:schemeClr val="lt1"/>
+          </a:fontRef>
+        </p:style>
+        <p:txBody>
+          <a:bodyPr rtlCol="0" anchor="ctr"/>
+          <a:lstStyle/>
+          <a:p>
+            <a:pPr algn="ctr"/>
+          </a:p>
+        </p:txBody>
+      </p:sp>
+      <p:sp>
+        <p:nvSpPr>
+          <p:cNvPr id="6" name="TextBox 5"/>
           <p:cNvSpPr txBox="1"/>
           <p:nvPr/>
         </p:nvSpPr>
         <p:spPr>
           <a:xfrm>
-            <a:off x="0" y="2651760"/>
-            <a:ext cx="12188952" cy="822960"/>
+            <a:off x="548640" y="3383280"/>
+            <a:ext cx="6464808" cy="685800"/>
           </a:xfrm>
           <a:prstGeom prst="rect">
             <a:avLst/>
@@ -3238,26 +3283,26 @@
           <a:p>
             <a:pPr algn="ctr"/>
             <a:r>
-              <a:rPr sz="3600" b="1">
+              <a:rPr sz="3200" b="1" i="0">
                 <a:solidFill>
-                  <a:srgbClr val="FFFFFF"/>
+                  <a:srgbClr val="222222"/>
                 </a:solidFill>
               </a:rPr>
-              <a:t>修繕委員会  第1回定例（キックオフ）</a:t>
-            </a:r>
-          </a:p>
-        </p:txBody>
-      </p:sp>
-      <p:sp>
-        <p:nvSpPr>
-          <p:cNvPr id="6" name="TextBox 5"/>
+              <a:t>修繕委員会</a:t>
+            </a:r>
+          </a:p>
+        </p:txBody>
+      </p:sp>
+      <p:sp>
+        <p:nvSpPr>
+          <p:cNvPr id="7" name="TextBox 6"/>
           <p:cNvSpPr txBox="1"/>
           <p:nvPr/>
         </p:nvSpPr>
         <p:spPr>
           <a:xfrm>
-            <a:off x="0" y="3547872"/>
-            <a:ext cx="12188952" cy="548640"/>
+            <a:off x="548640" y="4023360"/>
+            <a:ext cx="6464808" cy="594360"/>
           </a:xfrm>
           <a:prstGeom prst="rect">
             <a:avLst/>
@@ -3272,9 +3317,86 @@
           <a:p>
             <a:pPr algn="ctr"/>
             <a:r>
-              <a:rPr sz="2000" b="0">
+              <a:rPr sz="2400" b="0" i="0">
                 <a:solidFill>
-                  <a:srgbClr val="D6E4F0"/>
+                  <a:srgbClr val="4A7CB4"/>
+                </a:solidFill>
+              </a:rPr>
+              <a:t>第1回定例（キックオフ）</a:t>
+            </a:r>
+          </a:p>
+        </p:txBody>
+      </p:sp>
+      <p:sp>
+        <p:nvSpPr>
+          <p:cNvPr id="8" name="Rectangle 7"/>
+          <p:cNvSpPr/>
+          <p:nvPr/>
+        </p:nvSpPr>
+        <p:spPr>
+          <a:xfrm>
+            <a:off x="1371600" y="4663440"/>
+            <a:ext cx="4818888" cy="12700"/>
+          </a:xfrm>
+          <a:prstGeom prst="rect">
+            <a:avLst/>
+          </a:prstGeom>
+          <a:solidFill>
+            <a:srgbClr val="E4EFF7"/>
+          </a:solidFill>
+          <a:ln>
+            <a:noFill/>
+          </a:ln>
+        </p:spPr>
+        <p:style>
+          <a:lnRef idx="1">
+            <a:schemeClr val="accent1"/>
+          </a:lnRef>
+          <a:fillRef idx="3">
+            <a:schemeClr val="accent1"/>
+          </a:fillRef>
+          <a:effectRef idx="2">
+            <a:schemeClr val="accent1"/>
+          </a:effectRef>
+          <a:fontRef idx="minor">
+            <a:schemeClr val="lt1"/>
+          </a:fontRef>
+        </p:style>
+        <p:txBody>
+          <a:bodyPr rtlCol="0" anchor="ctr"/>
+          <a:lstStyle/>
+          <a:p>
+            <a:pPr algn="ctr"/>
+          </a:p>
+        </p:txBody>
+      </p:sp>
+      <p:sp>
+        <p:nvSpPr>
+          <p:cNvPr id="9" name="TextBox 8"/>
+          <p:cNvSpPr txBox="1"/>
+          <p:nvPr/>
+        </p:nvSpPr>
+        <p:spPr>
+          <a:xfrm>
+            <a:off x="548640" y="4754880"/>
+            <a:ext cx="6464808" cy="457200"/>
+          </a:xfrm>
+          <a:prstGeom prst="rect">
+            <a:avLst/>
+          </a:prstGeom>
+          <a:noFill/>
+        </p:spPr>
+        <p:txBody>
+          <a:bodyPr wrap="square">
+            <a:spAutoFit/>
+          </a:bodyPr>
+          <a:lstStyle/>
+          <a:p>
+            <a:pPr algn="ctr"/>
+            <a:r>
+              <a:rPr sz="1600" b="0" i="0">
+                <a:solidFill>
+                  <a:srgbClr val="555555"/>
                 </a:solidFill>
               </a:rPr>
               <a:t>2026年6月7日（日）　14:00〜15:00</a:t>
@@ -3284,14 +3406,14 @@
       </p:sp>
       <p:sp>
         <p:nvSpPr>
-          <p:cNvPr id="7" name="TextBox 6"/>
+          <p:cNvPr id="10" name="TextBox 9"/>
           <p:cNvSpPr txBox="1"/>
           <p:nvPr/>
         </p:nvSpPr>
         <p:spPr>
           <a:xfrm>
-            <a:off x="0" y="4114800"/>
-            <a:ext cx="12188952" cy="457200"/>
+            <a:off x="548640" y="5193792"/>
+            <a:ext cx="6464808" cy="411480"/>
           </a:xfrm>
           <a:prstGeom prst="rect">
             <a:avLst/>
@@ -3306,9 +3428,9 @@
           <a:p>
             <a:pPr algn="ctr"/>
             <a:r>
-              <a:rPr sz="1600" b="0">
+              <a:rPr sz="1400" b="0" i="0">
                 <a:solidFill>
-                  <a:srgbClr val="D6E4F0"/>
+                  <a:srgbClr val="555555"/>
                 </a:solidFill>
               </a:rPr>
               <a:t>三鷹市下連雀八丁目地区公会堂</a:t>
@@ -3318,14 +3440,59 @@
       </p:sp>
       <p:sp>
         <p:nvSpPr>
-          <p:cNvPr id="8" name="TextBox 7"/>
+          <p:cNvPr id="11" name="Rectangle 10"/>
+          <p:cNvSpPr/>
+          <p:nvPr/>
+        </p:nvSpPr>
+        <p:spPr>
+          <a:xfrm>
+            <a:off x="1097280" y="5943600"/>
+            <a:ext cx="5367528" cy="594360"/>
+          </a:xfrm>
+          <a:prstGeom prst="rect">
+            <a:avLst/>
+          </a:prstGeom>
+          <a:solidFill>
+            <a:srgbClr val="FFFFFF"/>
+          </a:solidFill>
+          <a:ln w="12700">
+            <a:solidFill>
+              <a:srgbClr val="E4EFF7"/>
+            </a:solidFill>
+          </a:ln>
+        </p:spPr>
+        <p:style>
+          <a:lnRef idx="1">
+            <a:schemeClr val="accent1"/>
+          </a:lnRef>
+          <a:fillRef idx="3">
+            <a:schemeClr val="accent1"/>
+          </a:fillRef>
+          <a:effectRef idx="2">
+            <a:schemeClr val="accent1"/>
+          </a:effectRef>
+          <a:fontRef idx="minor">
+            <a:schemeClr val="lt1"/>
+          </a:fontRef>
+        </p:style>
+        <p:txBody>
+          <a:bodyPr rtlCol="0" anchor="ctr"/>
+          <a:lstStyle/>
+          <a:p>
+            <a:pPr algn="ctr"/>
+          </a:p>
+        </p:txBody>
+      </p:sp>
+      <p:sp>
+        <p:nvSpPr>
+          <p:cNvPr id="12" name="TextBox 11"/>
           <p:cNvSpPr txBox="1"/>
           <p:nvPr/>
         </p:nvSpPr>
         <p:spPr>
           <a:xfrm>
-            <a:off x="0" y="5212080"/>
-            <a:ext cx="12188952" cy="457200"/>
+            <a:off x="1097280" y="6035040"/>
+            <a:ext cx="5367528" cy="457200"/>
           </a:xfrm>
           <a:prstGeom prst="rect">
             <a:avLst/>
@@ -3340,13 +3507,56 @@
           <a:p>
             <a:pPr algn="ctr"/>
             <a:r>
-              <a:rPr sz="1500" b="0">
+              <a:rPr sz="1400" b="0" i="0">
                 <a:solidFill>
-                  <a:srgbClr val="CCDDEE"/>
+                  <a:srgbClr val="222222"/>
                 </a:solidFill>
               </a:rPr>
               <a:t>出席：小橋　／　石川　／　十文字　／　阿部　／　武藤　／　新関</a:t>
             </a:r>
+          </a:p>
+        </p:txBody>
+      </p:sp>
+      <p:sp>
+        <p:nvSpPr>
+          <p:cNvPr id="13" name="Rectangle 12"/>
+          <p:cNvSpPr/>
+          <p:nvPr/>
+        </p:nvSpPr>
+        <p:spPr>
+          <a:xfrm>
+            <a:off x="0" y="10524744"/>
+            <a:ext cx="7562088" cy="164592"/>
+          </a:xfrm>
+          <a:prstGeom prst="rect">
+            <a:avLst/>
+          </a:prstGeom>
+          <a:solidFill>
+            <a:srgbClr val="4A7CB4"/>
+          </a:solidFill>
+          <a:ln>
+            <a:noFill/>
+          </a:ln>
+        </p:spPr>
+        <p:style>
+          <a:lnRef idx="1">
+            <a:schemeClr val="accent1"/>
+          </a:lnRef>
+          <a:fillRef idx="3">
+            <a:schemeClr val="accent1"/>
+          </a:fillRef>
+          <a:effectRef idx="2">
+            <a:schemeClr val="accent1"/>
+          </a:effectRef>
+          <a:fontRef idx="minor">
+            <a:schemeClr val="lt1"/>
+          </a:fontRef>
+        </p:style>
+        <p:txBody>
+          <a:bodyPr rtlCol="0" anchor="ctr"/>
+          <a:lstStyle/>
+          <a:p>
+            <a:pPr algn="ctr"/>
           </a:p>
         </p:txBody>
       </p:sp>
@@ -3377,13 +3587,13 @@
         <p:spPr>
           <a:xfrm>
             <a:off x="0" y="0"/>
-            <a:ext cx="12188952" cy="960120"/>
+            <a:ext cx="7562088" cy="164592"/>
           </a:xfrm>
           <a:prstGeom prst="rect">
             <a:avLst/>
           </a:prstGeom>
           <a:solidFill>
-            <a:srgbClr val="1F3564"/>
+            <a:srgbClr val="4A7CB4"/>
           </a:solidFill>
           <a:ln>
             <a:noFill/>
@@ -3419,8 +3629,8 @@
         </p:nvSpPr>
         <p:spPr>
           <a:xfrm>
-            <a:off x="365760" y="137160"/>
-            <a:ext cx="10972800" cy="685800"/>
+            <a:off x="457200" y="228600"/>
+            <a:ext cx="6647688" cy="594360"/>
           </a:xfrm>
           <a:prstGeom prst="rect">
             <a:avLst/>
@@ -3435,9 +3645,9 @@
           <a:p>
             <a:pPr algn="l"/>
             <a:r>
-              <a:rPr sz="2400" b="1">
+              <a:rPr sz="2200" b="1" i="0">
                 <a:solidFill>
-                  <a:srgbClr val="FFFFFF"/>
+                  <a:srgbClr val="222222"/>
                 </a:solidFill>
               </a:rPr>
               <a:t>委員会の目的・本日のアジェンダ</a:t>
@@ -3447,88 +3657,20 @@
       </p:sp>
       <p:sp>
         <p:nvSpPr>
-          <p:cNvPr id="4" name="TextBox 3"/>
-          <p:cNvSpPr txBox="1"/>
-          <p:nvPr/>
-        </p:nvSpPr>
-        <p:spPr>
-          <a:xfrm>
-            <a:off x="365760" y="6492240"/>
-            <a:ext cx="9144000" cy="274320"/>
-          </a:xfrm>
-          <a:prstGeom prst="rect">
-            <a:avLst/>
-          </a:prstGeom>
-          <a:noFill/>
-        </p:spPr>
-        <p:txBody>
-          <a:bodyPr wrap="square">
-            <a:spAutoFit/>
-          </a:bodyPr>
-          <a:lstStyle/>
-          <a:p>
-            <a:pPr algn="l"/>
-            <a:r>
-              <a:rPr sz="1000" b="0">
-                <a:solidFill>
-                  <a:srgbClr val="808080"/>
-                </a:solidFill>
-              </a:rPr>
-              <a:t>コンフォール井の頭公園南 修繕委員会 第1回定例　2026.6.7</a:t>
-            </a:r>
-          </a:p>
-        </p:txBody>
-      </p:sp>
-      <p:sp>
-        <p:nvSpPr>
-          <p:cNvPr id="5" name="TextBox 4"/>
-          <p:cNvSpPr txBox="1"/>
-          <p:nvPr/>
-        </p:nvSpPr>
-        <p:spPr>
-          <a:xfrm>
-            <a:off x="11430000" y="6492240"/>
-            <a:ext cx="640080" cy="274320"/>
-          </a:xfrm>
-          <a:prstGeom prst="rect">
-            <a:avLst/>
-          </a:prstGeom>
-          <a:noFill/>
-        </p:spPr>
-        <p:txBody>
-          <a:bodyPr wrap="square">
-            <a:spAutoFit/>
-          </a:bodyPr>
-          <a:lstStyle/>
-          <a:p>
-            <a:pPr algn="r"/>
-            <a:r>
-              <a:rPr sz="1000" b="0">
-                <a:solidFill>
-                  <a:srgbClr val="808080"/>
-                </a:solidFill>
-              </a:rPr>
-              <a:t>2 / 7</a:t>
-            </a:r>
-          </a:p>
-        </p:txBody>
-      </p:sp>
-      <p:sp>
-        <p:nvSpPr>
-          <p:cNvPr id="6" name="Rectangle 5"/>
+          <p:cNvPr id="4" name="Rectangle 3"/>
           <p:cNvSpPr/>
           <p:nvPr/>
         </p:nvSpPr>
         <p:spPr>
           <a:xfrm>
-            <a:off x="365760" y="1051560"/>
-            <a:ext cx="5669280" cy="420624"/>
+            <a:off x="457200" y="822960"/>
+            <a:ext cx="6647688" cy="19050"/>
           </a:xfrm>
           <a:prstGeom prst="rect">
             <a:avLst/>
           </a:prstGeom>
           <a:solidFill>
-            <a:srgbClr val="2E75B6"/>
+            <a:srgbClr val="4A7CB4"/>
           </a:solidFill>
           <a:ln>
             <a:noFill/>
@@ -3558,14 +3700,14 @@
       </p:sp>
       <p:sp>
         <p:nvSpPr>
-          <p:cNvPr id="7" name="TextBox 6"/>
+          <p:cNvPr id="5" name="TextBox 4"/>
           <p:cNvSpPr txBox="1"/>
           <p:nvPr/>
         </p:nvSpPr>
         <p:spPr>
           <a:xfrm>
-            <a:off x="502920" y="1078992"/>
-            <a:ext cx="5486400" cy="365760"/>
+            <a:off x="457200" y="10241280"/>
+            <a:ext cx="5943600" cy="274320"/>
           </a:xfrm>
           <a:prstGeom prst="rect">
             <a:avLst/>
@@ -3580,26 +3722,26 @@
           <a:p>
             <a:pPr algn="l"/>
             <a:r>
-              <a:rPr sz="1600" b="1">
+              <a:rPr sz="1000" b="0" i="0">
                 <a:solidFill>
-                  <a:srgbClr val="FFFFFF"/>
+                  <a:srgbClr val="555555"/>
                 </a:solidFill>
               </a:rPr>
-              <a:t>委員会の目的</a:t>
-            </a:r>
-          </a:p>
-        </p:txBody>
-      </p:sp>
-      <p:sp>
-        <p:nvSpPr>
-          <p:cNvPr id="8" name="TextBox 7"/>
+              <a:t>コンフォール井の頭公園南 修繕委員会 第1回定例　2026.6.7</a:t>
+            </a:r>
+          </a:p>
+        </p:txBody>
+      </p:sp>
+      <p:sp>
+        <p:nvSpPr>
+          <p:cNvPr id="6" name="TextBox 5"/>
           <p:cNvSpPr txBox="1"/>
           <p:nvPr/>
         </p:nvSpPr>
         <p:spPr>
           <a:xfrm>
-            <a:off x="502920" y="1600200"/>
-            <a:ext cx="5394960" cy="749808"/>
+            <a:off x="6858000" y="10241280"/>
+            <a:ext cx="548640" cy="274320"/>
           </a:xfrm>
           <a:prstGeom prst="rect">
             <a:avLst/>
@@ -3612,104 +3754,34 @@
           </a:bodyPr>
           <a:lstStyle/>
           <a:p>
-            <a:pPr algn="l"/>
-            <a:r>
-              <a:rPr sz="1500" b="0">
+            <a:pPr algn="r"/>
+            <a:r>
+              <a:rPr sz="1000" b="0" i="0">
                 <a:solidFill>
-                  <a:srgbClr val="262626"/>
+                  <a:srgbClr val="555555"/>
                 </a:solidFill>
               </a:rPr>
-              <a:t>● 建物・設備の状態を把握し、長期修繕計画の策定と
-　 必要に応じた修繕積立金の見直しを推進</a:t>
-            </a:r>
-          </a:p>
-        </p:txBody>
-      </p:sp>
-      <p:sp>
-        <p:nvSpPr>
-          <p:cNvPr id="9" name="TextBox 8"/>
-          <p:cNvSpPr txBox="1"/>
-          <p:nvPr/>
-        </p:nvSpPr>
-        <p:spPr>
-          <a:xfrm>
-            <a:off x="502920" y="2377440"/>
-            <a:ext cx="5394960" cy="749808"/>
-          </a:xfrm>
-          <a:prstGeom prst="rect">
-            <a:avLst/>
-          </a:prstGeom>
-          <a:noFill/>
-        </p:spPr>
-        <p:txBody>
-          <a:bodyPr wrap="square">
-            <a:spAutoFit/>
-          </a:bodyPr>
-          <a:lstStyle/>
-          <a:p>
-            <a:pPr algn="l"/>
-            <a:r>
-              <a:rPr sz="1500" b="0">
-                <a:solidFill>
-                  <a:srgbClr val="262626"/>
-                </a:solidFill>
-              </a:rPr>
-              <a:t>● 住民の意見を反映した計画立案と情報共有を支援</a:t>
-            </a:r>
-          </a:p>
-        </p:txBody>
-      </p:sp>
-      <p:sp>
-        <p:nvSpPr>
-          <p:cNvPr id="10" name="TextBox 9"/>
-          <p:cNvSpPr txBox="1"/>
-          <p:nvPr/>
-        </p:nvSpPr>
-        <p:spPr>
-          <a:xfrm>
-            <a:off x="502920" y="3154680"/>
-            <a:ext cx="5394960" cy="749808"/>
-          </a:xfrm>
-          <a:prstGeom prst="rect">
-            <a:avLst/>
-          </a:prstGeom>
-          <a:noFill/>
-        </p:spPr>
-        <p:txBody>
-          <a:bodyPr wrap="square">
-            <a:spAutoFit/>
-          </a:bodyPr>
-          <a:lstStyle/>
-          <a:p>
-            <a:pPr algn="l"/>
-            <a:r>
-              <a:rPr sz="1500" b="0">
-                <a:solidFill>
-                  <a:srgbClr val="262626"/>
-                </a:solidFill>
-              </a:rPr>
-              <a:t>● 決定は理事会・総会が行い、委員会は
-　 調査・提案・情報発信を担う</a:t>
-            </a:r>
-          </a:p>
-        </p:txBody>
-      </p:sp>
-      <p:sp>
-        <p:nvSpPr>
-          <p:cNvPr id="11" name="Rectangle 10"/>
+              <a:t>2 / 7</a:t>
+            </a:r>
+          </a:p>
+        </p:txBody>
+      </p:sp>
+      <p:sp>
+        <p:nvSpPr>
+          <p:cNvPr id="7" name="Rectangle 6"/>
           <p:cNvSpPr/>
           <p:nvPr/>
         </p:nvSpPr>
         <p:spPr>
           <a:xfrm>
-            <a:off x="365760" y="4069080"/>
-            <a:ext cx="5669280" cy="36576"/>
+            <a:off x="457200" y="10195560"/>
+            <a:ext cx="6647688" cy="12700"/>
           </a:xfrm>
           <a:prstGeom prst="rect">
             <a:avLst/>
           </a:prstGeom>
           <a:solidFill>
-            <a:srgbClr val="2E75B6"/>
+            <a:srgbClr val="E4EFF7"/>
           </a:solidFill>
           <a:ln>
             <a:noFill/>
@@ -3739,54 +3811,20 @@
       </p:sp>
       <p:sp>
         <p:nvSpPr>
-          <p:cNvPr id="12" name="TextBox 11"/>
-          <p:cNvSpPr txBox="1"/>
-          <p:nvPr/>
-        </p:nvSpPr>
-        <p:spPr>
-          <a:xfrm>
-            <a:off x="502920" y="4160520"/>
-            <a:ext cx="5486400" cy="457200"/>
-          </a:xfrm>
-          <a:prstGeom prst="rect">
-            <a:avLst/>
-          </a:prstGeom>
-          <a:noFill/>
-        </p:spPr>
-        <p:txBody>
-          <a:bodyPr wrap="square">
-            <a:spAutoFit/>
-          </a:bodyPr>
-          <a:lstStyle/>
-          <a:p>
-            <a:pPr algn="l"/>
-            <a:r>
-              <a:rPr sz="1400" b="0">
-                <a:solidFill>
-                  <a:srgbClr val="1F3564"/>
-                </a:solidFill>
-              </a:rPr>
-              <a:t>位置づけ：理事会と連携する住民委員会　決定機関は理事会・総会</a:t>
-            </a:r>
-          </a:p>
-        </p:txBody>
-      </p:sp>
-      <p:sp>
-        <p:nvSpPr>
-          <p:cNvPr id="13" name="Rectangle 12"/>
+          <p:cNvPr id="8" name="Rectangle 7"/>
           <p:cNvSpPr/>
           <p:nvPr/>
         </p:nvSpPr>
         <p:spPr>
           <a:xfrm>
-            <a:off x="6400800" y="1051560"/>
-            <a:ext cx="5394960" cy="420624"/>
+            <a:off x="457200" y="960120"/>
+            <a:ext cx="6647688" cy="25400"/>
           </a:xfrm>
           <a:prstGeom prst="rect">
             <a:avLst/>
           </a:prstGeom>
           <a:solidFill>
-            <a:srgbClr val="2E75B6"/>
+            <a:srgbClr val="4A7CB4"/>
           </a:solidFill>
           <a:ln>
             <a:noFill/>
@@ -3816,14 +3854,14 @@
       </p:sp>
       <p:sp>
         <p:nvSpPr>
-          <p:cNvPr id="14" name="TextBox 13"/>
+          <p:cNvPr id="9" name="TextBox 8"/>
           <p:cNvSpPr txBox="1"/>
           <p:nvPr/>
         </p:nvSpPr>
         <p:spPr>
           <a:xfrm>
-            <a:off x="6537960" y="1078992"/>
-            <a:ext cx="5212080" cy="365760"/>
+            <a:off x="457200" y="1010920"/>
+            <a:ext cx="6647688" cy="411480"/>
           </a:xfrm>
           <a:prstGeom prst="rect">
             <a:avLst/>
@@ -3838,35 +3876,140 @@
           <a:p>
             <a:pPr algn="l"/>
             <a:r>
-              <a:rPr sz="1600" b="1">
+              <a:rPr sz="1700" b="1" i="0">
                 <a:solidFill>
-                  <a:srgbClr val="FFFFFF"/>
+                  <a:srgbClr val="4A7CB4"/>
                 </a:solidFill>
               </a:rPr>
-              <a:t>本日のアジェンダ</a:t>
-            </a:r>
-          </a:p>
-        </p:txBody>
-      </p:sp>
-      <p:sp>
-        <p:nvSpPr>
-          <p:cNvPr id="15" name="Rectangle 14"/>
+              <a:t>委員会の目的</a:t>
+            </a:r>
+          </a:p>
+        </p:txBody>
+      </p:sp>
+      <p:sp>
+        <p:nvSpPr>
+          <p:cNvPr id="10" name="TextBox 9"/>
+          <p:cNvSpPr txBox="1"/>
+          <p:nvPr/>
+        </p:nvSpPr>
+        <p:spPr>
+          <a:xfrm>
+            <a:off x="548640" y="1527048"/>
+            <a:ext cx="6492240" cy="685800"/>
+          </a:xfrm>
+          <a:prstGeom prst="rect">
+            <a:avLst/>
+          </a:prstGeom>
+          <a:noFill/>
+        </p:spPr>
+        <p:txBody>
+          <a:bodyPr wrap="square">
+            <a:spAutoFit/>
+          </a:bodyPr>
+          <a:lstStyle/>
+          <a:p>
+            <a:pPr algn="l"/>
+            <a:r>
+              <a:rPr sz="1400" b="0" i="0">
+                <a:solidFill>
+                  <a:srgbClr val="222222"/>
+                </a:solidFill>
+              </a:rPr>
+              <a:t>● 建物・設備の状態を把握し、長期修繕計画の策定と
+　 必要に応じた修繕積立金の見直しを推進</a:t>
+            </a:r>
+          </a:p>
+        </p:txBody>
+      </p:sp>
+      <p:sp>
+        <p:nvSpPr>
+          <p:cNvPr id="11" name="TextBox 10"/>
+          <p:cNvSpPr txBox="1"/>
+          <p:nvPr/>
+        </p:nvSpPr>
+        <p:spPr>
+          <a:xfrm>
+            <a:off x="548640" y="2167128"/>
+            <a:ext cx="6492240" cy="685800"/>
+          </a:xfrm>
+          <a:prstGeom prst="rect">
+            <a:avLst/>
+          </a:prstGeom>
+          <a:noFill/>
+        </p:spPr>
+        <p:txBody>
+          <a:bodyPr wrap="square">
+            <a:spAutoFit/>
+          </a:bodyPr>
+          <a:lstStyle/>
+          <a:p>
+            <a:pPr algn="l"/>
+            <a:r>
+              <a:rPr sz="1400" b="0" i="0">
+                <a:solidFill>
+                  <a:srgbClr val="222222"/>
+                </a:solidFill>
+              </a:rPr>
+              <a:t>● 住民の意見を反映した計画立案と情報共有を支援</a:t>
+            </a:r>
+          </a:p>
+        </p:txBody>
+      </p:sp>
+      <p:sp>
+        <p:nvSpPr>
+          <p:cNvPr id="12" name="TextBox 11"/>
+          <p:cNvSpPr txBox="1"/>
+          <p:nvPr/>
+        </p:nvSpPr>
+        <p:spPr>
+          <a:xfrm>
+            <a:off x="548640" y="2807208"/>
+            <a:ext cx="6492240" cy="685800"/>
+          </a:xfrm>
+          <a:prstGeom prst="rect">
+            <a:avLst/>
+          </a:prstGeom>
+          <a:noFill/>
+        </p:spPr>
+        <p:txBody>
+          <a:bodyPr wrap="square">
+            <a:spAutoFit/>
+          </a:bodyPr>
+          <a:lstStyle/>
+          <a:p>
+            <a:pPr algn="l"/>
+            <a:r>
+              <a:rPr sz="1400" b="0" i="0">
+                <a:solidFill>
+                  <a:srgbClr val="222222"/>
+                </a:solidFill>
+              </a:rPr>
+              <a:t>● 決定は理事会・総会が行い、委員会は調査・提案・情報発信を担う</a:t>
+            </a:r>
+          </a:p>
+        </p:txBody>
+      </p:sp>
+      <p:sp>
+        <p:nvSpPr>
+          <p:cNvPr id="13" name="Rectangle 12"/>
           <p:cNvSpPr/>
           <p:nvPr/>
         </p:nvSpPr>
         <p:spPr>
           <a:xfrm>
-            <a:off x="6400800" y="1600200"/>
-            <a:ext cx="457200" cy="475488"/>
+            <a:off x="457200" y="3538728"/>
+            <a:ext cx="6647688" cy="475488"/>
           </a:xfrm>
           <a:prstGeom prst="rect">
             <a:avLst/>
           </a:prstGeom>
           <a:solidFill>
-            <a:srgbClr val="1F3564"/>
+            <a:srgbClr val="F4F7FB"/>
           </a:solidFill>
-          <a:ln>
-            <a:noFill/>
+          <a:ln w="9525">
+            <a:solidFill>
+              <a:srgbClr val="E4EFF7"/>
+            </a:solidFill>
           </a:ln>
         </p:spPr>
         <p:style>
@@ -3893,14 +4036,14 @@
       </p:sp>
       <p:sp>
         <p:nvSpPr>
-          <p:cNvPr id="16" name="TextBox 15"/>
+          <p:cNvPr id="14" name="TextBox 13"/>
           <p:cNvSpPr txBox="1"/>
           <p:nvPr/>
         </p:nvSpPr>
         <p:spPr>
           <a:xfrm>
-            <a:off x="6400800" y="1645920"/>
-            <a:ext cx="457200" cy="402336"/>
+            <a:off x="594360" y="3611880"/>
+            <a:ext cx="6400800" cy="347472"/>
           </a:xfrm>
           <a:prstGeom prst="rect">
             <a:avLst/>
@@ -3913,9 +4056,208 @@
           </a:bodyPr>
           <a:lstStyle/>
           <a:p>
+            <a:pPr algn="l"/>
+            <a:r>
+              <a:rPr sz="1300" b="0" i="1">
+                <a:solidFill>
+                  <a:srgbClr val="555555"/>
+                </a:solidFill>
+              </a:rPr>
+              <a:t>位置づけ：理事会と連携する住民委員会　／　決定機関は理事会・総会</a:t>
+            </a:r>
+          </a:p>
+        </p:txBody>
+      </p:sp>
+      <p:sp>
+        <p:nvSpPr>
+          <p:cNvPr id="15" name="Rectangle 14"/>
+          <p:cNvSpPr/>
+          <p:nvPr/>
+        </p:nvSpPr>
+        <p:spPr>
+          <a:xfrm>
+            <a:off x="457200" y="4379976"/>
+            <a:ext cx="6647688" cy="25400"/>
+          </a:xfrm>
+          <a:prstGeom prst="rect">
+            <a:avLst/>
+          </a:prstGeom>
+          <a:solidFill>
+            <a:srgbClr val="4A7CB4"/>
+          </a:solidFill>
+          <a:ln>
+            <a:noFill/>
+          </a:ln>
+        </p:spPr>
+        <p:style>
+          <a:lnRef idx="1">
+            <a:schemeClr val="accent1"/>
+          </a:lnRef>
+          <a:fillRef idx="3">
+            <a:schemeClr val="accent1"/>
+          </a:fillRef>
+          <a:effectRef idx="2">
+            <a:schemeClr val="accent1"/>
+          </a:effectRef>
+          <a:fontRef idx="minor">
+            <a:schemeClr val="lt1"/>
+          </a:fontRef>
+        </p:style>
+        <p:txBody>
+          <a:bodyPr rtlCol="0" anchor="ctr"/>
+          <a:lstStyle/>
+          <a:p>
             <a:pPr algn="ctr"/>
-            <a:r>
-              <a:rPr sz="1600" b="1">
+          </a:p>
+        </p:txBody>
+      </p:sp>
+      <p:sp>
+        <p:nvSpPr>
+          <p:cNvPr id="16" name="TextBox 15"/>
+          <p:cNvSpPr txBox="1"/>
+          <p:nvPr/>
+        </p:nvSpPr>
+        <p:spPr>
+          <a:xfrm>
+            <a:off x="457200" y="4430776"/>
+            <a:ext cx="6647688" cy="411480"/>
+          </a:xfrm>
+          <a:prstGeom prst="rect">
+            <a:avLst/>
+          </a:prstGeom>
+          <a:noFill/>
+        </p:spPr>
+        <p:txBody>
+          <a:bodyPr wrap="square">
+            <a:spAutoFit/>
+          </a:bodyPr>
+          <a:lstStyle/>
+          <a:p>
+            <a:pPr algn="l"/>
+            <a:r>
+              <a:rPr sz="1700" b="1" i="0">
+                <a:solidFill>
+                  <a:srgbClr val="4A7CB4"/>
+                </a:solidFill>
+              </a:rPr>
+              <a:t>本日のアジェンダ</a:t>
+            </a:r>
+          </a:p>
+        </p:txBody>
+      </p:sp>
+      <p:sp>
+        <p:nvSpPr>
+          <p:cNvPr id="17" name="Rectangle 16"/>
+          <p:cNvSpPr/>
+          <p:nvPr/>
+        </p:nvSpPr>
+        <p:spPr>
+          <a:xfrm>
+            <a:off x="457200" y="4946904"/>
+            <a:ext cx="6647688" cy="475488"/>
+          </a:xfrm>
+          <a:prstGeom prst="rect">
+            <a:avLst/>
+          </a:prstGeom>
+          <a:solidFill>
+            <a:srgbClr val="F4F7FB"/>
+          </a:solidFill>
+          <a:ln w="6350">
+            <a:solidFill>
+              <a:srgbClr val="E4EFF7"/>
+            </a:solidFill>
+          </a:ln>
+        </p:spPr>
+        <p:style>
+          <a:lnRef idx="1">
+            <a:schemeClr val="accent1"/>
+          </a:lnRef>
+          <a:fillRef idx="3">
+            <a:schemeClr val="accent1"/>
+          </a:fillRef>
+          <a:effectRef idx="2">
+            <a:schemeClr val="accent1"/>
+          </a:effectRef>
+          <a:fontRef idx="minor">
+            <a:schemeClr val="lt1"/>
+          </a:fontRef>
+        </p:style>
+        <p:txBody>
+          <a:bodyPr rtlCol="0" anchor="ctr"/>
+          <a:lstStyle/>
+          <a:p>
+            <a:pPr algn="ctr"/>
+          </a:p>
+        </p:txBody>
+      </p:sp>
+      <p:sp>
+        <p:nvSpPr>
+          <p:cNvPr id="18" name="Rectangle 17"/>
+          <p:cNvSpPr/>
+          <p:nvPr/>
+        </p:nvSpPr>
+        <p:spPr>
+          <a:xfrm>
+            <a:off x="457200" y="4946904"/>
+            <a:ext cx="457200" cy="475488"/>
+          </a:xfrm>
+          <a:prstGeom prst="rect">
+            <a:avLst/>
+          </a:prstGeom>
+          <a:solidFill>
+            <a:srgbClr val="4A7CB4"/>
+          </a:solidFill>
+          <a:ln>
+            <a:noFill/>
+          </a:ln>
+        </p:spPr>
+        <p:style>
+          <a:lnRef idx="1">
+            <a:schemeClr val="accent1"/>
+          </a:lnRef>
+          <a:fillRef idx="3">
+            <a:schemeClr val="accent1"/>
+          </a:fillRef>
+          <a:effectRef idx="2">
+            <a:schemeClr val="accent1"/>
+          </a:effectRef>
+          <a:fontRef idx="minor">
+            <a:schemeClr val="lt1"/>
+          </a:fontRef>
+        </p:style>
+        <p:txBody>
+          <a:bodyPr rtlCol="0" anchor="ctr"/>
+          <a:lstStyle/>
+          <a:p>
+            <a:pPr algn="ctr"/>
+          </a:p>
+        </p:txBody>
+      </p:sp>
+      <p:sp>
+        <p:nvSpPr>
+          <p:cNvPr id="19" name="TextBox 18"/>
+          <p:cNvSpPr txBox="1"/>
+          <p:nvPr/>
+        </p:nvSpPr>
+        <p:spPr>
+          <a:xfrm>
+            <a:off x="457200" y="5020056"/>
+            <a:ext cx="457200" cy="365760"/>
+          </a:xfrm>
+          <a:prstGeom prst="rect">
+            <a:avLst/>
+          </a:prstGeom>
+          <a:noFill/>
+        </p:spPr>
+        <p:txBody>
+          <a:bodyPr wrap="square">
+            <a:spAutoFit/>
+          </a:bodyPr>
+          <a:lstStyle/>
+          <a:p>
+            <a:pPr algn="ctr"/>
+            <a:r>
+              <a:rPr sz="1500" b="1" i="0">
                 <a:solidFill>
                   <a:srgbClr val="FFFFFF"/>
                 </a:solidFill>
@@ -3927,14 +4269,48 @@
       </p:sp>
       <p:sp>
         <p:nvSpPr>
-          <p:cNvPr id="17" name="Rectangle 16"/>
+          <p:cNvPr id="20" name="TextBox 19"/>
+          <p:cNvSpPr txBox="1"/>
+          <p:nvPr/>
+        </p:nvSpPr>
+        <p:spPr>
+          <a:xfrm>
+            <a:off x="1005840" y="5038344"/>
+            <a:ext cx="6035040" cy="347472"/>
+          </a:xfrm>
+          <a:prstGeom prst="rect">
+            <a:avLst/>
+          </a:prstGeom>
+          <a:noFill/>
+        </p:spPr>
+        <p:txBody>
+          <a:bodyPr wrap="square">
+            <a:spAutoFit/>
+          </a:bodyPr>
+          <a:lstStyle/>
+          <a:p>
+            <a:pPr algn="l"/>
+            <a:r>
+              <a:rPr sz="1500" b="0" i="0">
+                <a:solidFill>
+                  <a:srgbClr val="222222"/>
+                </a:solidFill>
+              </a:rPr>
+              <a:t>メンバー紹介・役割分担</a:t>
+            </a:r>
+          </a:p>
+        </p:txBody>
+      </p:sp>
+      <p:sp>
+        <p:nvSpPr>
+          <p:cNvPr id="21" name="Rectangle 20"/>
           <p:cNvSpPr/>
           <p:nvPr/>
         </p:nvSpPr>
         <p:spPr>
           <a:xfrm>
-            <a:off x="6885432" y="1600200"/>
-            <a:ext cx="4892040" cy="475488"/>
+            <a:off x="457200" y="5458968"/>
+            <a:ext cx="6647688" cy="475488"/>
           </a:xfrm>
           <a:prstGeom prst="rect">
             <a:avLst/>
@@ -3942,9 +4318,9 @@
           <a:solidFill>
             <a:srgbClr val="FFFFFF"/>
           </a:solidFill>
-          <a:ln w="9525">
+          <a:ln w="6350">
             <a:solidFill>
-              <a:srgbClr val="D6E4F0"/>
+              <a:srgbClr val="E4EFF7"/>
             </a:solidFill>
           </a:ln>
         </p:spPr>
@@ -3972,54 +4348,20 @@
       </p:sp>
       <p:sp>
         <p:nvSpPr>
-          <p:cNvPr id="18" name="TextBox 17"/>
-          <p:cNvSpPr txBox="1"/>
-          <p:nvPr/>
-        </p:nvSpPr>
-        <p:spPr>
-          <a:xfrm>
-            <a:off x="7022592" y="1664208"/>
-            <a:ext cx="4663440" cy="402336"/>
-          </a:xfrm>
-          <a:prstGeom prst="rect">
-            <a:avLst/>
-          </a:prstGeom>
-          <a:noFill/>
-        </p:spPr>
-        <p:txBody>
-          <a:bodyPr wrap="square">
-            <a:spAutoFit/>
-          </a:bodyPr>
-          <a:lstStyle/>
-          <a:p>
-            <a:pPr algn="l"/>
-            <a:r>
-              <a:rPr sz="1500" b="0">
-                <a:solidFill>
-                  <a:srgbClr val="262626"/>
-                </a:solidFill>
-              </a:rPr>
-              <a:t>メンバー紹介・役割分担</a:t>
-            </a:r>
-          </a:p>
-        </p:txBody>
-      </p:sp>
-      <p:sp>
-        <p:nvSpPr>
-          <p:cNvPr id="19" name="Rectangle 18"/>
+          <p:cNvPr id="22" name="Rectangle 21"/>
           <p:cNvSpPr/>
           <p:nvPr/>
         </p:nvSpPr>
         <p:spPr>
           <a:xfrm>
-            <a:off x="6400800" y="2148840"/>
+            <a:off x="457200" y="5458968"/>
             <a:ext cx="457200" cy="475488"/>
           </a:xfrm>
           <a:prstGeom prst="rect">
             <a:avLst/>
           </a:prstGeom>
           <a:solidFill>
-            <a:srgbClr val="1F3564"/>
+            <a:srgbClr val="4A7CB4"/>
           </a:solidFill>
           <a:ln>
             <a:noFill/>
@@ -4049,14 +4391,14 @@
       </p:sp>
       <p:sp>
         <p:nvSpPr>
-          <p:cNvPr id="20" name="TextBox 19"/>
+          <p:cNvPr id="23" name="TextBox 22"/>
           <p:cNvSpPr txBox="1"/>
           <p:nvPr/>
         </p:nvSpPr>
         <p:spPr>
           <a:xfrm>
-            <a:off x="6400800" y="2194560"/>
-            <a:ext cx="457200" cy="402336"/>
+            <a:off x="457200" y="5532120"/>
+            <a:ext cx="457200" cy="365760"/>
           </a:xfrm>
           <a:prstGeom prst="rect">
             <a:avLst/>
@@ -4071,7 +4413,7 @@
           <a:p>
             <a:pPr algn="ctr"/>
             <a:r>
-              <a:rPr sz="1600" b="1">
+              <a:rPr sz="1500" b="1" i="0">
                 <a:solidFill>
                   <a:srgbClr val="FFFFFF"/>
                 </a:solidFill>
@@ -4083,24 +4425,58 @@
       </p:sp>
       <p:sp>
         <p:nvSpPr>
-          <p:cNvPr id="21" name="Rectangle 20"/>
+          <p:cNvPr id="24" name="TextBox 23"/>
+          <p:cNvSpPr txBox="1"/>
+          <p:nvPr/>
+        </p:nvSpPr>
+        <p:spPr>
+          <a:xfrm>
+            <a:off x="1005840" y="5550408"/>
+            <a:ext cx="6035040" cy="347472"/>
+          </a:xfrm>
+          <a:prstGeom prst="rect">
+            <a:avLst/>
+          </a:prstGeom>
+          <a:noFill/>
+        </p:spPr>
+        <p:txBody>
+          <a:bodyPr wrap="square">
+            <a:spAutoFit/>
+          </a:bodyPr>
+          <a:lstStyle/>
+          <a:p>
+            <a:pPr algn="l"/>
+            <a:r>
+              <a:rPr sz="1500" b="0" i="0">
+                <a:solidFill>
+                  <a:srgbClr val="222222"/>
+                </a:solidFill>
+              </a:rPr>
+              <a:t>活動スコープ・スケジュールの確認</a:t>
+            </a:r>
+          </a:p>
+        </p:txBody>
+      </p:sp>
+      <p:sp>
+        <p:nvSpPr>
+          <p:cNvPr id="25" name="Rectangle 24"/>
           <p:cNvSpPr/>
           <p:nvPr/>
         </p:nvSpPr>
         <p:spPr>
           <a:xfrm>
-            <a:off x="6885432" y="2148840"/>
-            <a:ext cx="4892040" cy="475488"/>
+            <a:off x="457200" y="5971032"/>
+            <a:ext cx="6647688" cy="475488"/>
           </a:xfrm>
           <a:prstGeom prst="rect">
             <a:avLst/>
           </a:prstGeom>
           <a:solidFill>
-            <a:srgbClr val="F2F2F2"/>
+            <a:srgbClr val="F4F7FB"/>
           </a:solidFill>
-          <a:ln w="9525">
+          <a:ln w="6350">
             <a:solidFill>
-              <a:srgbClr val="D6E4F0"/>
+              <a:srgbClr val="E4EFF7"/>
             </a:solidFill>
           </a:ln>
         </p:spPr>
@@ -4128,54 +4504,20 @@
       </p:sp>
       <p:sp>
         <p:nvSpPr>
-          <p:cNvPr id="22" name="TextBox 21"/>
-          <p:cNvSpPr txBox="1"/>
-          <p:nvPr/>
-        </p:nvSpPr>
-        <p:spPr>
-          <a:xfrm>
-            <a:off x="7022592" y="2212848"/>
-            <a:ext cx="4663440" cy="402336"/>
-          </a:xfrm>
-          <a:prstGeom prst="rect">
-            <a:avLst/>
-          </a:prstGeom>
-          <a:noFill/>
-        </p:spPr>
-        <p:txBody>
-          <a:bodyPr wrap="square">
-            <a:spAutoFit/>
-          </a:bodyPr>
-          <a:lstStyle/>
-          <a:p>
-            <a:pPr algn="l"/>
-            <a:r>
-              <a:rPr sz="1500" b="0">
-                <a:solidFill>
-                  <a:srgbClr val="262626"/>
-                </a:solidFill>
-              </a:rPr>
-              <a:t>活動スコープ・スケジュールの確認</a:t>
-            </a:r>
-          </a:p>
-        </p:txBody>
-      </p:sp>
-      <p:sp>
-        <p:nvSpPr>
-          <p:cNvPr id="23" name="Rectangle 22"/>
+          <p:cNvPr id="26" name="Rectangle 25"/>
           <p:cNvSpPr/>
           <p:nvPr/>
         </p:nvSpPr>
         <p:spPr>
           <a:xfrm>
-            <a:off x="6400800" y="2697480"/>
+            <a:off x="457200" y="5971032"/>
             <a:ext cx="457200" cy="475488"/>
           </a:xfrm>
           <a:prstGeom prst="rect">
             <a:avLst/>
           </a:prstGeom>
           <a:solidFill>
-            <a:srgbClr val="1F3564"/>
+            <a:srgbClr val="4A7CB4"/>
           </a:solidFill>
           <a:ln>
             <a:noFill/>
@@ -4205,14 +4547,14 @@
       </p:sp>
       <p:sp>
         <p:nvSpPr>
-          <p:cNvPr id="24" name="TextBox 23"/>
+          <p:cNvPr id="27" name="TextBox 26"/>
           <p:cNvSpPr txBox="1"/>
           <p:nvPr/>
         </p:nvSpPr>
         <p:spPr>
           <a:xfrm>
-            <a:off x="6400800" y="2743200"/>
-            <a:ext cx="457200" cy="402336"/>
+            <a:off x="457200" y="6044184"/>
+            <a:ext cx="457200" cy="365760"/>
           </a:xfrm>
           <a:prstGeom prst="rect">
             <a:avLst/>
@@ -4227,7 +4569,7 @@
           <a:p>
             <a:pPr algn="ctr"/>
             <a:r>
-              <a:rPr sz="1600" b="1">
+              <a:rPr sz="1500" b="1" i="0">
                 <a:solidFill>
                   <a:srgbClr val="FFFFFF"/>
                 </a:solidFill>
@@ -4239,14 +4581,48 @@
       </p:sp>
       <p:sp>
         <p:nvSpPr>
-          <p:cNvPr id="25" name="Rectangle 24"/>
+          <p:cNvPr id="28" name="TextBox 27"/>
+          <p:cNvSpPr txBox="1"/>
+          <p:nvPr/>
+        </p:nvSpPr>
+        <p:spPr>
+          <a:xfrm>
+            <a:off x="1005840" y="6062472"/>
+            <a:ext cx="6035040" cy="347472"/>
+          </a:xfrm>
+          <a:prstGeom prst="rect">
+            <a:avLst/>
+          </a:prstGeom>
+          <a:noFill/>
+        </p:spPr>
+        <p:txBody>
+          <a:bodyPr wrap="square">
+            <a:spAutoFit/>
+          </a:bodyPr>
+          <a:lstStyle/>
+          <a:p>
+            <a:pPr algn="l"/>
+            <a:r>
+              <a:rPr sz="1500" b="0" i="0">
+                <a:solidFill>
+                  <a:srgbClr val="222222"/>
+                </a:solidFill>
+              </a:rPr>
+              <a:t>コンサル業者選定の進め方</a:t>
+            </a:r>
+          </a:p>
+        </p:txBody>
+      </p:sp>
+      <p:sp>
+        <p:nvSpPr>
+          <p:cNvPr id="29" name="Rectangle 28"/>
           <p:cNvSpPr/>
           <p:nvPr/>
         </p:nvSpPr>
         <p:spPr>
           <a:xfrm>
-            <a:off x="6885432" y="2697480"/>
-            <a:ext cx="4892040" cy="475488"/>
+            <a:off x="457200" y="6483096"/>
+            <a:ext cx="6647688" cy="475488"/>
           </a:xfrm>
           <a:prstGeom prst="rect">
             <a:avLst/>
@@ -4254,9 +4630,9 @@
           <a:solidFill>
             <a:srgbClr val="FFFFFF"/>
           </a:solidFill>
-          <a:ln w="9525">
+          <a:ln w="6350">
             <a:solidFill>
-              <a:srgbClr val="D6E4F0"/>
+              <a:srgbClr val="E4EFF7"/>
             </a:solidFill>
           </a:ln>
         </p:spPr>
@@ -4284,54 +4660,20 @@
       </p:sp>
       <p:sp>
         <p:nvSpPr>
-          <p:cNvPr id="26" name="TextBox 25"/>
-          <p:cNvSpPr txBox="1"/>
-          <p:nvPr/>
-        </p:nvSpPr>
-        <p:spPr>
-          <a:xfrm>
-            <a:off x="7022592" y="2761488"/>
-            <a:ext cx="4663440" cy="402336"/>
-          </a:xfrm>
-          <a:prstGeom prst="rect">
-            <a:avLst/>
-          </a:prstGeom>
-          <a:noFill/>
-        </p:spPr>
-        <p:txBody>
-          <a:bodyPr wrap="square">
-            <a:spAutoFit/>
-          </a:bodyPr>
-          <a:lstStyle/>
-          <a:p>
-            <a:pPr algn="l"/>
-            <a:r>
-              <a:rPr sz="1500" b="0">
-                <a:solidFill>
-                  <a:srgbClr val="262626"/>
-                </a:solidFill>
-              </a:rPr>
-              <a:t>コンサル業者選定の進め方</a:t>
-            </a:r>
-          </a:p>
-        </p:txBody>
-      </p:sp>
-      <p:sp>
-        <p:nvSpPr>
-          <p:cNvPr id="27" name="Rectangle 26"/>
+          <p:cNvPr id="30" name="Rectangle 29"/>
           <p:cNvSpPr/>
           <p:nvPr/>
         </p:nvSpPr>
         <p:spPr>
           <a:xfrm>
-            <a:off x="6400800" y="3246120"/>
+            <a:off x="457200" y="6483096"/>
             <a:ext cx="457200" cy="475488"/>
           </a:xfrm>
           <a:prstGeom prst="rect">
             <a:avLst/>
           </a:prstGeom>
           <a:solidFill>
-            <a:srgbClr val="1F3564"/>
+            <a:srgbClr val="4A7CB4"/>
           </a:solidFill>
           <a:ln>
             <a:noFill/>
@@ -4361,14 +4703,14 @@
       </p:sp>
       <p:sp>
         <p:nvSpPr>
-          <p:cNvPr id="28" name="TextBox 27"/>
+          <p:cNvPr id="31" name="TextBox 30"/>
           <p:cNvSpPr txBox="1"/>
           <p:nvPr/>
         </p:nvSpPr>
         <p:spPr>
           <a:xfrm>
-            <a:off x="6400800" y="3291840"/>
-            <a:ext cx="457200" cy="402336"/>
+            <a:off x="457200" y="6556248"/>
+            <a:ext cx="457200" cy="365760"/>
           </a:xfrm>
           <a:prstGeom prst="rect">
             <a:avLst/>
@@ -4383,7 +4725,7 @@
           <a:p>
             <a:pPr algn="ctr"/>
             <a:r>
-              <a:rPr sz="1600" b="1">
+              <a:rPr sz="1500" b="1" i="0">
                 <a:solidFill>
                   <a:srgbClr val="FFFFFF"/>
                 </a:solidFill>
@@ -4395,24 +4737,58 @@
       </p:sp>
       <p:sp>
         <p:nvSpPr>
-          <p:cNvPr id="29" name="Rectangle 28"/>
+          <p:cNvPr id="32" name="TextBox 31"/>
+          <p:cNvSpPr txBox="1"/>
+          <p:nvPr/>
+        </p:nvSpPr>
+        <p:spPr>
+          <a:xfrm>
+            <a:off x="1005840" y="6574536"/>
+            <a:ext cx="6035040" cy="347472"/>
+          </a:xfrm>
+          <a:prstGeom prst="rect">
+            <a:avLst/>
+          </a:prstGeom>
+          <a:noFill/>
+        </p:spPr>
+        <p:txBody>
+          <a:bodyPr wrap="square">
+            <a:spAutoFit/>
+          </a:bodyPr>
+          <a:lstStyle/>
+          <a:p>
+            <a:pPr algn="l"/>
+            <a:r>
+              <a:rPr sz="1500" b="0" i="0">
+                <a:solidFill>
+                  <a:srgbClr val="222222"/>
+                </a:solidFill>
+              </a:rPr>
+              <a:t>省エネ改修・緊急修繕の総会提案（新テーマ）</a:t>
+            </a:r>
+          </a:p>
+        </p:txBody>
+      </p:sp>
+      <p:sp>
+        <p:nvSpPr>
+          <p:cNvPr id="33" name="Rectangle 32"/>
           <p:cNvSpPr/>
           <p:nvPr/>
         </p:nvSpPr>
         <p:spPr>
           <a:xfrm>
-            <a:off x="6885432" y="3246120"/>
-            <a:ext cx="4892040" cy="475488"/>
+            <a:off x="457200" y="6995160"/>
+            <a:ext cx="6647688" cy="475488"/>
           </a:xfrm>
           <a:prstGeom prst="rect">
             <a:avLst/>
           </a:prstGeom>
           <a:solidFill>
-            <a:srgbClr val="F2F2F2"/>
+            <a:srgbClr val="F4F7FB"/>
           </a:solidFill>
-          <a:ln w="9525">
+          <a:ln w="6350">
             <a:solidFill>
-              <a:srgbClr val="D6E4F0"/>
+              <a:srgbClr val="E4EFF7"/>
             </a:solidFill>
           </a:ln>
         </p:spPr>
@@ -4440,54 +4816,20 @@
       </p:sp>
       <p:sp>
         <p:nvSpPr>
-          <p:cNvPr id="30" name="TextBox 29"/>
-          <p:cNvSpPr txBox="1"/>
-          <p:nvPr/>
-        </p:nvSpPr>
-        <p:spPr>
-          <a:xfrm>
-            <a:off x="7022592" y="3310128"/>
-            <a:ext cx="4663440" cy="402336"/>
-          </a:xfrm>
-          <a:prstGeom prst="rect">
-            <a:avLst/>
-          </a:prstGeom>
-          <a:noFill/>
-        </p:spPr>
-        <p:txBody>
-          <a:bodyPr wrap="square">
-            <a:spAutoFit/>
-          </a:bodyPr>
-          <a:lstStyle/>
-          <a:p>
-            <a:pPr algn="l"/>
-            <a:r>
-              <a:rPr sz="1500" b="0">
-                <a:solidFill>
-                  <a:srgbClr val="262626"/>
-                </a:solidFill>
-              </a:rPr>
-              <a:t>省エネ改修・緊急修繕の総会提案（新テーマ）</a:t>
-            </a:r>
-          </a:p>
-        </p:txBody>
-      </p:sp>
-      <p:sp>
-        <p:nvSpPr>
-          <p:cNvPr id="31" name="Rectangle 30"/>
+          <p:cNvPr id="34" name="Rectangle 33"/>
           <p:cNvSpPr/>
           <p:nvPr/>
         </p:nvSpPr>
         <p:spPr>
           <a:xfrm>
-            <a:off x="6400800" y="3794760"/>
+            <a:off x="457200" y="6995160"/>
             <a:ext cx="457200" cy="475488"/>
           </a:xfrm>
           <a:prstGeom prst="rect">
             <a:avLst/>
           </a:prstGeom>
           <a:solidFill>
-            <a:srgbClr val="1F3564"/>
+            <a:srgbClr val="4A7CB4"/>
           </a:solidFill>
           <a:ln>
             <a:noFill/>
@@ -4517,14 +4859,14 @@
       </p:sp>
       <p:sp>
         <p:nvSpPr>
-          <p:cNvPr id="32" name="TextBox 31"/>
+          <p:cNvPr id="35" name="TextBox 34"/>
           <p:cNvSpPr txBox="1"/>
           <p:nvPr/>
         </p:nvSpPr>
         <p:spPr>
           <a:xfrm>
-            <a:off x="6400800" y="3840480"/>
-            <a:ext cx="457200" cy="402336"/>
+            <a:off x="457200" y="7068312"/>
+            <a:ext cx="457200" cy="365760"/>
           </a:xfrm>
           <a:prstGeom prst="rect">
             <a:avLst/>
@@ -4539,7 +4881,7 @@
           <a:p>
             <a:pPr algn="ctr"/>
             <a:r>
-              <a:rPr sz="1600" b="1">
+              <a:rPr sz="1500" b="1" i="0">
                 <a:solidFill>
                   <a:srgbClr val="FFFFFF"/>
                 </a:solidFill>
@@ -4551,59 +4893,14 @@
       </p:sp>
       <p:sp>
         <p:nvSpPr>
-          <p:cNvPr id="33" name="Rectangle 32"/>
-          <p:cNvSpPr/>
-          <p:nvPr/>
-        </p:nvSpPr>
-        <p:spPr>
-          <a:xfrm>
-            <a:off x="6885432" y="3794760"/>
-            <a:ext cx="4892040" cy="475488"/>
-          </a:xfrm>
-          <a:prstGeom prst="rect">
-            <a:avLst/>
-          </a:prstGeom>
-          <a:solidFill>
-            <a:srgbClr val="FFFFFF"/>
-          </a:solidFill>
-          <a:ln w="9525">
-            <a:solidFill>
-              <a:srgbClr val="D6E4F0"/>
-            </a:solidFill>
-          </a:ln>
-        </p:spPr>
-        <p:style>
-          <a:lnRef idx="1">
-            <a:schemeClr val="accent1"/>
-          </a:lnRef>
-          <a:fillRef idx="3">
-            <a:schemeClr val="accent1"/>
-          </a:fillRef>
-          <a:effectRef idx="2">
-            <a:schemeClr val="accent1"/>
-          </a:effectRef>
-          <a:fontRef idx="minor">
-            <a:schemeClr val="lt1"/>
-          </a:fontRef>
-        </p:style>
-        <p:txBody>
-          <a:bodyPr rtlCol="0" anchor="ctr"/>
-          <a:lstStyle/>
-          <a:p>
-            <a:pPr algn="ctr"/>
-          </a:p>
-        </p:txBody>
-      </p:sp>
-      <p:sp>
-        <p:nvSpPr>
-          <p:cNvPr id="34" name="TextBox 33"/>
+          <p:cNvPr id="36" name="TextBox 35"/>
           <p:cNvSpPr txBox="1"/>
           <p:nvPr/>
         </p:nvSpPr>
         <p:spPr>
           <a:xfrm>
-            <a:off x="7022592" y="3858768"/>
-            <a:ext cx="4663440" cy="402336"/>
+            <a:off x="1005840" y="7086600"/>
+            <a:ext cx="6035040" cy="347472"/>
           </a:xfrm>
           <a:prstGeom prst="rect">
             <a:avLst/>
@@ -4618,9 +4915,9 @@
           <a:p>
             <a:pPr algn="l"/>
             <a:r>
-              <a:rPr sz="1500" b="0">
+              <a:rPr sz="1500" b="0" i="0">
                 <a:solidFill>
-                  <a:srgbClr val="262626"/>
+                  <a:srgbClr val="222222"/>
                 </a:solidFill>
               </a:rPr>
               <a:t>運営ルール・決定事項・次回予定</a:t>
@@ -4655,13 +4952,13 @@
         <p:spPr>
           <a:xfrm>
             <a:off x="0" y="0"/>
-            <a:ext cx="12188952" cy="960120"/>
+            <a:ext cx="7562088" cy="164592"/>
           </a:xfrm>
           <a:prstGeom prst="rect">
             <a:avLst/>
           </a:prstGeom>
           <a:solidFill>
-            <a:srgbClr val="1F3564"/>
+            <a:srgbClr val="4A7CB4"/>
           </a:solidFill>
           <a:ln>
             <a:noFill/>
@@ -4697,8 +4994,8 @@
         </p:nvSpPr>
         <p:spPr>
           <a:xfrm>
-            <a:off x="365760" y="137160"/>
-            <a:ext cx="10972800" cy="685800"/>
+            <a:off x="457200" y="228600"/>
+            <a:ext cx="6647688" cy="594360"/>
           </a:xfrm>
           <a:prstGeom prst="rect">
             <a:avLst/>
@@ -4713,9 +5010,9 @@
           <a:p>
             <a:pPr algn="l"/>
             <a:r>
-              <a:rPr sz="2400" b="1">
+              <a:rPr sz="2200" b="1" i="0">
                 <a:solidFill>
-                  <a:srgbClr val="FFFFFF"/>
+                  <a:srgbClr val="222222"/>
                 </a:solidFill>
               </a:rPr>
               <a:t>メンバー紹介・役割分担</a:t>
@@ -4725,88 +5022,20 @@
       </p:sp>
       <p:sp>
         <p:nvSpPr>
-          <p:cNvPr id="4" name="TextBox 3"/>
-          <p:cNvSpPr txBox="1"/>
-          <p:nvPr/>
-        </p:nvSpPr>
-        <p:spPr>
-          <a:xfrm>
-            <a:off x="365760" y="6492240"/>
-            <a:ext cx="9144000" cy="274320"/>
-          </a:xfrm>
-          <a:prstGeom prst="rect">
-            <a:avLst/>
-          </a:prstGeom>
-          <a:noFill/>
-        </p:spPr>
-        <p:txBody>
-          <a:bodyPr wrap="square">
-            <a:spAutoFit/>
-          </a:bodyPr>
-          <a:lstStyle/>
-          <a:p>
-            <a:pPr algn="l"/>
-            <a:r>
-              <a:rPr sz="1000" b="0">
-                <a:solidFill>
-                  <a:srgbClr val="808080"/>
-                </a:solidFill>
-              </a:rPr>
-              <a:t>コンフォール井の頭公園南 修繕委員会 第1回定例　2026.6.7</a:t>
-            </a:r>
-          </a:p>
-        </p:txBody>
-      </p:sp>
-      <p:sp>
-        <p:nvSpPr>
-          <p:cNvPr id="5" name="TextBox 4"/>
-          <p:cNvSpPr txBox="1"/>
-          <p:nvPr/>
-        </p:nvSpPr>
-        <p:spPr>
-          <a:xfrm>
-            <a:off x="11430000" y="6492240"/>
-            <a:ext cx="640080" cy="274320"/>
-          </a:xfrm>
-          <a:prstGeom prst="rect">
-            <a:avLst/>
-          </a:prstGeom>
-          <a:noFill/>
-        </p:spPr>
-        <p:txBody>
-          <a:bodyPr wrap="square">
-            <a:spAutoFit/>
-          </a:bodyPr>
-          <a:lstStyle/>
-          <a:p>
-            <a:pPr algn="r"/>
-            <a:r>
-              <a:rPr sz="1000" b="0">
-                <a:solidFill>
-                  <a:srgbClr val="808080"/>
-                </a:solidFill>
-              </a:rPr>
-              <a:t>3 / 7</a:t>
-            </a:r>
-          </a:p>
-        </p:txBody>
-      </p:sp>
-      <p:sp>
-        <p:nvSpPr>
-          <p:cNvPr id="6" name="Rectangle 5"/>
+          <p:cNvPr id="4" name="Rectangle 3"/>
           <p:cNvSpPr/>
           <p:nvPr/>
         </p:nvSpPr>
         <p:spPr>
           <a:xfrm>
-            <a:off x="365760" y="1051560"/>
-            <a:ext cx="11430000" cy="457200"/>
+            <a:off x="457200" y="822960"/>
+            <a:ext cx="6647688" cy="19050"/>
           </a:xfrm>
           <a:prstGeom prst="rect">
             <a:avLst/>
           </a:prstGeom>
           <a:solidFill>
-            <a:srgbClr val="2E75B6"/>
+            <a:srgbClr val="4A7CB4"/>
           </a:solidFill>
           <a:ln>
             <a:noFill/>
@@ -4836,14 +5065,14 @@
       </p:sp>
       <p:sp>
         <p:nvSpPr>
-          <p:cNvPr id="7" name="TextBox 6"/>
+          <p:cNvPr id="5" name="TextBox 4"/>
           <p:cNvSpPr txBox="1"/>
           <p:nvPr/>
         </p:nvSpPr>
         <p:spPr>
           <a:xfrm>
-            <a:off x="502920" y="1078992"/>
-            <a:ext cx="2743200" cy="384048"/>
+            <a:off x="457200" y="10241280"/>
+            <a:ext cx="5943600" cy="274320"/>
           </a:xfrm>
           <a:prstGeom prst="rect">
             <a:avLst/>
@@ -4858,26 +5087,26 @@
           <a:p>
             <a:pPr algn="l"/>
             <a:r>
-              <a:rPr sz="1600" b="1">
+              <a:rPr sz="1000" b="0" i="0">
                 <a:solidFill>
-                  <a:srgbClr val="FFFFFF"/>
+                  <a:srgbClr val="555555"/>
                 </a:solidFill>
               </a:rPr>
-              <a:t>出席メンバー</a:t>
-            </a:r>
-          </a:p>
-        </p:txBody>
-      </p:sp>
-      <p:sp>
-        <p:nvSpPr>
-          <p:cNvPr id="8" name="TextBox 7"/>
+              <a:t>コンフォール井の頭公園南 修繕委員会 第1回定例　2026.6.7</a:t>
+            </a:r>
+          </a:p>
+        </p:txBody>
+      </p:sp>
+      <p:sp>
+        <p:nvSpPr>
+          <p:cNvPr id="6" name="TextBox 5"/>
           <p:cNvSpPr txBox="1"/>
           <p:nvPr/>
         </p:nvSpPr>
         <p:spPr>
           <a:xfrm>
-            <a:off x="3474720" y="1078992"/>
-            <a:ext cx="8229600" cy="384048"/>
+            <a:off x="6858000" y="10241280"/>
+            <a:ext cx="548640" cy="274320"/>
           </a:xfrm>
           <a:prstGeom prst="rect">
             <a:avLst/>
@@ -4890,34 +5119,34 @@
           </a:bodyPr>
           <a:lstStyle/>
           <a:p>
-            <a:pPr algn="ctr"/>
-            <a:r>
-              <a:rPr sz="1600" b="1">
+            <a:pPr algn="r"/>
+            <a:r>
+              <a:rPr sz="1000" b="0" i="0">
                 <a:solidFill>
-                  <a:srgbClr val="FFFFFF"/>
+                  <a:srgbClr val="555555"/>
                 </a:solidFill>
               </a:rPr>
-              <a:t>小橋　／　石川　／　十文字　／　阿部　／　武藤　／　新関</a:t>
-            </a:r>
-          </a:p>
-        </p:txBody>
-      </p:sp>
-      <p:sp>
-        <p:nvSpPr>
-          <p:cNvPr id="9" name="Rectangle 8"/>
+              <a:t>3 / 7</a:t>
+            </a:r>
+          </a:p>
+        </p:txBody>
+      </p:sp>
+      <p:sp>
+        <p:nvSpPr>
+          <p:cNvPr id="7" name="Rectangle 6"/>
           <p:cNvSpPr/>
           <p:nvPr/>
         </p:nvSpPr>
         <p:spPr>
           <a:xfrm>
-            <a:off x="365760" y="1691640"/>
-            <a:ext cx="11430000" cy="457200"/>
+            <a:off x="457200" y="10195560"/>
+            <a:ext cx="6647688" cy="12700"/>
           </a:xfrm>
           <a:prstGeom prst="rect">
             <a:avLst/>
           </a:prstGeom>
           <a:solidFill>
-            <a:srgbClr val="2E75B6"/>
+            <a:srgbClr val="E4EFF7"/>
           </a:solidFill>
           <a:ln>
             <a:noFill/>
@@ -4947,14 +5176,57 @@
       </p:sp>
       <p:sp>
         <p:nvSpPr>
-          <p:cNvPr id="10" name="TextBox 9"/>
+          <p:cNvPr id="8" name="Rectangle 7"/>
+          <p:cNvSpPr/>
+          <p:nvPr/>
+        </p:nvSpPr>
+        <p:spPr>
+          <a:xfrm>
+            <a:off x="457200" y="960120"/>
+            <a:ext cx="6647688" cy="25400"/>
+          </a:xfrm>
+          <a:prstGeom prst="rect">
+            <a:avLst/>
+          </a:prstGeom>
+          <a:solidFill>
+            <a:srgbClr val="4A7CB4"/>
+          </a:solidFill>
+          <a:ln>
+            <a:noFill/>
+          </a:ln>
+        </p:spPr>
+        <p:style>
+          <a:lnRef idx="1">
+            <a:schemeClr val="accent1"/>
+          </a:lnRef>
+          <a:fillRef idx="3">
+            <a:schemeClr val="accent1"/>
+          </a:fillRef>
+          <a:effectRef idx="2">
+            <a:schemeClr val="accent1"/>
+          </a:effectRef>
+          <a:fontRef idx="minor">
+            <a:schemeClr val="lt1"/>
+          </a:fontRef>
+        </p:style>
+        <p:txBody>
+          <a:bodyPr rtlCol="0" anchor="ctr"/>
+          <a:lstStyle/>
+          <a:p>
+            <a:pPr algn="ctr"/>
+          </a:p>
+        </p:txBody>
+      </p:sp>
+      <p:sp>
+        <p:nvSpPr>
+          <p:cNvPr id="9" name="TextBox 8"/>
           <p:cNvSpPr txBox="1"/>
           <p:nvPr/>
         </p:nvSpPr>
         <p:spPr>
           <a:xfrm>
-            <a:off x="502920" y="1728216"/>
-            <a:ext cx="10972800" cy="402336"/>
+            <a:off x="457200" y="1010920"/>
+            <a:ext cx="6647688" cy="411480"/>
           </a:xfrm>
           <a:prstGeom prst="rect">
             <a:avLst/>
@@ -4969,9 +5241,165 @@
           <a:p>
             <a:pPr algn="l"/>
             <a:r>
-              <a:rPr sz="1800" b="1">
+              <a:rPr sz="1700" b="1" i="0">
                 <a:solidFill>
-                  <a:srgbClr val="FFFFFF"/>
+                  <a:srgbClr val="4A7CB4"/>
+                </a:solidFill>
+              </a:rPr>
+              <a:t>出席メンバー</a:t>
+            </a:r>
+          </a:p>
+        </p:txBody>
+      </p:sp>
+      <p:sp>
+        <p:nvSpPr>
+          <p:cNvPr id="10" name="Rectangle 9"/>
+          <p:cNvSpPr/>
+          <p:nvPr/>
+        </p:nvSpPr>
+        <p:spPr>
+          <a:xfrm>
+            <a:off x="457200" y="1527048"/>
+            <a:ext cx="6647688" cy="594360"/>
+          </a:xfrm>
+          <a:prstGeom prst="rect">
+            <a:avLst/>
+          </a:prstGeom>
+          <a:solidFill>
+            <a:srgbClr val="F4F7FB"/>
+          </a:solidFill>
+          <a:ln w="9525">
+            <a:solidFill>
+              <a:srgbClr val="E4EFF7"/>
+            </a:solidFill>
+          </a:ln>
+        </p:spPr>
+        <p:style>
+          <a:lnRef idx="1">
+            <a:schemeClr val="accent1"/>
+          </a:lnRef>
+          <a:fillRef idx="3">
+            <a:schemeClr val="accent1"/>
+          </a:fillRef>
+          <a:effectRef idx="2">
+            <a:schemeClr val="accent1"/>
+          </a:effectRef>
+          <a:fontRef idx="minor">
+            <a:schemeClr val="lt1"/>
+          </a:fontRef>
+        </p:style>
+        <p:txBody>
+          <a:bodyPr rtlCol="0" anchor="ctr"/>
+          <a:lstStyle/>
+          <a:p>
+            <a:pPr algn="ctr"/>
+          </a:p>
+        </p:txBody>
+      </p:sp>
+      <p:sp>
+        <p:nvSpPr>
+          <p:cNvPr id="11" name="TextBox 10"/>
+          <p:cNvSpPr txBox="1"/>
+          <p:nvPr/>
+        </p:nvSpPr>
+        <p:spPr>
+          <a:xfrm>
+            <a:off x="457200" y="1572768"/>
+            <a:ext cx="6647688" cy="502920"/>
+          </a:xfrm>
+          <a:prstGeom prst="rect">
+            <a:avLst/>
+          </a:prstGeom>
+          <a:noFill/>
+        </p:spPr>
+        <p:txBody>
+          <a:bodyPr wrap="square">
+            <a:spAutoFit/>
+          </a:bodyPr>
+          <a:lstStyle/>
+          <a:p>
+            <a:pPr algn="ctr"/>
+            <a:r>
+              <a:rPr sz="1800" b="1" i="0">
+                <a:solidFill>
+                  <a:srgbClr val="222222"/>
+                </a:solidFill>
+              </a:rPr>
+              <a:t>小橋　　石川　　十文字　　阿部　　武藤　　新関</a:t>
+            </a:r>
+          </a:p>
+        </p:txBody>
+      </p:sp>
+      <p:sp>
+        <p:nvSpPr>
+          <p:cNvPr id="12" name="Rectangle 11"/>
+          <p:cNvSpPr/>
+          <p:nvPr/>
+        </p:nvSpPr>
+        <p:spPr>
+          <a:xfrm>
+            <a:off x="457200" y="2578608"/>
+            <a:ext cx="6647688" cy="25400"/>
+          </a:xfrm>
+          <a:prstGeom prst="rect">
+            <a:avLst/>
+          </a:prstGeom>
+          <a:solidFill>
+            <a:srgbClr val="4A7CB4"/>
+          </a:solidFill>
+          <a:ln>
+            <a:noFill/>
+          </a:ln>
+        </p:spPr>
+        <p:style>
+          <a:lnRef idx="1">
+            <a:schemeClr val="accent1"/>
+          </a:lnRef>
+          <a:fillRef idx="3">
+            <a:schemeClr val="accent1"/>
+          </a:fillRef>
+          <a:effectRef idx="2">
+            <a:schemeClr val="accent1"/>
+          </a:effectRef>
+          <a:fontRef idx="minor">
+            <a:schemeClr val="lt1"/>
+          </a:fontRef>
+        </p:style>
+        <p:txBody>
+          <a:bodyPr rtlCol="0" anchor="ctr"/>
+          <a:lstStyle/>
+          <a:p>
+            <a:pPr algn="ctr"/>
+          </a:p>
+        </p:txBody>
+      </p:sp>
+      <p:sp>
+        <p:nvSpPr>
+          <p:cNvPr id="13" name="TextBox 12"/>
+          <p:cNvSpPr txBox="1"/>
+          <p:nvPr/>
+        </p:nvSpPr>
+        <p:spPr>
+          <a:xfrm>
+            <a:off x="457200" y="2629408"/>
+            <a:ext cx="6647688" cy="411480"/>
+          </a:xfrm>
+          <a:prstGeom prst="rect">
+            <a:avLst/>
+          </a:prstGeom>
+          <a:noFill/>
+        </p:spPr>
+        <p:txBody>
+          <a:bodyPr wrap="square">
+            <a:spAutoFit/>
+          </a:bodyPr>
+          <a:lstStyle/>
+          <a:p>
+            <a:pPr algn="l"/>
+            <a:r>
+              <a:rPr sz="1700" b="1" i="0">
+                <a:solidFill>
+                  <a:srgbClr val="4A7CB4"/>
                 </a:solidFill>
               </a:rPr>
               <a:t>【議題】役割分担の決定</a:t>
@@ -4981,15 +5409,15 @@
       </p:sp>
       <p:graphicFrame>
         <p:nvGraphicFramePr>
-          <p:cNvPr id="11" name="Table 10"/>
+          <p:cNvPr id="14" name="Table 13"/>
           <p:cNvGraphicFramePr>
             <a:graphicFrameLocks noGrp="1"/>
           </p:cNvGraphicFramePr>
           <p:nvPr/>
         </p:nvGraphicFramePr>
         <p:xfrm>
-          <a:off x="548640" y="2240280"/>
-          <a:ext cx="11064240" cy="1188720"/>
+          <a:off x="457200" y="3145536"/>
+          <a:ext cx="6647688" cy="1234440"/>
         </p:xfrm>
         <a:graphic>
           <a:graphicData uri="http://schemas.openxmlformats.org/drawingml/2006/table">
@@ -4998,10 +5426,10 @@
                 <a:tableStyleId>{5C22544A-7EE6-4342-B048-85BDC9FD1C3A}</a:tableStyleId>
               </a:tblPr>
               <a:tblGrid>
-                <a:gridCol w="2011680"/>
-                <a:gridCol w="9052560"/>
+                <a:gridCol w="1463040"/>
+                <a:gridCol w="5184648"/>
               </a:tblGrid>
-              <a:tr h="396240">
+              <a:tr h="411480">
                 <a:tc>
                   <a:txBody>
                     <a:bodyPr/>
@@ -5009,9 +5437,9 @@
                     <a:p>
                       <a:pPr algn="ctr"/>
                       <a:r>
-                        <a:rPr sz="1500" b="1">
+                        <a:rPr sz="1400" b="1">
                           <a:solidFill>
-                            <a:srgbClr val="FFFFFF"/>
+                            <a:srgbClr val="4A7CB4"/>
                           </a:solidFill>
                         </a:rPr>
                         <a:t>役割</a:t>
@@ -5020,7 +5448,7 @@
                   </a:txBody>
                   <a:tcPr>
                     <a:solidFill>
-                      <a:srgbClr val="2E75B6"/>
+                      <a:srgbClr val="E4EFF7"/>
                     </a:solidFill>
                   </a:tcPr>
                 </a:tc>
@@ -5031,9 +5459,9 @@
                     <a:p>
                       <a:pPr algn="ctr"/>
                       <a:r>
-                        <a:rPr sz="1500" b="1">
+                        <a:rPr sz="1400" b="1">
                           <a:solidFill>
-                            <a:srgbClr val="FFFFFF"/>
+                            <a:srgbClr val="4A7CB4"/>
                           </a:solidFill>
                         </a:rPr>
                         <a:t>内容</a:t>
@@ -5042,21 +5470,21 @@
                   </a:txBody>
                   <a:tcPr>
                     <a:solidFill>
-                      <a:srgbClr val="2E75B6"/>
+                      <a:srgbClr val="E4EFF7"/>
                     </a:solidFill>
                   </a:tcPr>
                 </a:tc>
               </a:tr>
-              <a:tr h="396240">
+              <a:tr h="411480">
                 <a:tc>
                   <a:txBody>
                     <a:bodyPr/>
                     <a:lstStyle/>
                     <a:p>
                       <a:r>
-                        <a:rPr sz="1500">
+                        <a:rPr sz="1400">
                           <a:solidFill>
-                            <a:srgbClr val="262626"/>
+                            <a:srgbClr val="222222"/>
                           </a:solidFill>
                         </a:rPr>
                         <a:t>委員長</a:t>
@@ -5065,7 +5493,7 @@
                   </a:txBody>
                   <a:tcPr>
                     <a:solidFill>
-                      <a:srgbClr val="F2F2F2"/>
+                      <a:srgbClr val="F4F7FB"/>
                     </a:solidFill>
                   </a:tcPr>
                 </a:tc>
@@ -5075,9 +5503,9 @@
                     <a:lstStyle/>
                     <a:p>
                       <a:r>
-                        <a:rPr sz="1500">
+                        <a:rPr sz="1400">
                           <a:solidFill>
-                            <a:srgbClr val="262626"/>
+                            <a:srgbClr val="222222"/>
                           </a:solidFill>
                         </a:rPr>
                         <a:t>委員会の取りまとめ・対外窓口・理事会への報告</a:t>
@@ -5086,21 +5514,21 @@
                   </a:txBody>
                   <a:tcPr>
                     <a:solidFill>
-                      <a:srgbClr val="F2F2F2"/>
+                      <a:srgbClr val="F4F7FB"/>
                     </a:solidFill>
                   </a:tcPr>
                 </a:tc>
               </a:tr>
-              <a:tr h="396240">
+              <a:tr h="411480">
                 <a:tc>
                   <a:txBody>
                     <a:bodyPr/>
                     <a:lstStyle/>
                     <a:p>
                       <a:r>
-                        <a:rPr sz="1500">
+                        <a:rPr sz="1400">
                           <a:solidFill>
-                            <a:srgbClr val="262626"/>
+                            <a:srgbClr val="222222"/>
                           </a:solidFill>
                         </a:rPr>
                         <a:t>副委員長</a:t>
@@ -5119,9 +5547,9 @@
                     <a:lstStyle/>
                     <a:p>
                       <a:r>
-                        <a:rPr sz="1500">
+                        <a:rPr sz="1400">
                           <a:solidFill>
-                            <a:srgbClr val="262626"/>
+                            <a:srgbClr val="222222"/>
                           </a:solidFill>
                         </a:rPr>
                         <a:t>委員長補佐・議事録管理（AIツール活用）・情報共有の整理</a:t>
@@ -5141,23 +5569,25 @@
       </p:graphicFrame>
       <p:sp>
         <p:nvSpPr>
-          <p:cNvPr id="12" name="Rectangle 11"/>
+          <p:cNvPr id="15" name="Rectangle 14"/>
           <p:cNvSpPr/>
           <p:nvPr/>
         </p:nvSpPr>
         <p:spPr>
           <a:xfrm>
-            <a:off x="365760" y="3611880"/>
-            <a:ext cx="11430000" cy="420624"/>
+            <a:off x="457200" y="4562856"/>
+            <a:ext cx="6647688" cy="1188720"/>
           </a:xfrm>
           <a:prstGeom prst="rect">
             <a:avLst/>
           </a:prstGeom>
           <a:solidFill>
-            <a:srgbClr val="D6E4F0"/>
+            <a:srgbClr val="FFF3DC"/>
           </a:solidFill>
-          <a:ln>
-            <a:noFill/>
+          <a:ln w="9525">
+            <a:solidFill>
+              <a:srgbClr val="E0A030"/>
+            </a:solidFill>
           </a:ln>
         </p:spPr>
         <p:style>
@@ -5184,14 +5614,14 @@
       </p:sp>
       <p:sp>
         <p:nvSpPr>
-          <p:cNvPr id="13" name="TextBox 12"/>
+          <p:cNvPr id="16" name="TextBox 15"/>
           <p:cNvSpPr txBox="1"/>
           <p:nvPr/>
         </p:nvSpPr>
         <p:spPr>
           <a:xfrm>
-            <a:off x="502920" y="3639312"/>
-            <a:ext cx="10972800" cy="365760"/>
+            <a:off x="566928" y="4617720"/>
+            <a:ext cx="6483096" cy="1097280"/>
           </a:xfrm>
           <a:prstGeom prst="rect">
             <a:avLst/>
@@ -5206,80 +5636,14 @@
           <a:p>
             <a:pPr algn="l"/>
             <a:r>
-              <a:rPr sz="1500" b="1">
+              <a:rPr sz="1300" b="0" i="0">
                 <a:solidFill>
-                  <a:srgbClr val="1F3564"/>
+                  <a:srgbClr val="6B4000"/>
                 </a:solidFill>
               </a:rPr>
-              <a:t>追加担当について（本日議論）</a:t>
-            </a:r>
-          </a:p>
-        </p:txBody>
-      </p:sp>
-      <p:sp>
-        <p:nvSpPr>
-          <p:cNvPr id="14" name="TextBox 13"/>
-          <p:cNvSpPr txBox="1"/>
-          <p:nvPr/>
-        </p:nvSpPr>
-        <p:spPr>
-          <a:xfrm>
-            <a:off x="640080" y="4160520"/>
-            <a:ext cx="10972800" cy="502920"/>
-          </a:xfrm>
-          <a:prstGeom prst="rect">
-            <a:avLst/>
-          </a:prstGeom>
-          <a:noFill/>
-        </p:spPr>
-        <p:txBody>
-          <a:bodyPr wrap="square">
-            <a:spAutoFit/>
-          </a:bodyPr>
-          <a:lstStyle/>
-          <a:p>
-            <a:pPr algn="l"/>
-            <a:r>
-              <a:rPr sz="1500" b="0">
-                <a:solidFill>
-                  <a:srgbClr val="262626"/>
-                </a:solidFill>
-              </a:rPr>
-              <a:t>● 積立金評価担当（修繕積立金の適正性検証）を設けるか</a:t>
-            </a:r>
-          </a:p>
-        </p:txBody>
-      </p:sp>
-      <p:sp>
-        <p:nvSpPr>
-          <p:cNvPr id="15" name="TextBox 14"/>
-          <p:cNvSpPr txBox="1"/>
-          <p:nvPr/>
-        </p:nvSpPr>
-        <p:spPr>
-          <a:xfrm>
-            <a:off x="640080" y="4690872"/>
-            <a:ext cx="10972800" cy="502920"/>
-          </a:xfrm>
-          <a:prstGeom prst="rect">
-            <a:avLst/>
-          </a:prstGeom>
-          <a:noFill/>
-        </p:spPr>
-        <p:txBody>
-          <a:bodyPr wrap="square">
-            <a:spAutoFit/>
-          </a:bodyPr>
-          <a:lstStyle/>
-          <a:p>
-            <a:pPr algn="l"/>
-            <a:r>
-              <a:rPr sz="1500" b="0">
-                <a:solidFill>
-                  <a:srgbClr val="262626"/>
-                </a:solidFill>
-              </a:rPr>
-              <a:t>● その他、必要な担当・役割があるかを議論する</a:t>
+              <a:t>追加担当について（本日議論）
+● 積立金評価担当（修繕積立金の適正性検証）を設けるか
+● その他、必要な担当・役割があるかを議論する</a:t>
             </a:r>
           </a:p>
         </p:txBody>
@@ -5311,13 +5675,13 @@
         <p:spPr>
           <a:xfrm>
             <a:off x="0" y="0"/>
-            <a:ext cx="12188952" cy="960120"/>
+            <a:ext cx="7562088" cy="164592"/>
           </a:xfrm>
           <a:prstGeom prst="rect">
             <a:avLst/>
           </a:prstGeom>
           <a:solidFill>
-            <a:srgbClr val="1F3564"/>
+            <a:srgbClr val="4A7CB4"/>
           </a:solidFill>
           <a:ln>
             <a:noFill/>
@@ -5353,8 +5717,8 @@
         </p:nvSpPr>
         <p:spPr>
           <a:xfrm>
-            <a:off x="365760" y="137160"/>
-            <a:ext cx="10972800" cy="685800"/>
+            <a:off x="457200" y="228600"/>
+            <a:ext cx="6647688" cy="594360"/>
           </a:xfrm>
           <a:prstGeom prst="rect">
             <a:avLst/>
@@ -5369,9 +5733,9 @@
           <a:p>
             <a:pPr algn="l"/>
             <a:r>
-              <a:rPr sz="2400" b="1">
+              <a:rPr sz="2200" b="1" i="0">
                 <a:solidFill>
-                  <a:srgbClr val="FFFFFF"/>
+                  <a:srgbClr val="222222"/>
                 </a:solidFill>
               </a:rPr>
               <a:t>活動スコープ・改定スケジュール</a:t>
@@ -5381,88 +5745,20 @@
       </p:sp>
       <p:sp>
         <p:nvSpPr>
-          <p:cNvPr id="4" name="TextBox 3"/>
-          <p:cNvSpPr txBox="1"/>
-          <p:nvPr/>
-        </p:nvSpPr>
-        <p:spPr>
-          <a:xfrm>
-            <a:off x="365760" y="6492240"/>
-            <a:ext cx="9144000" cy="274320"/>
-          </a:xfrm>
-          <a:prstGeom prst="rect">
-            <a:avLst/>
-          </a:prstGeom>
-          <a:noFill/>
-        </p:spPr>
-        <p:txBody>
-          <a:bodyPr wrap="square">
-            <a:spAutoFit/>
-          </a:bodyPr>
-          <a:lstStyle/>
-          <a:p>
-            <a:pPr algn="l"/>
-            <a:r>
-              <a:rPr sz="1000" b="0">
-                <a:solidFill>
-                  <a:srgbClr val="808080"/>
-                </a:solidFill>
-              </a:rPr>
-              <a:t>コンフォール井の頭公園南 修繕委員会 第1回定例　2026.6.7</a:t>
-            </a:r>
-          </a:p>
-        </p:txBody>
-      </p:sp>
-      <p:sp>
-        <p:nvSpPr>
-          <p:cNvPr id="5" name="TextBox 4"/>
-          <p:cNvSpPr txBox="1"/>
-          <p:nvPr/>
-        </p:nvSpPr>
-        <p:spPr>
-          <a:xfrm>
-            <a:off x="11430000" y="6492240"/>
-            <a:ext cx="640080" cy="274320"/>
-          </a:xfrm>
-          <a:prstGeom prst="rect">
-            <a:avLst/>
-          </a:prstGeom>
-          <a:noFill/>
-        </p:spPr>
-        <p:txBody>
-          <a:bodyPr wrap="square">
-            <a:spAutoFit/>
-          </a:bodyPr>
-          <a:lstStyle/>
-          <a:p>
-            <a:pPr algn="r"/>
-            <a:r>
-              <a:rPr sz="1000" b="0">
-                <a:solidFill>
-                  <a:srgbClr val="808080"/>
-                </a:solidFill>
-              </a:rPr>
-              <a:t>4 / 7</a:t>
-            </a:r>
-          </a:p>
-        </p:txBody>
-      </p:sp>
-      <p:sp>
-        <p:nvSpPr>
-          <p:cNvPr id="6" name="Rectangle 5"/>
+          <p:cNvPr id="4" name="Rectangle 3"/>
           <p:cNvSpPr/>
           <p:nvPr/>
         </p:nvSpPr>
         <p:spPr>
           <a:xfrm>
-            <a:off x="365760" y="1005840"/>
-            <a:ext cx="11430000" cy="457200"/>
+            <a:off x="457200" y="822960"/>
+            <a:ext cx="6647688" cy="19050"/>
           </a:xfrm>
           <a:prstGeom prst="rect">
             <a:avLst/>
           </a:prstGeom>
           <a:solidFill>
-            <a:srgbClr val="2E75B6"/>
+            <a:srgbClr val="4A7CB4"/>
           </a:solidFill>
           <a:ln>
             <a:noFill/>
@@ -5492,14 +5788,14 @@
       </p:sp>
       <p:sp>
         <p:nvSpPr>
-          <p:cNvPr id="7" name="TextBox 6"/>
+          <p:cNvPr id="5" name="TextBox 4"/>
           <p:cNvSpPr txBox="1"/>
           <p:nvPr/>
         </p:nvSpPr>
         <p:spPr>
           <a:xfrm>
-            <a:off x="502920" y="1042416"/>
-            <a:ext cx="10972800" cy="402336"/>
+            <a:off x="457200" y="10241280"/>
+            <a:ext cx="5943600" cy="274320"/>
           </a:xfrm>
           <a:prstGeom prst="rect">
             <a:avLst/>
@@ -5514,32 +5810,66 @@
           <a:p>
             <a:pPr algn="l"/>
             <a:r>
-              <a:rPr sz="1800" b="1">
+              <a:rPr sz="1000" b="0" i="0">
                 <a:solidFill>
-                  <a:srgbClr val="FFFFFF"/>
+                  <a:srgbClr val="555555"/>
                 </a:solidFill>
               </a:rPr>
-              <a:t>活動スコープ（3本柱）</a:t>
-            </a:r>
-          </a:p>
-        </p:txBody>
-      </p:sp>
-      <p:sp>
-        <p:nvSpPr>
-          <p:cNvPr id="8" name="Rectangle 7"/>
+              <a:t>コンフォール井の頭公園南 修繕委員会 第1回定例　2026.6.7</a:t>
+            </a:r>
+          </a:p>
+        </p:txBody>
+      </p:sp>
+      <p:sp>
+        <p:nvSpPr>
+          <p:cNvPr id="6" name="TextBox 5"/>
+          <p:cNvSpPr txBox="1"/>
+          <p:nvPr/>
+        </p:nvSpPr>
+        <p:spPr>
+          <a:xfrm>
+            <a:off x="6858000" y="10241280"/>
+            <a:ext cx="548640" cy="274320"/>
+          </a:xfrm>
+          <a:prstGeom prst="rect">
+            <a:avLst/>
+          </a:prstGeom>
+          <a:noFill/>
+        </p:spPr>
+        <p:txBody>
+          <a:bodyPr wrap="square">
+            <a:spAutoFit/>
+          </a:bodyPr>
+          <a:lstStyle/>
+          <a:p>
+            <a:pPr algn="r"/>
+            <a:r>
+              <a:rPr sz="1000" b="0" i="0">
+                <a:solidFill>
+                  <a:srgbClr val="555555"/>
+                </a:solidFill>
+              </a:rPr>
+              <a:t>4 / 7</a:t>
+            </a:r>
+          </a:p>
+        </p:txBody>
+      </p:sp>
+      <p:sp>
+        <p:nvSpPr>
+          <p:cNvPr id="7" name="Rectangle 6"/>
           <p:cNvSpPr/>
           <p:nvPr/>
         </p:nvSpPr>
         <p:spPr>
           <a:xfrm>
-            <a:off x="365760" y="1572768"/>
-            <a:ext cx="502920" cy="548640"/>
+            <a:off x="457200" y="10195560"/>
+            <a:ext cx="6647688" cy="12700"/>
           </a:xfrm>
           <a:prstGeom prst="rect">
             <a:avLst/>
           </a:prstGeom>
           <a:solidFill>
-            <a:srgbClr val="1F3564"/>
+            <a:srgbClr val="E4EFF7"/>
           </a:solidFill>
           <a:ln>
             <a:noFill/>
@@ -5569,14 +5899,57 @@
       </p:sp>
       <p:sp>
         <p:nvSpPr>
+          <p:cNvPr id="8" name="Rectangle 7"/>
+          <p:cNvSpPr/>
+          <p:nvPr/>
+        </p:nvSpPr>
+        <p:spPr>
+          <a:xfrm>
+            <a:off x="457200" y="960120"/>
+            <a:ext cx="6647688" cy="25400"/>
+          </a:xfrm>
+          <a:prstGeom prst="rect">
+            <a:avLst/>
+          </a:prstGeom>
+          <a:solidFill>
+            <a:srgbClr val="4A7CB4"/>
+          </a:solidFill>
+          <a:ln>
+            <a:noFill/>
+          </a:ln>
+        </p:spPr>
+        <p:style>
+          <a:lnRef idx="1">
+            <a:schemeClr val="accent1"/>
+          </a:lnRef>
+          <a:fillRef idx="3">
+            <a:schemeClr val="accent1"/>
+          </a:fillRef>
+          <a:effectRef idx="2">
+            <a:schemeClr val="accent1"/>
+          </a:effectRef>
+          <a:fontRef idx="minor">
+            <a:schemeClr val="lt1"/>
+          </a:fontRef>
+        </p:style>
+        <p:txBody>
+          <a:bodyPr rtlCol="0" anchor="ctr"/>
+          <a:lstStyle/>
+          <a:p>
+            <a:pPr algn="ctr"/>
+          </a:p>
+        </p:txBody>
+      </p:sp>
+      <p:sp>
+        <p:nvSpPr>
           <p:cNvPr id="9" name="TextBox 8"/>
           <p:cNvSpPr txBox="1"/>
           <p:nvPr/>
         </p:nvSpPr>
         <p:spPr>
           <a:xfrm>
-            <a:off x="365760" y="1627632"/>
-            <a:ext cx="502920" cy="457200"/>
+            <a:off x="457200" y="1010920"/>
+            <a:ext cx="6647688" cy="411480"/>
           </a:xfrm>
           <a:prstGeom prst="rect">
             <a:avLst/>
@@ -5589,9 +5962,131 @@
           </a:bodyPr>
           <a:lstStyle/>
           <a:p>
+            <a:pPr algn="l"/>
+            <a:r>
+              <a:rPr sz="1700" b="1" i="0">
+                <a:solidFill>
+                  <a:srgbClr val="4A7CB4"/>
+                </a:solidFill>
+              </a:rPr>
+              <a:t>活動スコープ（3本柱）</a:t>
+            </a:r>
+          </a:p>
+        </p:txBody>
+      </p:sp>
+      <p:sp>
+        <p:nvSpPr>
+          <p:cNvPr id="10" name="Rectangle 9"/>
+          <p:cNvSpPr/>
+          <p:nvPr/>
+        </p:nvSpPr>
+        <p:spPr>
+          <a:xfrm>
+            <a:off x="457200" y="1527048"/>
+            <a:ext cx="6647688" cy="621792"/>
+          </a:xfrm>
+          <a:prstGeom prst="rect">
+            <a:avLst/>
+          </a:prstGeom>
+          <a:solidFill>
+            <a:srgbClr val="F4F7FB"/>
+          </a:solidFill>
+          <a:ln w="6350">
+            <a:solidFill>
+              <a:srgbClr val="E4EFF7"/>
+            </a:solidFill>
+          </a:ln>
+        </p:spPr>
+        <p:style>
+          <a:lnRef idx="1">
+            <a:schemeClr val="accent1"/>
+          </a:lnRef>
+          <a:fillRef idx="3">
+            <a:schemeClr val="accent1"/>
+          </a:fillRef>
+          <a:effectRef idx="2">
+            <a:schemeClr val="accent1"/>
+          </a:effectRef>
+          <a:fontRef idx="minor">
+            <a:schemeClr val="lt1"/>
+          </a:fontRef>
+        </p:style>
+        <p:txBody>
+          <a:bodyPr rtlCol="0" anchor="ctr"/>
+          <a:lstStyle/>
+          <a:p>
             <a:pPr algn="ctr"/>
-            <a:r>
-              <a:rPr sz="1500" b="1">
+          </a:p>
+        </p:txBody>
+      </p:sp>
+      <p:sp>
+        <p:nvSpPr>
+          <p:cNvPr id="11" name="Rectangle 10"/>
+          <p:cNvSpPr/>
+          <p:nvPr/>
+        </p:nvSpPr>
+        <p:spPr>
+          <a:xfrm>
+            <a:off x="457200" y="1527048"/>
+            <a:ext cx="420624" cy="621792"/>
+          </a:xfrm>
+          <a:prstGeom prst="rect">
+            <a:avLst/>
+          </a:prstGeom>
+          <a:solidFill>
+            <a:srgbClr val="4A7CB4"/>
+          </a:solidFill>
+          <a:ln>
+            <a:noFill/>
+          </a:ln>
+        </p:spPr>
+        <p:style>
+          <a:lnRef idx="1">
+            <a:schemeClr val="accent1"/>
+          </a:lnRef>
+          <a:fillRef idx="3">
+            <a:schemeClr val="accent1"/>
+          </a:fillRef>
+          <a:effectRef idx="2">
+            <a:schemeClr val="accent1"/>
+          </a:effectRef>
+          <a:fontRef idx="minor">
+            <a:schemeClr val="lt1"/>
+          </a:fontRef>
+        </p:style>
+        <p:txBody>
+          <a:bodyPr rtlCol="0" anchor="ctr"/>
+          <a:lstStyle/>
+          <a:p>
+            <a:pPr algn="ctr"/>
+          </a:p>
+        </p:txBody>
+      </p:sp>
+      <p:sp>
+        <p:nvSpPr>
+          <p:cNvPr id="12" name="TextBox 11"/>
+          <p:cNvSpPr txBox="1"/>
+          <p:nvPr/>
+        </p:nvSpPr>
+        <p:spPr>
+          <a:xfrm>
+            <a:off x="457200" y="1618488"/>
+            <a:ext cx="420624" cy="457200"/>
+          </a:xfrm>
+          <a:prstGeom prst="rect">
+            <a:avLst/>
+          </a:prstGeom>
+          <a:noFill/>
+        </p:spPr>
+        <p:txBody>
+          <a:bodyPr wrap="square">
+            <a:spAutoFit/>
+          </a:bodyPr>
+          <a:lstStyle/>
+          <a:p>
+            <a:pPr algn="ctr"/>
+            <a:r>
+              <a:rPr sz="1400" b="1" i="0">
                 <a:solidFill>
                   <a:srgbClr val="FFFFFF"/>
                 </a:solidFill>
@@ -5603,24 +6098,92 @@
       </p:sp>
       <p:sp>
         <p:nvSpPr>
-          <p:cNvPr id="10" name="Rectangle 9"/>
+          <p:cNvPr id="13" name="TextBox 12"/>
+          <p:cNvSpPr txBox="1"/>
+          <p:nvPr/>
+        </p:nvSpPr>
+        <p:spPr>
+          <a:xfrm>
+            <a:off x="987552" y="1563624"/>
+            <a:ext cx="6035040" cy="274320"/>
+          </a:xfrm>
+          <a:prstGeom prst="rect">
+            <a:avLst/>
+          </a:prstGeom>
+          <a:noFill/>
+        </p:spPr>
+        <p:txBody>
+          <a:bodyPr wrap="square">
+            <a:spAutoFit/>
+          </a:bodyPr>
+          <a:lstStyle/>
+          <a:p>
+            <a:pPr algn="l"/>
+            <a:r>
+              <a:rPr sz="1400" b="1" i="0">
+                <a:solidFill>
+                  <a:srgbClr val="222222"/>
+                </a:solidFill>
+              </a:rPr>
+              <a:t>長期修繕計画の策定（30年）</a:t>
+            </a:r>
+          </a:p>
+        </p:txBody>
+      </p:sp>
+      <p:sp>
+        <p:nvSpPr>
+          <p:cNvPr id="14" name="TextBox 13"/>
+          <p:cNvSpPr txBox="1"/>
+          <p:nvPr/>
+        </p:nvSpPr>
+        <p:spPr>
+          <a:xfrm>
+            <a:off x="987552" y="1837944"/>
+            <a:ext cx="6035040" cy="292608"/>
+          </a:xfrm>
+          <a:prstGeom prst="rect">
+            <a:avLst/>
+          </a:prstGeom>
+          <a:noFill/>
+        </p:spPr>
+        <p:txBody>
+          <a:bodyPr wrap="square">
+            <a:spAutoFit/>
+          </a:bodyPr>
+          <a:lstStyle/>
+          <a:p>
+            <a:pPr algn="l"/>
+            <a:r>
+              <a:rPr sz="1200" b="0" i="0">
+                <a:solidFill>
+                  <a:srgbClr val="555555"/>
+                </a:solidFill>
+              </a:rPr>
+              <a:t>コンサル選定 → 現地調査 → 計画書作成 → 総会議決</a:t>
+            </a:r>
+          </a:p>
+        </p:txBody>
+      </p:sp>
+      <p:sp>
+        <p:nvSpPr>
+          <p:cNvPr id="15" name="Rectangle 14"/>
           <p:cNvSpPr/>
           <p:nvPr/>
         </p:nvSpPr>
         <p:spPr>
           <a:xfrm>
-            <a:off x="896112" y="1572768"/>
-            <a:ext cx="10899648" cy="548640"/>
+            <a:off x="457200" y="2203704"/>
+            <a:ext cx="6647688" cy="621792"/>
           </a:xfrm>
           <a:prstGeom prst="rect">
             <a:avLst/>
           </a:prstGeom>
           <a:solidFill>
-            <a:srgbClr val="F2F2F2"/>
+            <a:srgbClr val="F4F7FB"/>
           </a:solidFill>
-          <a:ln w="9525">
+          <a:ln w="6350">
             <a:solidFill>
-              <a:srgbClr val="D6E4F0"/>
+              <a:srgbClr val="E4EFF7"/>
             </a:solidFill>
           </a:ln>
         </p:spPr>
@@ -5648,54 +6211,20 @@
       </p:sp>
       <p:sp>
         <p:nvSpPr>
-          <p:cNvPr id="11" name="TextBox 10"/>
-          <p:cNvSpPr txBox="1"/>
-          <p:nvPr/>
-        </p:nvSpPr>
-        <p:spPr>
-          <a:xfrm>
-            <a:off x="1024128" y="1636776"/>
-            <a:ext cx="10607040" cy="457200"/>
-          </a:xfrm>
-          <a:prstGeom prst="rect">
-            <a:avLst/>
-          </a:prstGeom>
-          <a:noFill/>
-        </p:spPr>
-        <p:txBody>
-          <a:bodyPr wrap="square">
-            <a:spAutoFit/>
-          </a:bodyPr>
-          <a:lstStyle/>
-          <a:p>
-            <a:pPr algn="l"/>
-            <a:r>
-              <a:rPr sz="1300" b="0">
-                <a:solidFill>
-                  <a:srgbClr val="262626"/>
-                </a:solidFill>
-              </a:rPr>
-              <a:t>長期修繕計画の策定（30年）　　コンサル選定 → 現地調査 → 計画書作成 → 総会議決</a:t>
-            </a:r>
-          </a:p>
-        </p:txBody>
-      </p:sp>
-      <p:sp>
-        <p:nvSpPr>
-          <p:cNvPr id="12" name="Rectangle 11"/>
+          <p:cNvPr id="16" name="Rectangle 15"/>
           <p:cNvSpPr/>
           <p:nvPr/>
         </p:nvSpPr>
         <p:spPr>
           <a:xfrm>
-            <a:off x="365760" y="2194560"/>
-            <a:ext cx="502920" cy="548640"/>
+            <a:off x="457200" y="2203704"/>
+            <a:ext cx="420624" cy="621792"/>
           </a:xfrm>
           <a:prstGeom prst="rect">
             <a:avLst/>
           </a:prstGeom>
           <a:solidFill>
-            <a:srgbClr val="1F3564"/>
+            <a:srgbClr val="4A7CB4"/>
           </a:solidFill>
           <a:ln>
             <a:noFill/>
@@ -5725,14 +6254,14 @@
       </p:sp>
       <p:sp>
         <p:nvSpPr>
-          <p:cNvPr id="13" name="TextBox 12"/>
+          <p:cNvPr id="17" name="TextBox 16"/>
           <p:cNvSpPr txBox="1"/>
           <p:nvPr/>
         </p:nvSpPr>
         <p:spPr>
           <a:xfrm>
-            <a:off x="365760" y="2249424"/>
-            <a:ext cx="502920" cy="457200"/>
+            <a:off x="457200" y="2295144"/>
+            <a:ext cx="420624" cy="457200"/>
           </a:xfrm>
           <a:prstGeom prst="rect">
             <a:avLst/>
@@ -5747,7 +6276,7 @@
           <a:p>
             <a:pPr algn="ctr"/>
             <a:r>
-              <a:rPr sz="1500" b="1">
+              <a:rPr sz="1400" b="1" i="0">
                 <a:solidFill>
                   <a:srgbClr val="FFFFFF"/>
                 </a:solidFill>
@@ -5759,24 +6288,92 @@
       </p:sp>
       <p:sp>
         <p:nvSpPr>
-          <p:cNvPr id="14" name="Rectangle 13"/>
+          <p:cNvPr id="18" name="TextBox 17"/>
+          <p:cNvSpPr txBox="1"/>
+          <p:nvPr/>
+        </p:nvSpPr>
+        <p:spPr>
+          <a:xfrm>
+            <a:off x="987552" y="2240280"/>
+            <a:ext cx="6035040" cy="274320"/>
+          </a:xfrm>
+          <a:prstGeom prst="rect">
+            <a:avLst/>
+          </a:prstGeom>
+          <a:noFill/>
+        </p:spPr>
+        <p:txBody>
+          <a:bodyPr wrap="square">
+            <a:spAutoFit/>
+          </a:bodyPr>
+          <a:lstStyle/>
+          <a:p>
+            <a:pPr algn="l"/>
+            <a:r>
+              <a:rPr sz="1400" b="1" i="0">
+                <a:solidFill>
+                  <a:srgbClr val="222222"/>
+                </a:solidFill>
+              </a:rPr>
+              <a:t>短期修繕計画の立案（直近5年）</a:t>
+            </a:r>
+          </a:p>
+        </p:txBody>
+      </p:sp>
+      <p:sp>
+        <p:nvSpPr>
+          <p:cNvPr id="19" name="TextBox 18"/>
+          <p:cNvSpPr txBox="1"/>
+          <p:nvPr/>
+        </p:nvSpPr>
+        <p:spPr>
+          <a:xfrm>
+            <a:off x="987552" y="2514600"/>
+            <a:ext cx="6035040" cy="292608"/>
+          </a:xfrm>
+          <a:prstGeom prst="rect">
+            <a:avLst/>
+          </a:prstGeom>
+          <a:noFill/>
+        </p:spPr>
+        <p:txBody>
+          <a:bodyPr wrap="square">
+            <a:spAutoFit/>
+          </a:bodyPr>
+          <a:lstStyle/>
+          <a:p>
+            <a:pPr algn="l"/>
+            <a:r>
+              <a:rPr sz="1200" b="0" i="0">
+                <a:solidFill>
+                  <a:srgbClr val="555555"/>
+                </a:solidFill>
+              </a:rPr>
+              <a:t>優先修繕箇所の整理 → コンサル提案 → 総会議決</a:t>
+            </a:r>
+          </a:p>
+        </p:txBody>
+      </p:sp>
+      <p:sp>
+        <p:nvSpPr>
+          <p:cNvPr id="20" name="Rectangle 19"/>
           <p:cNvSpPr/>
           <p:nvPr/>
         </p:nvSpPr>
         <p:spPr>
           <a:xfrm>
-            <a:off x="896112" y="2194560"/>
-            <a:ext cx="10899648" cy="548640"/>
+            <a:off x="457200" y="2880360"/>
+            <a:ext cx="6647688" cy="621792"/>
           </a:xfrm>
           <a:prstGeom prst="rect">
             <a:avLst/>
           </a:prstGeom>
           <a:solidFill>
-            <a:srgbClr val="F2F2F2"/>
+            <a:srgbClr val="FFF3DC"/>
           </a:solidFill>
-          <a:ln w="9525">
+          <a:ln w="6350">
             <a:solidFill>
-              <a:srgbClr val="D6E4F0"/>
+              <a:srgbClr val="E4EFF7"/>
             </a:solidFill>
           </a:ln>
         </p:spPr>
@@ -5804,54 +6401,20 @@
       </p:sp>
       <p:sp>
         <p:nvSpPr>
-          <p:cNvPr id="15" name="TextBox 14"/>
-          <p:cNvSpPr txBox="1"/>
-          <p:nvPr/>
-        </p:nvSpPr>
-        <p:spPr>
-          <a:xfrm>
-            <a:off x="1024128" y="2258568"/>
-            <a:ext cx="10607040" cy="457200"/>
-          </a:xfrm>
-          <a:prstGeom prst="rect">
-            <a:avLst/>
-          </a:prstGeom>
-          <a:noFill/>
-        </p:spPr>
-        <p:txBody>
-          <a:bodyPr wrap="square">
-            <a:spAutoFit/>
-          </a:bodyPr>
-          <a:lstStyle/>
-          <a:p>
-            <a:pPr algn="l"/>
-            <a:r>
-              <a:rPr sz="1300" b="0">
-                <a:solidFill>
-                  <a:srgbClr val="262626"/>
-                </a:solidFill>
-              </a:rPr>
-              <a:t>短期修繕計画の立案（直近5年）　　優先修繕箇所の整理 → コンサル提案 → 総会議決</a:t>
-            </a:r>
-          </a:p>
-        </p:txBody>
-      </p:sp>
-      <p:sp>
-        <p:nvSpPr>
-          <p:cNvPr id="16" name="Rectangle 15"/>
+          <p:cNvPr id="21" name="Rectangle 20"/>
           <p:cNvSpPr/>
           <p:nvPr/>
         </p:nvSpPr>
         <p:spPr>
           <a:xfrm>
-            <a:off x="365760" y="2816352"/>
-            <a:ext cx="502920" cy="548640"/>
+            <a:off x="457200" y="2880360"/>
+            <a:ext cx="420624" cy="621792"/>
           </a:xfrm>
           <a:prstGeom prst="rect">
             <a:avLst/>
           </a:prstGeom>
           <a:solidFill>
-            <a:srgbClr val="1F3564"/>
+            <a:srgbClr val="4A7CB4"/>
           </a:solidFill>
           <a:ln>
             <a:noFill/>
@@ -5881,14 +6444,14 @@
       </p:sp>
       <p:sp>
         <p:nvSpPr>
-          <p:cNvPr id="17" name="TextBox 16"/>
+          <p:cNvPr id="22" name="TextBox 21"/>
           <p:cNvSpPr txBox="1"/>
           <p:nvPr/>
         </p:nvSpPr>
         <p:spPr>
           <a:xfrm>
-            <a:off x="365760" y="2871216"/>
-            <a:ext cx="502920" cy="457200"/>
+            <a:off x="457200" y="2971800"/>
+            <a:ext cx="420624" cy="457200"/>
           </a:xfrm>
           <a:prstGeom prst="rect">
             <a:avLst/>
@@ -5903,7 +6466,7 @@
           <a:p>
             <a:pPr algn="ctr"/>
             <a:r>
-              <a:rPr sz="1500" b="1">
+              <a:rPr sz="1400" b="1" i="0">
                 <a:solidFill>
                   <a:srgbClr val="FFFFFF"/>
                 </a:solidFill>
@@ -5915,25 +6478,125 @@
       </p:sp>
       <p:sp>
         <p:nvSpPr>
-          <p:cNvPr id="18" name="Rectangle 17"/>
+          <p:cNvPr id="23" name="TextBox 22"/>
+          <p:cNvSpPr txBox="1"/>
+          <p:nvPr/>
+        </p:nvSpPr>
+        <p:spPr>
+          <a:xfrm>
+            <a:off x="987552" y="2916936"/>
+            <a:ext cx="6035040" cy="274320"/>
+          </a:xfrm>
+          <a:prstGeom prst="rect">
+            <a:avLst/>
+          </a:prstGeom>
+          <a:noFill/>
+        </p:spPr>
+        <p:txBody>
+          <a:bodyPr wrap="square">
+            <a:spAutoFit/>
+          </a:bodyPr>
+          <a:lstStyle/>
+          <a:p>
+            <a:pPr algn="l"/>
+            <a:r>
+              <a:rPr sz="1400" b="1" i="0">
+                <a:solidFill>
+                  <a:srgbClr val="222222"/>
+                </a:solidFill>
+              </a:rPr>
+              <a:t>省エネ改修・緊急修繕の提案【NEW】</a:t>
+            </a:r>
+          </a:p>
+        </p:txBody>
+      </p:sp>
+      <p:sp>
+        <p:nvSpPr>
+          <p:cNvPr id="24" name="TextBox 23"/>
+          <p:cNvSpPr txBox="1"/>
+          <p:nvPr/>
+        </p:nvSpPr>
+        <p:spPr>
+          <a:xfrm>
+            <a:off x="987552" y="3191256"/>
+            <a:ext cx="6035040" cy="292608"/>
+          </a:xfrm>
+          <a:prstGeom prst="rect">
+            <a:avLst/>
+          </a:prstGeom>
+          <a:noFill/>
+        </p:spPr>
+        <p:txBody>
+          <a:bodyPr wrap="square">
+            <a:spAutoFit/>
+          </a:bodyPr>
+          <a:lstStyle/>
+          <a:p>
+            <a:pPr algn="l"/>
+            <a:r>
+              <a:rPr sz="1200" b="0" i="0">
+                <a:solidFill>
+                  <a:srgbClr val="555555"/>
+                </a:solidFill>
+              </a:rPr>
+              <a:t>断熱窓を起点に → 積立金との整合性を確認しながら来年度総会への提案を並行推進</a:t>
+            </a:r>
+          </a:p>
+        </p:txBody>
+      </p:sp>
+      <p:sp>
+        <p:nvSpPr>
+          <p:cNvPr id="25" name="TextBox 24"/>
+          <p:cNvSpPr txBox="1"/>
+          <p:nvPr/>
+        </p:nvSpPr>
+        <p:spPr>
+          <a:xfrm>
+            <a:off x="457200" y="3739896"/>
+            <a:ext cx="6647688" cy="329184"/>
+          </a:xfrm>
+          <a:prstGeom prst="rect">
+            <a:avLst/>
+          </a:prstGeom>
+          <a:noFill/>
+        </p:spPr>
+        <p:txBody>
+          <a:bodyPr wrap="square">
+            <a:spAutoFit/>
+          </a:bodyPr>
+          <a:lstStyle/>
+          <a:p>
+            <a:pPr algn="l"/>
+            <a:r>
+              <a:rPr sz="1200" b="0" i="1">
+                <a:solidFill>
+                  <a:srgbClr val="8B6000"/>
+                </a:solidFill>
+              </a:rPr>
+              <a:t>※キックオフが5月予定から6月7日に遅延。以下は1ヶ月後ろ倒しの改定版。</a:t>
+            </a:r>
+          </a:p>
+        </p:txBody>
+      </p:sp>
+      <p:sp>
+        <p:nvSpPr>
+          <p:cNvPr id="26" name="Rectangle 25"/>
           <p:cNvSpPr/>
           <p:nvPr/>
         </p:nvSpPr>
         <p:spPr>
           <a:xfrm>
-            <a:off x="896112" y="2816352"/>
-            <a:ext cx="10899648" cy="548640"/>
+            <a:off x="457200" y="4215384"/>
+            <a:ext cx="6647688" cy="25400"/>
           </a:xfrm>
           <a:prstGeom prst="rect">
             <a:avLst/>
           </a:prstGeom>
           <a:solidFill>
-            <a:srgbClr val="FFF0CC"/>
+            <a:srgbClr val="4A7CB4"/>
           </a:solidFill>
-          <a:ln w="9525">
-            <a:solidFill>
-              <a:srgbClr val="D6E4F0"/>
-            </a:solidFill>
+          <a:ln>
+            <a:noFill/>
           </a:ln>
         </p:spPr>
         <p:style>
@@ -5960,14 +6623,14 @@
       </p:sp>
       <p:sp>
         <p:nvSpPr>
-          <p:cNvPr id="19" name="TextBox 18"/>
+          <p:cNvPr id="27" name="TextBox 26"/>
           <p:cNvSpPr txBox="1"/>
           <p:nvPr/>
         </p:nvSpPr>
         <p:spPr>
           <a:xfrm>
-            <a:off x="1024128" y="2880360"/>
-            <a:ext cx="10607040" cy="457200"/>
+            <a:off x="457200" y="4266184"/>
+            <a:ext cx="6647688" cy="411480"/>
           </a:xfrm>
           <a:prstGeom prst="rect">
             <a:avLst/>
@@ -5982,138 +6645,27 @@
           <a:p>
             <a:pPr algn="l"/>
             <a:r>
-              <a:rPr sz="1300" b="0">
+              <a:rPr sz="1700" b="1" i="0">
                 <a:solidFill>
-                  <a:srgbClr val="262626"/>
+                  <a:srgbClr val="4A7CB4"/>
                 </a:solidFill>
               </a:rPr>
-              <a:t>省エネ改修・緊急修繕の提案【NEW】　　断熱窓を起点に → 積立金との整合性を確認しながら来年度総会への提案を並行推進</a:t>
-            </a:r>
-          </a:p>
-        </p:txBody>
-      </p:sp>
-      <p:sp>
-        <p:nvSpPr>
-          <p:cNvPr id="20" name="TextBox 19"/>
-          <p:cNvSpPr txBox="1"/>
-          <p:nvPr/>
-        </p:nvSpPr>
-        <p:spPr>
-          <a:xfrm>
-            <a:off x="365760" y="3493008"/>
-            <a:ext cx="11430000" cy="329184"/>
-          </a:xfrm>
-          <a:prstGeom prst="rect">
-            <a:avLst/>
-          </a:prstGeom>
-          <a:noFill/>
-        </p:spPr>
-        <p:txBody>
-          <a:bodyPr wrap="square">
-            <a:spAutoFit/>
-          </a:bodyPr>
-          <a:lstStyle/>
-          <a:p>
-            <a:pPr algn="l"/>
-            <a:r>
-              <a:rPr sz="1200" b="0">
-                <a:solidFill>
-                  <a:srgbClr val="806000"/>
-                </a:solidFill>
-              </a:rPr>
-              <a:t>※キックオフが5月予定から6月7日に遅延。以下は1ヶ月後ろ倒しの改定版。</a:t>
-            </a:r>
-          </a:p>
-        </p:txBody>
-      </p:sp>
-      <p:sp>
-        <p:nvSpPr>
-          <p:cNvPr id="21" name="Rectangle 20"/>
-          <p:cNvSpPr/>
-          <p:nvPr/>
-        </p:nvSpPr>
-        <p:spPr>
-          <a:xfrm>
-            <a:off x="365760" y="3858768"/>
-            <a:ext cx="5852160" cy="365760"/>
-          </a:xfrm>
-          <a:prstGeom prst="rect">
-            <a:avLst/>
-          </a:prstGeom>
-          <a:solidFill>
-            <a:srgbClr val="2E75B6"/>
-          </a:solidFill>
-          <a:ln>
-            <a:noFill/>
-          </a:ln>
-        </p:spPr>
-        <p:style>
-          <a:lnRef idx="1">
-            <a:schemeClr val="accent1"/>
-          </a:lnRef>
-          <a:fillRef idx="3">
-            <a:schemeClr val="accent1"/>
-          </a:fillRef>
-          <a:effectRef idx="2">
-            <a:schemeClr val="accent1"/>
-          </a:effectRef>
-          <a:fontRef idx="minor">
-            <a:schemeClr val="lt1"/>
-          </a:fontRef>
-        </p:style>
-        <p:txBody>
-          <a:bodyPr rtlCol="0" anchor="ctr"/>
-          <a:lstStyle/>
-          <a:p>
-            <a:pPr algn="ctr"/>
-          </a:p>
-        </p:txBody>
-      </p:sp>
-      <p:sp>
-        <p:nvSpPr>
-          <p:cNvPr id="22" name="TextBox 21"/>
-          <p:cNvSpPr txBox="1"/>
-          <p:nvPr/>
-        </p:nvSpPr>
-        <p:spPr>
-          <a:xfrm>
-            <a:off x="502920" y="3886200"/>
-            <a:ext cx="5669280" cy="310896"/>
-          </a:xfrm>
-          <a:prstGeom prst="rect">
-            <a:avLst/>
-          </a:prstGeom>
-          <a:noFill/>
-        </p:spPr>
-        <p:txBody>
-          <a:bodyPr wrap="square">
-            <a:spAutoFit/>
-          </a:bodyPr>
-          <a:lstStyle/>
-          <a:p>
-            <a:pPr algn="l"/>
-            <a:r>
-              <a:rPr sz="1400" b="1">
-                <a:solidFill>
-                  <a:srgbClr val="FFFFFF"/>
-                </a:solidFill>
-              </a:rPr>
-              <a:t>① 長期修繕計画</a:t>
+              <a:t>① 長期修繕計画スケジュール</a:t>
             </a:r>
           </a:p>
         </p:txBody>
       </p:sp>
       <p:graphicFrame>
         <p:nvGraphicFramePr>
-          <p:cNvPr id="23" name="Table 22"/>
+          <p:cNvPr id="28" name="Table 27"/>
           <p:cNvGraphicFramePr>
             <a:graphicFrameLocks noGrp="1"/>
           </p:cNvGraphicFramePr>
           <p:nvPr/>
         </p:nvGraphicFramePr>
         <p:xfrm>
-          <a:off x="365760" y="4261104"/>
-          <a:ext cx="5852160" cy="2331720"/>
+          <a:off x="457200" y="4764024"/>
+          <a:ext cx="6647688" cy="3017520"/>
         </p:xfrm>
         <a:graphic>
           <a:graphicData uri="http://schemas.openxmlformats.org/drawingml/2006/table">
@@ -6122,10 +6674,10 @@
                 <a:tableStyleId>{5C22544A-7EE6-4342-B048-85BDC9FD1C3A}</a:tableStyleId>
               </a:tblPr>
               <a:tblGrid>
-                <a:gridCol w="1097280"/>
-                <a:gridCol w="4754880"/>
+                <a:gridCol w="1051560"/>
+                <a:gridCol w="5596128"/>
               </a:tblGrid>
-              <a:tr h="259080">
+              <a:tr h="335280">
                 <a:tc>
                   <a:txBody>
                     <a:bodyPr/>
@@ -6135,7 +6687,7 @@
                       <a:r>
                         <a:rPr sz="1300" b="1">
                           <a:solidFill>
-                            <a:srgbClr val="FFFFFF"/>
+                            <a:srgbClr val="4A7CB4"/>
                           </a:solidFill>
                         </a:rPr>
                         <a:t>時期</a:t>
@@ -6144,7 +6696,7 @@
                   </a:txBody>
                   <a:tcPr>
                     <a:solidFill>
-                      <a:srgbClr val="2E75B6"/>
+                      <a:srgbClr val="E4EFF7"/>
                     </a:solidFill>
                   </a:tcPr>
                 </a:tc>
@@ -6157,7 +6709,7 @@
                       <a:r>
                         <a:rPr sz="1300" b="1">
                           <a:solidFill>
-                            <a:srgbClr val="FFFFFF"/>
+                            <a:srgbClr val="4A7CB4"/>
                           </a:solidFill>
                         </a:rPr>
                         <a:t>内容（委員会中心）</a:t>
@@ -6166,21 +6718,21 @@
                   </a:txBody>
                   <a:tcPr>
                     <a:solidFill>
-                      <a:srgbClr val="2E75B6"/>
+                      <a:srgbClr val="E4EFF7"/>
                     </a:solidFill>
                   </a:tcPr>
                 </a:tc>
               </a:tr>
-              <a:tr h="259080">
+              <a:tr h="335280">
                 <a:tc>
                   <a:txBody>
                     <a:bodyPr/>
                     <a:lstStyle/>
                     <a:p>
                       <a:r>
-                        <a:rPr sz="1200">
+                        <a:rPr sz="1300">
                           <a:solidFill>
-                            <a:srgbClr val="262626"/>
+                            <a:srgbClr val="222222"/>
                           </a:solidFill>
                         </a:rPr>
                         <a:t>6月〜</a:t>
@@ -6189,7 +6741,7 @@
                   </a:txBody>
                   <a:tcPr>
                     <a:solidFill>
-                      <a:srgbClr val="F2F2F2"/>
+                      <a:srgbClr val="F4F7FB"/>
                     </a:solidFill>
                   </a:tcPr>
                 </a:tc>
@@ -6199,9 +6751,9 @@
                     <a:lstStyle/>
                     <a:p>
                       <a:r>
-                        <a:rPr sz="1200">
+                        <a:rPr sz="1300">
                           <a:solidFill>
-                            <a:srgbClr val="262626"/>
+                            <a:srgbClr val="222222"/>
                           </a:solidFill>
                         </a:rPr>
                         <a:t>コンサル3社へプレゼン依頼・日程調整</a:t>
@@ -6210,21 +6762,21 @@
                   </a:txBody>
                   <a:tcPr>
                     <a:solidFill>
-                      <a:srgbClr val="F2F2F2"/>
+                      <a:srgbClr val="F4F7FB"/>
                     </a:solidFill>
                   </a:tcPr>
                 </a:tc>
               </a:tr>
-              <a:tr h="259080">
+              <a:tr h="335280">
                 <a:tc>
                   <a:txBody>
                     <a:bodyPr/>
                     <a:lstStyle/>
                     <a:p>
                       <a:r>
-                        <a:rPr sz="1200">
+                        <a:rPr sz="1300">
                           <a:solidFill>
-                            <a:srgbClr val="262626"/>
+                            <a:srgbClr val="222222"/>
                           </a:solidFill>
                         </a:rPr>
                         <a:t>7月</a:t>
@@ -6243,12 +6795,12 @@
                     <a:lstStyle/>
                     <a:p>
                       <a:r>
-                        <a:rPr sz="1200">
+                        <a:rPr sz="1300">
                           <a:solidFill>
-                            <a:srgbClr val="262626"/>
+                            <a:srgbClr val="222222"/>
                           </a:solidFill>
                         </a:rPr>
-                        <a:t>コンサル3社プレゼン実施</a:t>
+                        <a:t>コンサル3社プレゼン実施（TDS・オフィスレコン・センターオフィス）</a:t>
                       </a:r>
                     </a:p>
                   </a:txBody>
@@ -6259,16 +6811,16 @@
                   </a:tcPr>
                 </a:tc>
               </a:tr>
-              <a:tr h="259080">
+              <a:tr h="335280">
                 <a:tc>
                   <a:txBody>
                     <a:bodyPr/>
                     <a:lstStyle/>
                     <a:p>
                       <a:r>
-                        <a:rPr sz="1200">
+                        <a:rPr sz="1300">
                           <a:solidFill>
-                            <a:srgbClr val="262626"/>
+                            <a:srgbClr val="222222"/>
                           </a:solidFill>
                         </a:rPr>
                         <a:t>8月</a:t>
@@ -6277,7 +6829,7 @@
                   </a:txBody>
                   <a:tcPr>
                     <a:solidFill>
-                      <a:srgbClr val="F2F2F2"/>
+                      <a:srgbClr val="F4F7FB"/>
                     </a:solidFill>
                   </a:tcPr>
                 </a:tc>
@@ -6287,9 +6839,9 @@
                     <a:lstStyle/>
                     <a:p>
                       <a:r>
-                        <a:rPr sz="1200">
+                        <a:rPr sz="1300">
                           <a:solidFill>
-                            <a:srgbClr val="262626"/>
+                            <a:srgbClr val="222222"/>
                           </a:solidFill>
                         </a:rPr>
                         <a:t>業者選定・理事会決議</a:t>
@@ -6298,21 +6850,21 @@
                   </a:txBody>
                   <a:tcPr>
                     <a:solidFill>
-                      <a:srgbClr val="F2F2F2"/>
+                      <a:srgbClr val="F4F7FB"/>
                     </a:solidFill>
                   </a:tcPr>
                 </a:tc>
               </a:tr>
-              <a:tr h="259080">
+              <a:tr h="335280">
                 <a:tc>
                   <a:txBody>
                     <a:bodyPr/>
                     <a:lstStyle/>
                     <a:p>
                       <a:r>
-                        <a:rPr sz="1200">
+                        <a:rPr sz="1300">
                           <a:solidFill>
-                            <a:srgbClr val="262626"/>
+                            <a:srgbClr val="222222"/>
                           </a:solidFill>
                         </a:rPr>
                         <a:t>9月</a:t>
@@ -6331,9 +6883,9 @@
                     <a:lstStyle/>
                     <a:p>
                       <a:r>
-                        <a:rPr sz="1200">
+                        <a:rPr sz="1300">
                           <a:solidFill>
-                            <a:srgbClr val="262626"/>
+                            <a:srgbClr val="222222"/>
                           </a:solidFill>
                         </a:rPr>
                         <a:t>実施計画案の提示</a:t>
@@ -6347,16 +6899,16 @@
                   </a:tcPr>
                 </a:tc>
               </a:tr>
-              <a:tr h="259080">
+              <a:tr h="335280">
                 <a:tc>
                   <a:txBody>
                     <a:bodyPr/>
                     <a:lstStyle/>
                     <a:p>
                       <a:r>
-                        <a:rPr sz="1200">
+                        <a:rPr sz="1300">
                           <a:solidFill>
-                            <a:srgbClr val="262626"/>
+                            <a:srgbClr val="222222"/>
                           </a:solidFill>
                         </a:rPr>
                         <a:t>10月</a:t>
@@ -6365,7 +6917,7 @@
                   </a:txBody>
                   <a:tcPr>
                     <a:solidFill>
-                      <a:srgbClr val="F2F2F2"/>
+                      <a:srgbClr val="F4F7FB"/>
                     </a:solidFill>
                   </a:tcPr>
                 </a:tc>
@@ -6375,32 +6927,32 @@
                     <a:lstStyle/>
                     <a:p>
                       <a:r>
-                        <a:rPr sz="1200">
+                        <a:rPr sz="1300">
                           <a:solidFill>
-                            <a:srgbClr val="262626"/>
+                            <a:srgbClr val="222222"/>
                           </a:solidFill>
                         </a:rPr>
-                        <a:t>実施計画案の決議・現地調査</a:t>
+                        <a:t>実施計画案の決議・現地調査（委員会立会い）</a:t>
                       </a:r>
                     </a:p>
                   </a:txBody>
                   <a:tcPr>
                     <a:solidFill>
-                      <a:srgbClr val="F2F2F2"/>
+                      <a:srgbClr val="F4F7FB"/>
                     </a:solidFill>
                   </a:tcPr>
                 </a:tc>
               </a:tr>
-              <a:tr h="259080">
+              <a:tr h="335280">
                 <a:tc>
                   <a:txBody>
                     <a:bodyPr/>
                     <a:lstStyle/>
                     <a:p>
                       <a:r>
-                        <a:rPr sz="1200">
+                        <a:rPr sz="1300">
                           <a:solidFill>
-                            <a:srgbClr val="262626"/>
+                            <a:srgbClr val="222222"/>
                           </a:solidFill>
                         </a:rPr>
                         <a:t>11月</a:t>
@@ -6419,12 +6971,12 @@
                     <a:lstStyle/>
                     <a:p>
                       <a:r>
-                        <a:rPr sz="1200">
+                        <a:rPr sz="1300">
                           <a:solidFill>
-                            <a:srgbClr val="262626"/>
+                            <a:srgbClr val="222222"/>
                           </a:solidFill>
                         </a:rPr>
-                        <a:t>調査報告・中長期計画 納品・理事会報告</a:t>
+                        <a:t>調査報告・中長期修繕計画 納品・理事会報告</a:t>
                       </a:r>
                     </a:p>
                   </a:txBody>
@@ -6435,16 +6987,16 @@
                   </a:tcPr>
                 </a:tc>
               </a:tr>
-              <a:tr h="259080">
+              <a:tr h="335280">
                 <a:tc>
                   <a:txBody>
                     <a:bodyPr/>
                     <a:lstStyle/>
                     <a:p>
                       <a:r>
-                        <a:rPr sz="1200">
+                        <a:rPr sz="1300">
                           <a:solidFill>
-                            <a:srgbClr val="262626"/>
+                            <a:srgbClr val="222222"/>
                           </a:solidFill>
                         </a:rPr>
                         <a:t>12月</a:t>
@@ -6453,7 +7005,7 @@
                   </a:txBody>
                   <a:tcPr>
                     <a:solidFill>
-                      <a:srgbClr val="F2F2F2"/>
+                      <a:srgbClr val="F4F7FB"/>
                     </a:solidFill>
                   </a:tcPr>
                 </a:tc>
@@ -6463,32 +7015,32 @@
                     <a:lstStyle/>
                     <a:p>
                       <a:r>
-                        <a:rPr sz="1200">
+                        <a:rPr sz="1300">
                           <a:solidFill>
-                            <a:srgbClr val="262626"/>
+                            <a:srgbClr val="222222"/>
                           </a:solidFill>
                         </a:rPr>
-                        <a:t>住民向け全戸配布 / 積立金変更案の検討</a:t>
+                        <a:t>住民向け全戸配布 / 修繕積立金変更案の検討</a:t>
                       </a:r>
                     </a:p>
                   </a:txBody>
                   <a:tcPr>
                     <a:solidFill>
-                      <a:srgbClr val="F2F2F2"/>
+                      <a:srgbClr val="F4F7FB"/>
                     </a:solidFill>
                   </a:tcPr>
                 </a:tc>
               </a:tr>
-              <a:tr h="259080">
+              <a:tr h="335280">
                 <a:tc>
                   <a:txBody>
                     <a:bodyPr/>
                     <a:lstStyle/>
                     <a:p>
                       <a:r>
-                        <a:rPr sz="1200">
+                        <a:rPr sz="1300">
                           <a:solidFill>
-                            <a:srgbClr val="262626"/>
+                            <a:srgbClr val="222222"/>
                           </a:solidFill>
                         </a:rPr>
                         <a:t>来年総会</a:t>
@@ -6507,9 +7059,9 @@
                     <a:lstStyle/>
                     <a:p>
                       <a:r>
-                        <a:rPr sz="1200">
+                        <a:rPr sz="1300">
                           <a:solidFill>
-                            <a:srgbClr val="262626"/>
+                            <a:srgbClr val="222222"/>
                           </a:solidFill>
                         </a:rPr>
                         <a:t>修繕計画・積立金変更の議決</a:t>
@@ -6519,375 +7071,6 @@
                   <a:tcPr>
                     <a:solidFill>
                       <a:srgbClr val="FFFFFF"/>
-                    </a:solidFill>
-                  </a:tcPr>
-                </a:tc>
-              </a:tr>
-            </a:tbl>
-          </a:graphicData>
-        </a:graphic>
-      </p:graphicFrame>
-      <p:sp>
-        <p:nvSpPr>
-          <p:cNvPr id="24" name="Rectangle 23"/>
-          <p:cNvSpPr/>
-          <p:nvPr/>
-        </p:nvSpPr>
-        <p:spPr>
-          <a:xfrm>
-            <a:off x="6492240" y="3858768"/>
-            <a:ext cx="5303520" cy="365760"/>
-          </a:xfrm>
-          <a:prstGeom prst="rect">
-            <a:avLst/>
-          </a:prstGeom>
-          <a:solidFill>
-            <a:srgbClr val="2E75B6"/>
-          </a:solidFill>
-          <a:ln>
-            <a:noFill/>
-          </a:ln>
-        </p:spPr>
-        <p:style>
-          <a:lnRef idx="1">
-            <a:schemeClr val="accent1"/>
-          </a:lnRef>
-          <a:fillRef idx="3">
-            <a:schemeClr val="accent1"/>
-          </a:fillRef>
-          <a:effectRef idx="2">
-            <a:schemeClr val="accent1"/>
-          </a:effectRef>
-          <a:fontRef idx="minor">
-            <a:schemeClr val="lt1"/>
-          </a:fontRef>
-        </p:style>
-        <p:txBody>
-          <a:bodyPr rtlCol="0" anchor="ctr"/>
-          <a:lstStyle/>
-          <a:p>
-            <a:pPr algn="ctr"/>
-          </a:p>
-        </p:txBody>
-      </p:sp>
-      <p:sp>
-        <p:nvSpPr>
-          <p:cNvPr id="25" name="TextBox 24"/>
-          <p:cNvSpPr txBox="1"/>
-          <p:nvPr/>
-        </p:nvSpPr>
-        <p:spPr>
-          <a:xfrm>
-            <a:off x="6629400" y="3886200"/>
-            <a:ext cx="5120640" cy="310896"/>
-          </a:xfrm>
-          <a:prstGeom prst="rect">
-            <a:avLst/>
-          </a:prstGeom>
-          <a:noFill/>
-        </p:spPr>
-        <p:txBody>
-          <a:bodyPr wrap="square">
-            <a:spAutoFit/>
-          </a:bodyPr>
-          <a:lstStyle/>
-          <a:p>
-            <a:pPr algn="l"/>
-            <a:r>
-              <a:rPr sz="1400" b="1">
-                <a:solidFill>
-                  <a:srgbClr val="FFFFFF"/>
-                </a:solidFill>
-              </a:rPr>
-              <a:t>② 短期修繕計画（直近5年）</a:t>
-            </a:r>
-          </a:p>
-        </p:txBody>
-      </p:sp>
-      <p:graphicFrame>
-        <p:nvGraphicFramePr>
-          <p:cNvPr id="26" name="Table 25"/>
-          <p:cNvGraphicFramePr>
-            <a:graphicFrameLocks noGrp="1"/>
-          </p:cNvGraphicFramePr>
-          <p:nvPr/>
-        </p:nvGraphicFramePr>
-        <p:xfrm>
-          <a:off x="6492240" y="4261104"/>
-          <a:ext cx="5303520" cy="1920240"/>
-        </p:xfrm>
-        <a:graphic>
-          <a:graphicData uri="http://schemas.openxmlformats.org/drawingml/2006/table">
-            <a:tbl>
-              <a:tblPr firstRow="1" bandRow="1">
-                <a:tableStyleId>{5C22544A-7EE6-4342-B048-85BDC9FD1C3A}</a:tableStyleId>
-              </a:tblPr>
-              <a:tblGrid>
-                <a:gridCol w="1097280"/>
-                <a:gridCol w="4206240"/>
-              </a:tblGrid>
-              <a:tr h="320040">
-                <a:tc>
-                  <a:txBody>
-                    <a:bodyPr/>
-                    <a:lstStyle/>
-                    <a:p>
-                      <a:pPr algn="ctr"/>
-                      <a:r>
-                        <a:rPr sz="1300" b="1">
-                          <a:solidFill>
-                            <a:srgbClr val="FFFFFF"/>
-                          </a:solidFill>
-                        </a:rPr>
-                        <a:t>時期</a:t>
-                      </a:r>
-                    </a:p>
-                  </a:txBody>
-                  <a:tcPr>
-                    <a:solidFill>
-                      <a:srgbClr val="2E75B6"/>
-                    </a:solidFill>
-                  </a:tcPr>
-                </a:tc>
-                <a:tc>
-                  <a:txBody>
-                    <a:bodyPr/>
-                    <a:lstStyle/>
-                    <a:p>
-                      <a:pPr algn="ctr"/>
-                      <a:r>
-                        <a:rPr sz="1300" b="1">
-                          <a:solidFill>
-                            <a:srgbClr val="FFFFFF"/>
-                          </a:solidFill>
-                        </a:rPr>
-                        <a:t>内容（委員会中心）</a:t>
-                      </a:r>
-                    </a:p>
-                  </a:txBody>
-                  <a:tcPr>
-                    <a:solidFill>
-                      <a:srgbClr val="2E75B6"/>
-                    </a:solidFill>
-                  </a:tcPr>
-                </a:tc>
-              </a:tr>
-              <a:tr h="320040">
-                <a:tc>
-                  <a:txBody>
-                    <a:bodyPr/>
-                    <a:lstStyle/>
-                    <a:p>
-                      <a:r>
-                        <a:rPr sz="1200">
-                          <a:solidFill>
-                            <a:srgbClr val="262626"/>
-                          </a:solidFill>
-                        </a:rPr>
-                        <a:t>8月</a:t>
-                      </a:r>
-                    </a:p>
-                  </a:txBody>
-                  <a:tcPr>
-                    <a:solidFill>
-                      <a:srgbClr val="F2F2F2"/>
-                    </a:solidFill>
-                  </a:tcPr>
-                </a:tc>
-                <a:tc>
-                  <a:txBody>
-                    <a:bodyPr/>
-                    <a:lstStyle/>
-                    <a:p>
-                      <a:r>
-                        <a:rPr sz="1200">
-                          <a:solidFill>
-                            <a:srgbClr val="262626"/>
-                          </a:solidFill>
-                        </a:rPr>
-                        <a:t>要求仕様提示（インフラ緊急性・省エネ優先）</a:t>
-                      </a:r>
-                    </a:p>
-                  </a:txBody>
-                  <a:tcPr>
-                    <a:solidFill>
-                      <a:srgbClr val="F2F2F2"/>
-                    </a:solidFill>
-                  </a:tcPr>
-                </a:tc>
-              </a:tr>
-              <a:tr h="320040">
-                <a:tc>
-                  <a:txBody>
-                    <a:bodyPr/>
-                    <a:lstStyle/>
-                    <a:p>
-                      <a:r>
-                        <a:rPr sz="1200">
-                          <a:solidFill>
-                            <a:srgbClr val="262626"/>
-                          </a:solidFill>
-                        </a:rPr>
-                        <a:t>9月</a:t>
-                      </a:r>
-                    </a:p>
-                  </a:txBody>
-                  <a:tcPr>
-                    <a:solidFill>
-                      <a:srgbClr val="FFFFFF"/>
-                    </a:solidFill>
-                  </a:tcPr>
-                </a:tc>
-                <a:tc>
-                  <a:txBody>
-                    <a:bodyPr/>
-                    <a:lstStyle/>
-                    <a:p>
-                      <a:r>
-                        <a:rPr sz="1200">
-                          <a:solidFill>
-                            <a:srgbClr val="262626"/>
-                          </a:solidFill>
-                        </a:rPr>
-                        <a:t>計画案提示（省エネ改修を中心に）</a:t>
-                      </a:r>
-                    </a:p>
-                  </a:txBody>
-                  <a:tcPr>
-                    <a:solidFill>
-                      <a:srgbClr val="FFFFFF"/>
-                    </a:solidFill>
-                  </a:tcPr>
-                </a:tc>
-              </a:tr>
-              <a:tr h="320040">
-                <a:tc>
-                  <a:txBody>
-                    <a:bodyPr/>
-                    <a:lstStyle/>
-                    <a:p>
-                      <a:r>
-                        <a:rPr sz="1200">
-                          <a:solidFill>
-                            <a:srgbClr val="262626"/>
-                          </a:solidFill>
-                        </a:rPr>
-                        <a:t>11月</a:t>
-                      </a:r>
-                    </a:p>
-                  </a:txBody>
-                  <a:tcPr>
-                    <a:solidFill>
-                      <a:srgbClr val="F2F2F2"/>
-                    </a:solidFill>
-                  </a:tcPr>
-                </a:tc>
-                <a:tc>
-                  <a:txBody>
-                    <a:bodyPr/>
-                    <a:lstStyle/>
-                    <a:p>
-                      <a:r>
-                        <a:rPr sz="1200">
-                          <a:solidFill>
-                            <a:srgbClr val="262626"/>
-                          </a:solidFill>
-                        </a:rPr>
-                        <a:t>現地調査後の優先修繕案提示</a:t>
-                      </a:r>
-                    </a:p>
-                  </a:txBody>
-                  <a:tcPr>
-                    <a:solidFill>
-                      <a:srgbClr val="F2F2F2"/>
-                    </a:solidFill>
-                  </a:tcPr>
-                </a:tc>
-              </a:tr>
-              <a:tr h="320040">
-                <a:tc>
-                  <a:txBody>
-                    <a:bodyPr/>
-                    <a:lstStyle/>
-                    <a:p>
-                      <a:r>
-                        <a:rPr sz="1200">
-                          <a:solidFill>
-                            <a:srgbClr val="262626"/>
-                          </a:solidFill>
-                        </a:rPr>
-                        <a:t>12月</a:t>
-                      </a:r>
-                    </a:p>
-                  </a:txBody>
-                  <a:tcPr>
-                    <a:solidFill>
-                      <a:srgbClr val="FFFFFF"/>
-                    </a:solidFill>
-                  </a:tcPr>
-                </a:tc>
-                <a:tc>
-                  <a:txBody>
-                    <a:bodyPr/>
-                    <a:lstStyle/>
-                    <a:p>
-                      <a:r>
-                        <a:rPr sz="1200">
-                          <a:solidFill>
-                            <a:srgbClr val="262626"/>
-                          </a:solidFill>
-                        </a:rPr>
-                        <a:t>計画案の検討 / 総会提案資料作成</a:t>
-                      </a:r>
-                    </a:p>
-                  </a:txBody>
-                  <a:tcPr>
-                    <a:solidFill>
-                      <a:srgbClr val="FFFFFF"/>
-                    </a:solidFill>
-                  </a:tcPr>
-                </a:tc>
-              </a:tr>
-              <a:tr h="320040">
-                <a:tc>
-                  <a:txBody>
-                    <a:bodyPr/>
-                    <a:lstStyle/>
-                    <a:p>
-                      <a:r>
-                        <a:rPr sz="1200">
-                          <a:solidFill>
-                            <a:srgbClr val="262626"/>
-                          </a:solidFill>
-                        </a:rPr>
-                        <a:t>来年総会</a:t>
-                      </a:r>
-                    </a:p>
-                  </a:txBody>
-                  <a:tcPr>
-                    <a:solidFill>
-                      <a:srgbClr val="F2F2F2"/>
-                    </a:solidFill>
-                  </a:tcPr>
-                </a:tc>
-                <a:tc>
-                  <a:txBody>
-                    <a:bodyPr/>
-                    <a:lstStyle/>
-                    <a:p>
-                      <a:r>
-                        <a:rPr sz="1200">
-                          <a:solidFill>
-                            <a:srgbClr val="262626"/>
-                          </a:solidFill>
-                        </a:rPr>
-                        <a:t>議決</a:t>
-                      </a:r>
-                    </a:p>
-                  </a:txBody>
-                  <a:tcPr>
-                    <a:solidFill>
-                      <a:srgbClr val="F2F2F2"/>
                     </a:solidFill>
                   </a:tcPr>
                 </a:tc>
@@ -6923,13 +7106,13 @@
         <p:spPr>
           <a:xfrm>
             <a:off x="0" y="0"/>
-            <a:ext cx="12188952" cy="960120"/>
+            <a:ext cx="7562088" cy="164592"/>
           </a:xfrm>
           <a:prstGeom prst="rect">
             <a:avLst/>
           </a:prstGeom>
           <a:solidFill>
-            <a:srgbClr val="1F3564"/>
+            <a:srgbClr val="4A7CB4"/>
           </a:solidFill>
           <a:ln>
             <a:noFill/>
@@ -6965,8 +7148,8 @@
         </p:nvSpPr>
         <p:spPr>
           <a:xfrm>
-            <a:off x="365760" y="137160"/>
-            <a:ext cx="10972800" cy="685800"/>
+            <a:off x="457200" y="228600"/>
+            <a:ext cx="6647688" cy="594360"/>
           </a:xfrm>
           <a:prstGeom prst="rect">
             <a:avLst/>
@@ -6981,100 +7164,32 @@
           <a:p>
             <a:pPr algn="l"/>
             <a:r>
-              <a:rPr sz="2400" b="1">
+              <a:rPr sz="2200" b="1" i="0">
                 <a:solidFill>
-                  <a:srgbClr val="FFFFFF"/>
+                  <a:srgbClr val="222222"/>
                 </a:solidFill>
               </a:rPr>
-              <a:t>コンサル業者選定の進め方</a:t>
-            </a:r>
-          </a:p>
-        </p:txBody>
-      </p:sp>
-      <p:sp>
-        <p:nvSpPr>
-          <p:cNvPr id="4" name="TextBox 3"/>
-          <p:cNvSpPr txBox="1"/>
-          <p:nvPr/>
-        </p:nvSpPr>
-        <p:spPr>
-          <a:xfrm>
-            <a:off x="365760" y="6492240"/>
-            <a:ext cx="9144000" cy="274320"/>
-          </a:xfrm>
-          <a:prstGeom prst="rect">
-            <a:avLst/>
-          </a:prstGeom>
-          <a:noFill/>
-        </p:spPr>
-        <p:txBody>
-          <a:bodyPr wrap="square">
-            <a:spAutoFit/>
-          </a:bodyPr>
-          <a:lstStyle/>
-          <a:p>
-            <a:pPr algn="l"/>
-            <a:r>
-              <a:rPr sz="1000" b="0">
-                <a:solidFill>
-                  <a:srgbClr val="808080"/>
-                </a:solidFill>
-              </a:rPr>
-              <a:t>コンフォール井の頭公園南 修繕委員会 第1回定例　2026.6.7</a:t>
-            </a:r>
-          </a:p>
-        </p:txBody>
-      </p:sp>
-      <p:sp>
-        <p:nvSpPr>
-          <p:cNvPr id="5" name="TextBox 4"/>
-          <p:cNvSpPr txBox="1"/>
-          <p:nvPr/>
-        </p:nvSpPr>
-        <p:spPr>
-          <a:xfrm>
-            <a:off x="11430000" y="6492240"/>
-            <a:ext cx="640080" cy="274320"/>
-          </a:xfrm>
-          <a:prstGeom prst="rect">
-            <a:avLst/>
-          </a:prstGeom>
-          <a:noFill/>
-        </p:spPr>
-        <p:txBody>
-          <a:bodyPr wrap="square">
-            <a:spAutoFit/>
-          </a:bodyPr>
-          <a:lstStyle/>
-          <a:p>
-            <a:pPr algn="r"/>
-            <a:r>
-              <a:rPr sz="1000" b="0">
-                <a:solidFill>
-                  <a:srgbClr val="808080"/>
-                </a:solidFill>
-              </a:rPr>
-              <a:t>5 / 7</a:t>
-            </a:r>
-          </a:p>
-        </p:txBody>
-      </p:sp>
-      <p:sp>
-        <p:nvSpPr>
-          <p:cNvPr id="6" name="Rectangle 5"/>
+              <a:t>活動スコープ・改定スケジュール（続き）</a:t>
+            </a:r>
+          </a:p>
+        </p:txBody>
+      </p:sp>
+      <p:sp>
+        <p:nvSpPr>
+          <p:cNvPr id="4" name="Rectangle 3"/>
           <p:cNvSpPr/>
           <p:nvPr/>
         </p:nvSpPr>
         <p:spPr>
           <a:xfrm>
-            <a:off x="365760" y="1005840"/>
-            <a:ext cx="11430000" cy="457200"/>
+            <a:off x="457200" y="822960"/>
+            <a:ext cx="6647688" cy="19050"/>
           </a:xfrm>
           <a:prstGeom prst="rect">
             <a:avLst/>
           </a:prstGeom>
           <a:solidFill>
-            <a:srgbClr val="2E75B6"/>
+            <a:srgbClr val="4A7CB4"/>
           </a:solidFill>
           <a:ln>
             <a:noFill/>
@@ -7104,14 +7219,14 @@
       </p:sp>
       <p:sp>
         <p:nvSpPr>
-          <p:cNvPr id="7" name="TextBox 6"/>
+          <p:cNvPr id="5" name="TextBox 4"/>
           <p:cNvSpPr txBox="1"/>
           <p:nvPr/>
         </p:nvSpPr>
         <p:spPr>
           <a:xfrm>
-            <a:off x="502920" y="1042416"/>
-            <a:ext cx="10972800" cy="402336"/>
+            <a:off x="457200" y="10241280"/>
+            <a:ext cx="5943600" cy="274320"/>
           </a:xfrm>
           <a:prstGeom prst="rect">
             <a:avLst/>
@@ -7126,32 +7241,66 @@
           <a:p>
             <a:pPr algn="l"/>
             <a:r>
-              <a:rPr sz="1800" b="1">
+              <a:rPr sz="1000" b="0" i="0">
                 <a:solidFill>
-                  <a:srgbClr val="FFFFFF"/>
+                  <a:srgbClr val="555555"/>
                 </a:solidFill>
               </a:rPr>
-              <a:t>候補3社：TDS　／　オフィスレコン　／　センターオフィス</a:t>
-            </a:r>
-          </a:p>
-        </p:txBody>
-      </p:sp>
-      <p:sp>
-        <p:nvSpPr>
-          <p:cNvPr id="8" name="Rectangle 7"/>
+              <a:t>コンフォール井の頭公園南 修繕委員会 第1回定例　2026.6.7</a:t>
+            </a:r>
+          </a:p>
+        </p:txBody>
+      </p:sp>
+      <p:sp>
+        <p:nvSpPr>
+          <p:cNvPr id="6" name="TextBox 5"/>
+          <p:cNvSpPr txBox="1"/>
+          <p:nvPr/>
+        </p:nvSpPr>
+        <p:spPr>
+          <a:xfrm>
+            <a:off x="6858000" y="10241280"/>
+            <a:ext cx="548640" cy="274320"/>
+          </a:xfrm>
+          <a:prstGeom prst="rect">
+            <a:avLst/>
+          </a:prstGeom>
+          <a:noFill/>
+        </p:spPr>
+        <p:txBody>
+          <a:bodyPr wrap="square">
+            <a:spAutoFit/>
+          </a:bodyPr>
+          <a:lstStyle/>
+          <a:p>
+            <a:pPr algn="r"/>
+            <a:r>
+              <a:rPr sz="1000" b="0" i="0">
+                <a:solidFill>
+                  <a:srgbClr val="555555"/>
+                </a:solidFill>
+              </a:rPr>
+              <a:t>5 / 7</a:t>
+            </a:r>
+          </a:p>
+        </p:txBody>
+      </p:sp>
+      <p:sp>
+        <p:nvSpPr>
+          <p:cNvPr id="7" name="Rectangle 6"/>
           <p:cNvSpPr/>
           <p:nvPr/>
         </p:nvSpPr>
         <p:spPr>
           <a:xfrm>
-            <a:off x="365760" y="1600200"/>
-            <a:ext cx="5394960" cy="365760"/>
+            <a:off x="457200" y="10195560"/>
+            <a:ext cx="6647688" cy="12700"/>
           </a:xfrm>
           <a:prstGeom prst="rect">
             <a:avLst/>
           </a:prstGeom>
           <a:solidFill>
-            <a:srgbClr val="1F3564"/>
+            <a:srgbClr val="E4EFF7"/>
           </a:solidFill>
           <a:ln>
             <a:noFill/>
@@ -7181,157 +7330,20 @@
       </p:sp>
       <p:sp>
         <p:nvSpPr>
-          <p:cNvPr id="9" name="TextBox 8"/>
-          <p:cNvSpPr txBox="1"/>
-          <p:nvPr/>
-        </p:nvSpPr>
-        <p:spPr>
-          <a:xfrm>
-            <a:off x="502920" y="1627632"/>
-            <a:ext cx="5212080" cy="310896"/>
-          </a:xfrm>
-          <a:prstGeom prst="rect">
-            <a:avLst/>
-          </a:prstGeom>
-          <a:noFill/>
-        </p:spPr>
-        <p:txBody>
-          <a:bodyPr wrap="square">
-            <a:spAutoFit/>
-          </a:bodyPr>
-          <a:lstStyle/>
-          <a:p>
-            <a:pPr algn="l"/>
-            <a:r>
-              <a:rPr sz="1500" b="1">
-                <a:solidFill>
-                  <a:srgbClr val="FFFFFF"/>
-                </a:solidFill>
-              </a:rPr>
-              <a:t>プレゼン実施方針</a:t>
-            </a:r>
-          </a:p>
-        </p:txBody>
-      </p:sp>
-      <p:sp>
-        <p:nvSpPr>
-          <p:cNvPr id="10" name="TextBox 9"/>
-          <p:cNvSpPr txBox="1"/>
-          <p:nvPr/>
-        </p:nvSpPr>
-        <p:spPr>
-          <a:xfrm>
-            <a:off x="548640" y="2057400"/>
-            <a:ext cx="5120640" cy="594360"/>
-          </a:xfrm>
-          <a:prstGeom prst="rect">
-            <a:avLst/>
-          </a:prstGeom>
-          <a:noFill/>
-        </p:spPr>
-        <p:txBody>
-          <a:bodyPr wrap="square">
-            <a:spAutoFit/>
-          </a:bodyPr>
-          <a:lstStyle/>
-          <a:p>
-            <a:pPr algn="l"/>
-            <a:r>
-              <a:rPr sz="1400" b="0">
-                <a:solidFill>
-                  <a:srgbClr val="262626"/>
-                </a:solidFill>
-              </a:rPr>
-              <a:t>● 7月中に3社それぞれ30分のプレゼンを実施</a:t>
-            </a:r>
-          </a:p>
-        </p:txBody>
-      </p:sp>
-      <p:sp>
-        <p:nvSpPr>
-          <p:cNvPr id="11" name="TextBox 10"/>
-          <p:cNvSpPr txBox="1"/>
-          <p:nvPr/>
-        </p:nvSpPr>
-        <p:spPr>
-          <a:xfrm>
-            <a:off x="548640" y="2651760"/>
-            <a:ext cx="5120640" cy="594360"/>
-          </a:xfrm>
-          <a:prstGeom prst="rect">
-            <a:avLst/>
-          </a:prstGeom>
-          <a:noFill/>
-        </p:spPr>
-        <p:txBody>
-          <a:bodyPr wrap="square">
-            <a:spAutoFit/>
-          </a:bodyPr>
-          <a:lstStyle/>
-          <a:p>
-            <a:pPr algn="l"/>
-            <a:r>
-              <a:rPr sz="1400" b="0">
-                <a:solidFill>
-                  <a:srgbClr val="262626"/>
-                </a:solidFill>
-              </a:rPr>
-              <a:t>● 場所：会場を1日確保して3社連続
-　 または管理事務室（Web参加可）</a:t>
-            </a:r>
-          </a:p>
-        </p:txBody>
-      </p:sp>
-      <p:sp>
-        <p:nvSpPr>
-          <p:cNvPr id="12" name="TextBox 11"/>
-          <p:cNvSpPr txBox="1"/>
-          <p:nvPr/>
-        </p:nvSpPr>
-        <p:spPr>
-          <a:xfrm>
-            <a:off x="548640" y="3246120"/>
-            <a:ext cx="5120640" cy="594360"/>
-          </a:xfrm>
-          <a:prstGeom prst="rect">
-            <a:avLst/>
-          </a:prstGeom>
-          <a:noFill/>
-        </p:spPr>
-        <p:txBody>
-          <a:bodyPr wrap="square">
-            <a:spAutoFit/>
-          </a:bodyPr>
-          <a:lstStyle/>
-          <a:p>
-            <a:pPr algn="l"/>
-            <a:r>
-              <a:rPr sz="1400" b="0">
-                <a:solidFill>
-                  <a:srgbClr val="262626"/>
-                </a:solidFill>
-              </a:rPr>
-              <a:t>● 本日：連絡・日程調整・会場確保の担当を決定</a:t>
-            </a:r>
-          </a:p>
-        </p:txBody>
-      </p:sp>
-      <p:sp>
-        <p:nvSpPr>
-          <p:cNvPr id="13" name="Rectangle 12"/>
+          <p:cNvPr id="8" name="Rectangle 7"/>
           <p:cNvSpPr/>
           <p:nvPr/>
         </p:nvSpPr>
         <p:spPr>
           <a:xfrm>
-            <a:off x="365760" y="3886200"/>
-            <a:ext cx="5394960" cy="365760"/>
+            <a:off x="457200" y="960120"/>
+            <a:ext cx="6647688" cy="25400"/>
           </a:xfrm>
           <a:prstGeom prst="rect">
             <a:avLst/>
           </a:prstGeom>
           <a:solidFill>
-            <a:srgbClr val="1F3564"/>
+            <a:srgbClr val="4A7CB4"/>
           </a:solidFill>
           <a:ln>
             <a:noFill/>
@@ -7361,14 +7373,14 @@
       </p:sp>
       <p:sp>
         <p:nvSpPr>
-          <p:cNvPr id="14" name="TextBox 13"/>
+          <p:cNvPr id="9" name="TextBox 8"/>
           <p:cNvSpPr txBox="1"/>
           <p:nvPr/>
         </p:nvSpPr>
         <p:spPr>
           <a:xfrm>
-            <a:off x="502920" y="3913632"/>
-            <a:ext cx="5212080" cy="310896"/>
+            <a:off x="457200" y="1010920"/>
+            <a:ext cx="6647688" cy="411480"/>
           </a:xfrm>
           <a:prstGeom prst="rect">
             <a:avLst/>
@@ -7383,240 +7395,27 @@
           <a:p>
             <a:pPr algn="l"/>
             <a:r>
-              <a:rPr sz="1500" b="1">
+              <a:rPr sz="1700" b="1" i="0">
                 <a:solidFill>
-                  <a:srgbClr val="FFFFFF"/>
+                  <a:srgbClr val="4A7CB4"/>
                 </a:solidFill>
               </a:rPr>
-              <a:t>依頼内容</a:t>
-            </a:r>
-          </a:p>
-        </p:txBody>
-      </p:sp>
-      <p:sp>
-        <p:nvSpPr>
-          <p:cNvPr id="15" name="TextBox 14"/>
-          <p:cNvSpPr txBox="1"/>
-          <p:nvPr/>
-        </p:nvSpPr>
-        <p:spPr>
-          <a:xfrm>
-            <a:off x="548640" y="4343400"/>
-            <a:ext cx="5120640" cy="457200"/>
-          </a:xfrm>
-          <a:prstGeom prst="rect">
-            <a:avLst/>
-          </a:prstGeom>
-          <a:noFill/>
-        </p:spPr>
-        <p:txBody>
-          <a:bodyPr wrap="square">
-            <a:spAutoFit/>
-          </a:bodyPr>
-          <a:lstStyle/>
-          <a:p>
-            <a:pPr algn="l"/>
-            <a:r>
-              <a:rPr sz="1400" b="0">
-                <a:solidFill>
-                  <a:srgbClr val="262626"/>
-                </a:solidFill>
-              </a:rPr>
-              <a:t>● 劣化診断調査（第3回大規模修繕に向けた建物調査）</a:t>
-            </a:r>
-          </a:p>
-        </p:txBody>
-      </p:sp>
-      <p:sp>
-        <p:nvSpPr>
-          <p:cNvPr id="16" name="TextBox 15"/>
-          <p:cNvSpPr txBox="1"/>
-          <p:nvPr/>
-        </p:nvSpPr>
-        <p:spPr>
-          <a:xfrm>
-            <a:off x="548640" y="4800600"/>
-            <a:ext cx="5120640" cy="457200"/>
-          </a:xfrm>
-          <a:prstGeom prst="rect">
-            <a:avLst/>
-          </a:prstGeom>
-          <a:noFill/>
-        </p:spPr>
-        <p:txBody>
-          <a:bodyPr wrap="square">
-            <a:spAutoFit/>
-          </a:bodyPr>
-          <a:lstStyle/>
-          <a:p>
-            <a:pPr algn="l"/>
-            <a:r>
-              <a:rPr sz="1400" b="0">
-                <a:solidFill>
-                  <a:srgbClr val="262626"/>
-                </a:solidFill>
-              </a:rPr>
-              <a:t>● 30年中長期修繕計画の作成・修繕積立金の評価</a:t>
-            </a:r>
-          </a:p>
-        </p:txBody>
-      </p:sp>
-      <p:sp>
-        <p:nvSpPr>
-          <p:cNvPr id="17" name="TextBox 16"/>
-          <p:cNvSpPr txBox="1"/>
-          <p:nvPr/>
-        </p:nvSpPr>
-        <p:spPr>
-          <a:xfrm>
-            <a:off x="548640" y="5257800"/>
-            <a:ext cx="5120640" cy="457200"/>
-          </a:xfrm>
-          <a:prstGeom prst="rect">
-            <a:avLst/>
-          </a:prstGeom>
-          <a:noFill/>
-        </p:spPr>
-        <p:txBody>
-          <a:bodyPr wrap="square">
-            <a:spAutoFit/>
-          </a:bodyPr>
-          <a:lstStyle/>
-          <a:p>
-            <a:pPr algn="l"/>
-            <a:r>
-              <a:rPr sz="1400" b="0">
-                <a:solidFill>
-                  <a:srgbClr val="262626"/>
-                </a:solidFill>
-              </a:rPr>
-              <a:t>● 短期修繕計画（5年）の立案（追加依頼）</a:t>
-            </a:r>
-          </a:p>
-        </p:txBody>
-      </p:sp>
-      <p:sp>
-        <p:nvSpPr>
-          <p:cNvPr id="18" name="TextBox 17"/>
-          <p:cNvSpPr txBox="1"/>
-          <p:nvPr/>
-        </p:nvSpPr>
-        <p:spPr>
-          <a:xfrm>
-            <a:off x="548640" y="5715000"/>
-            <a:ext cx="5120640" cy="457200"/>
-          </a:xfrm>
-          <a:prstGeom prst="rect">
-            <a:avLst/>
-          </a:prstGeom>
-          <a:noFill/>
-        </p:spPr>
-        <p:txBody>
-          <a:bodyPr wrap="square">
-            <a:spAutoFit/>
-          </a:bodyPr>
-          <a:lstStyle/>
-          <a:p>
-            <a:pPr algn="l"/>
-            <a:r>
-              <a:rPr sz="1400" b="0">
-                <a:solidFill>
-                  <a:srgbClr val="262626"/>
-                </a:solidFill>
-              </a:rPr>
-              <a:t>● 省エネ改修提案（追加依頼）</a:t>
-            </a:r>
-          </a:p>
-        </p:txBody>
-      </p:sp>
-      <p:sp>
-        <p:nvSpPr>
-          <p:cNvPr id="19" name="Rectangle 18"/>
-          <p:cNvSpPr/>
-          <p:nvPr/>
-        </p:nvSpPr>
-        <p:spPr>
-          <a:xfrm>
-            <a:off x="6126480" y="1600200"/>
-            <a:ext cx="5669280" cy="365760"/>
-          </a:xfrm>
-          <a:prstGeom prst="rect">
-            <a:avLst/>
-          </a:prstGeom>
-          <a:solidFill>
-            <a:srgbClr val="1F3564"/>
-          </a:solidFill>
-          <a:ln>
-            <a:noFill/>
-          </a:ln>
-        </p:spPr>
-        <p:style>
-          <a:lnRef idx="1">
-            <a:schemeClr val="accent1"/>
-          </a:lnRef>
-          <a:fillRef idx="3">
-            <a:schemeClr val="accent1"/>
-          </a:fillRef>
-          <a:effectRef idx="2">
-            <a:schemeClr val="accent1"/>
-          </a:effectRef>
-          <a:fontRef idx="minor">
-            <a:schemeClr val="lt1"/>
-          </a:fontRef>
-        </p:style>
-        <p:txBody>
-          <a:bodyPr rtlCol="0" anchor="ctr"/>
-          <a:lstStyle/>
-          <a:p>
-            <a:pPr algn="ctr"/>
-          </a:p>
-        </p:txBody>
-      </p:sp>
-      <p:sp>
-        <p:nvSpPr>
-          <p:cNvPr id="20" name="TextBox 19"/>
-          <p:cNvSpPr txBox="1"/>
-          <p:nvPr/>
-        </p:nvSpPr>
-        <p:spPr>
-          <a:xfrm>
-            <a:off x="6263640" y="1627632"/>
-            <a:ext cx="5486400" cy="310896"/>
-          </a:xfrm>
-          <a:prstGeom prst="rect">
-            <a:avLst/>
-          </a:prstGeom>
-          <a:noFill/>
-        </p:spPr>
-        <p:txBody>
-          <a:bodyPr wrap="square">
-            <a:spAutoFit/>
-          </a:bodyPr>
-          <a:lstStyle/>
-          <a:p>
-            <a:pPr algn="l"/>
-            <a:r>
-              <a:rPr sz="1500" b="1">
-                <a:solidFill>
-                  <a:srgbClr val="FFFFFF"/>
-                </a:solidFill>
-              </a:rPr>
-              <a:t>選定基準（3点）</a:t>
+              <a:t>② 短期修繕計画スケジュール（直近5年）</a:t>
             </a:r>
           </a:p>
         </p:txBody>
       </p:sp>
       <p:graphicFrame>
         <p:nvGraphicFramePr>
-          <p:cNvPr id="21" name="Table 20"/>
+          <p:cNvPr id="10" name="Table 9"/>
           <p:cNvGraphicFramePr>
             <a:graphicFrameLocks noGrp="1"/>
           </p:cNvGraphicFramePr>
           <p:nvPr/>
         </p:nvGraphicFramePr>
         <p:xfrm>
-          <a:off x="6126480" y="2039112"/>
-          <a:ext cx="5669280" cy="1371600"/>
+          <a:off x="457200" y="1508760"/>
+          <a:ext cx="6647688" cy="1965960"/>
         </p:xfrm>
         <a:graphic>
           <a:graphicData uri="http://schemas.openxmlformats.org/drawingml/2006/table">
@@ -7625,8 +7424,1355 @@
                 <a:tableStyleId>{5C22544A-7EE6-4342-B048-85BDC9FD1C3A}</a:tableStyleId>
               </a:tblPr>
               <a:tblGrid>
-                <a:gridCol w="457200"/>
-                <a:gridCol w="5212080"/>
+                <a:gridCol w="1051560"/>
+                <a:gridCol w="5596128"/>
+              </a:tblGrid>
+              <a:tr h="327660">
+                <a:tc>
+                  <a:txBody>
+                    <a:bodyPr/>
+                    <a:lstStyle/>
+                    <a:p>
+                      <a:pPr algn="ctr"/>
+                      <a:r>
+                        <a:rPr sz="1300" b="1">
+                          <a:solidFill>
+                            <a:srgbClr val="4A7CB4"/>
+                          </a:solidFill>
+                        </a:rPr>
+                        <a:t>時期</a:t>
+                      </a:r>
+                    </a:p>
+                  </a:txBody>
+                  <a:tcPr>
+                    <a:solidFill>
+                      <a:srgbClr val="E4EFF7"/>
+                    </a:solidFill>
+                  </a:tcPr>
+                </a:tc>
+                <a:tc>
+                  <a:txBody>
+                    <a:bodyPr/>
+                    <a:lstStyle/>
+                    <a:p>
+                      <a:pPr algn="ctr"/>
+                      <a:r>
+                        <a:rPr sz="1300" b="1">
+                          <a:solidFill>
+                            <a:srgbClr val="4A7CB4"/>
+                          </a:solidFill>
+                        </a:rPr>
+                        <a:t>内容（委員会中心）</a:t>
+                      </a:r>
+                    </a:p>
+                  </a:txBody>
+                  <a:tcPr>
+                    <a:solidFill>
+                      <a:srgbClr val="E4EFF7"/>
+                    </a:solidFill>
+                  </a:tcPr>
+                </a:tc>
+              </a:tr>
+              <a:tr h="327660">
+                <a:tc>
+                  <a:txBody>
+                    <a:bodyPr/>
+                    <a:lstStyle/>
+                    <a:p>
+                      <a:r>
+                        <a:rPr sz="1300">
+                          <a:solidFill>
+                            <a:srgbClr val="222222"/>
+                          </a:solidFill>
+                        </a:rPr>
+                        <a:t>8月</a:t>
+                      </a:r>
+                    </a:p>
+                  </a:txBody>
+                  <a:tcPr>
+                    <a:solidFill>
+                      <a:srgbClr val="F4F7FB"/>
+                    </a:solidFill>
+                  </a:tcPr>
+                </a:tc>
+                <a:tc>
+                  <a:txBody>
+                    <a:bodyPr/>
+                    <a:lstStyle/>
+                    <a:p>
+                      <a:r>
+                        <a:rPr sz="1300">
+                          <a:solidFill>
+                            <a:srgbClr val="222222"/>
+                          </a:solidFill>
+                        </a:rPr>
+                        <a:t>要求仕様提示（インフラ緊急性・省エネ優先）</a:t>
+                      </a:r>
+                    </a:p>
+                  </a:txBody>
+                  <a:tcPr>
+                    <a:solidFill>
+                      <a:srgbClr val="F4F7FB"/>
+                    </a:solidFill>
+                  </a:tcPr>
+                </a:tc>
+              </a:tr>
+              <a:tr h="327660">
+                <a:tc>
+                  <a:txBody>
+                    <a:bodyPr/>
+                    <a:lstStyle/>
+                    <a:p>
+                      <a:r>
+                        <a:rPr sz="1300">
+                          <a:solidFill>
+                            <a:srgbClr val="222222"/>
+                          </a:solidFill>
+                        </a:rPr>
+                        <a:t>9月</a:t>
+                      </a:r>
+                    </a:p>
+                  </a:txBody>
+                  <a:tcPr>
+                    <a:solidFill>
+                      <a:srgbClr val="FFFFFF"/>
+                    </a:solidFill>
+                  </a:tcPr>
+                </a:tc>
+                <a:tc>
+                  <a:txBody>
+                    <a:bodyPr/>
+                    <a:lstStyle/>
+                    <a:p>
+                      <a:r>
+                        <a:rPr sz="1300">
+                          <a:solidFill>
+                            <a:srgbClr val="222222"/>
+                          </a:solidFill>
+                        </a:rPr>
+                        <a:t>計画案提示（省エネ改修を中心に）</a:t>
+                      </a:r>
+                    </a:p>
+                  </a:txBody>
+                  <a:tcPr>
+                    <a:solidFill>
+                      <a:srgbClr val="FFFFFF"/>
+                    </a:solidFill>
+                  </a:tcPr>
+                </a:tc>
+              </a:tr>
+              <a:tr h="327660">
+                <a:tc>
+                  <a:txBody>
+                    <a:bodyPr/>
+                    <a:lstStyle/>
+                    <a:p>
+                      <a:r>
+                        <a:rPr sz="1300">
+                          <a:solidFill>
+                            <a:srgbClr val="222222"/>
+                          </a:solidFill>
+                        </a:rPr>
+                        <a:t>11月</a:t>
+                      </a:r>
+                    </a:p>
+                  </a:txBody>
+                  <a:tcPr>
+                    <a:solidFill>
+                      <a:srgbClr val="F4F7FB"/>
+                    </a:solidFill>
+                  </a:tcPr>
+                </a:tc>
+                <a:tc>
+                  <a:txBody>
+                    <a:bodyPr/>
+                    <a:lstStyle/>
+                    <a:p>
+                      <a:r>
+                        <a:rPr sz="1300">
+                          <a:solidFill>
+                            <a:srgbClr val="222222"/>
+                          </a:solidFill>
+                        </a:rPr>
+                        <a:t>現地調査後の優先修繕案提示</a:t>
+                      </a:r>
+                    </a:p>
+                  </a:txBody>
+                  <a:tcPr>
+                    <a:solidFill>
+                      <a:srgbClr val="F4F7FB"/>
+                    </a:solidFill>
+                  </a:tcPr>
+                </a:tc>
+              </a:tr>
+              <a:tr h="327660">
+                <a:tc>
+                  <a:txBody>
+                    <a:bodyPr/>
+                    <a:lstStyle/>
+                    <a:p>
+                      <a:r>
+                        <a:rPr sz="1300">
+                          <a:solidFill>
+                            <a:srgbClr val="222222"/>
+                          </a:solidFill>
+                        </a:rPr>
+                        <a:t>12月</a:t>
+                      </a:r>
+                    </a:p>
+                  </a:txBody>
+                  <a:tcPr>
+                    <a:solidFill>
+                      <a:srgbClr val="FFFFFF"/>
+                    </a:solidFill>
+                  </a:tcPr>
+                </a:tc>
+                <a:tc>
+                  <a:txBody>
+                    <a:bodyPr/>
+                    <a:lstStyle/>
+                    <a:p>
+                      <a:r>
+                        <a:rPr sz="1300">
+                          <a:solidFill>
+                            <a:srgbClr val="222222"/>
+                          </a:solidFill>
+                        </a:rPr>
+                        <a:t>短期修繕計画案の検討 / 総会提案資料作成</a:t>
+                      </a:r>
+                    </a:p>
+                  </a:txBody>
+                  <a:tcPr>
+                    <a:solidFill>
+                      <a:srgbClr val="FFFFFF"/>
+                    </a:solidFill>
+                  </a:tcPr>
+                </a:tc>
+              </a:tr>
+              <a:tr h="327660">
+                <a:tc>
+                  <a:txBody>
+                    <a:bodyPr/>
+                    <a:lstStyle/>
+                    <a:p>
+                      <a:r>
+                        <a:rPr sz="1300">
+                          <a:solidFill>
+                            <a:srgbClr val="222222"/>
+                          </a:solidFill>
+                        </a:rPr>
+                        <a:t>来年総会</a:t>
+                      </a:r>
+                    </a:p>
+                  </a:txBody>
+                  <a:tcPr>
+                    <a:solidFill>
+                      <a:srgbClr val="F4F7FB"/>
+                    </a:solidFill>
+                  </a:tcPr>
+                </a:tc>
+                <a:tc>
+                  <a:txBody>
+                    <a:bodyPr/>
+                    <a:lstStyle/>
+                    <a:p>
+                      <a:r>
+                        <a:rPr sz="1300">
+                          <a:solidFill>
+                            <a:srgbClr val="222222"/>
+                          </a:solidFill>
+                        </a:rPr>
+                        <a:t>議決</a:t>
+                      </a:r>
+                    </a:p>
+                  </a:txBody>
+                  <a:tcPr>
+                    <a:solidFill>
+                      <a:srgbClr val="F4F7FB"/>
+                    </a:solidFill>
+                  </a:tcPr>
+                </a:tc>
+              </a:tr>
+            </a:tbl>
+          </a:graphicData>
+        </a:graphic>
+      </p:graphicFrame>
+      <p:sp>
+        <p:nvSpPr>
+          <p:cNvPr id="11" name="Rectangle 10"/>
+          <p:cNvSpPr/>
+          <p:nvPr/>
+        </p:nvSpPr>
+        <p:spPr>
+          <a:xfrm>
+            <a:off x="457200" y="3840480"/>
+            <a:ext cx="6647688" cy="25400"/>
+          </a:xfrm>
+          <a:prstGeom prst="rect">
+            <a:avLst/>
+          </a:prstGeom>
+          <a:solidFill>
+            <a:srgbClr val="4A7CB4"/>
+          </a:solidFill>
+          <a:ln>
+            <a:noFill/>
+          </a:ln>
+        </p:spPr>
+        <p:style>
+          <a:lnRef idx="1">
+            <a:schemeClr val="accent1"/>
+          </a:lnRef>
+          <a:fillRef idx="3">
+            <a:schemeClr val="accent1"/>
+          </a:fillRef>
+          <a:effectRef idx="2">
+            <a:schemeClr val="accent1"/>
+          </a:effectRef>
+          <a:fontRef idx="minor">
+            <a:schemeClr val="lt1"/>
+          </a:fontRef>
+        </p:style>
+        <p:txBody>
+          <a:bodyPr rtlCol="0" anchor="ctr"/>
+          <a:lstStyle/>
+          <a:p>
+            <a:pPr algn="ctr"/>
+          </a:p>
+        </p:txBody>
+      </p:sp>
+      <p:sp>
+        <p:nvSpPr>
+          <p:cNvPr id="12" name="TextBox 11"/>
+          <p:cNvSpPr txBox="1"/>
+          <p:nvPr/>
+        </p:nvSpPr>
+        <p:spPr>
+          <a:xfrm>
+            <a:off x="457200" y="3891280"/>
+            <a:ext cx="6647688" cy="411480"/>
+          </a:xfrm>
+          <a:prstGeom prst="rect">
+            <a:avLst/>
+          </a:prstGeom>
+          <a:noFill/>
+        </p:spPr>
+        <p:txBody>
+          <a:bodyPr wrap="square">
+            <a:spAutoFit/>
+          </a:bodyPr>
+          <a:lstStyle/>
+          <a:p>
+            <a:pPr algn="l"/>
+            <a:r>
+              <a:rPr sz="1700" b="1" i="0">
+                <a:solidFill>
+                  <a:srgbClr val="4A7CB4"/>
+                </a:solidFill>
+              </a:rPr>
+              <a:t>新テーマ：省エネ改修・緊急修繕の来年総会提案</a:t>
+            </a:r>
+          </a:p>
+        </p:txBody>
+      </p:sp>
+      <p:sp>
+        <p:nvSpPr>
+          <p:cNvPr id="13" name="Rectangle 12"/>
+          <p:cNvSpPr/>
+          <p:nvPr/>
+        </p:nvSpPr>
+        <p:spPr>
+          <a:xfrm>
+            <a:off x="457200" y="4361688"/>
+            <a:ext cx="6647688" cy="411480"/>
+          </a:xfrm>
+          <a:prstGeom prst="rect">
+            <a:avLst/>
+          </a:prstGeom>
+          <a:solidFill>
+            <a:srgbClr val="F4F7FB"/>
+          </a:solidFill>
+          <a:ln w="6350">
+            <a:solidFill>
+              <a:srgbClr val="E4EFF7"/>
+            </a:solidFill>
+          </a:ln>
+        </p:spPr>
+        <p:style>
+          <a:lnRef idx="1">
+            <a:schemeClr val="accent1"/>
+          </a:lnRef>
+          <a:fillRef idx="3">
+            <a:schemeClr val="accent1"/>
+          </a:fillRef>
+          <a:effectRef idx="2">
+            <a:schemeClr val="accent1"/>
+          </a:effectRef>
+          <a:fontRef idx="minor">
+            <a:schemeClr val="lt1"/>
+          </a:fontRef>
+        </p:style>
+        <p:txBody>
+          <a:bodyPr rtlCol="0" anchor="ctr"/>
+          <a:lstStyle/>
+          <a:p>
+            <a:pPr algn="ctr"/>
+          </a:p>
+        </p:txBody>
+      </p:sp>
+      <p:sp>
+        <p:nvSpPr>
+          <p:cNvPr id="14" name="TextBox 13"/>
+          <p:cNvSpPr txBox="1"/>
+          <p:nvPr/>
+        </p:nvSpPr>
+        <p:spPr>
+          <a:xfrm>
+            <a:off x="594360" y="4407408"/>
+            <a:ext cx="6400800" cy="347472"/>
+          </a:xfrm>
+          <a:prstGeom prst="rect">
+            <a:avLst/>
+          </a:prstGeom>
+          <a:noFill/>
+        </p:spPr>
+        <p:txBody>
+          <a:bodyPr wrap="square">
+            <a:spAutoFit/>
+          </a:bodyPr>
+          <a:lstStyle/>
+          <a:p>
+            <a:pPr algn="l"/>
+            <a:r>
+              <a:rPr sz="1300" b="0" i="1">
+                <a:solidFill>
+                  <a:srgbClr val="555555"/>
+                </a:solidFill>
+              </a:rPr>
+              <a:t>長期計画策定と並行し、早期に独立した検討ラインで動く。各提案は修繕積立金への影響を確認しながら進める。</a:t>
+            </a:r>
+          </a:p>
+        </p:txBody>
+      </p:sp>
+      <p:graphicFrame>
+        <p:nvGraphicFramePr>
+          <p:cNvPr id="15" name="Table 14"/>
+          <p:cNvGraphicFramePr>
+            <a:graphicFrameLocks noGrp="1"/>
+          </p:cNvGraphicFramePr>
+          <p:nvPr/>
+        </p:nvGraphicFramePr>
+        <p:xfrm>
+          <a:off x="457200" y="4910328"/>
+          <a:ext cx="6647688" cy="2377440"/>
+        </p:xfrm>
+        <a:graphic>
+          <a:graphicData uri="http://schemas.openxmlformats.org/drawingml/2006/table">
+            <a:tbl>
+              <a:tblPr firstRow="1" bandRow="1">
+                <a:tableStyleId>{5C22544A-7EE6-4342-B048-85BDC9FD1C3A}</a:tableStyleId>
+              </a:tblPr>
+              <a:tblGrid>
+                <a:gridCol w="822960"/>
+                <a:gridCol w="5001768"/>
+                <a:gridCol w="822960"/>
+              </a:tblGrid>
+              <a:tr h="792480">
+                <a:tc>
+                  <a:txBody>
+                    <a:bodyPr/>
+                    <a:lstStyle/>
+                    <a:p>
+                      <a:pPr algn="ctr"/>
+                      <a:r>
+                        <a:rPr sz="1300" b="1">
+                          <a:solidFill>
+                            <a:srgbClr val="4A7CB4"/>
+                          </a:solidFill>
+                        </a:rPr>
+                        <a:t>テーマ</a:t>
+                      </a:r>
+                    </a:p>
+                  </a:txBody>
+                  <a:tcPr>
+                    <a:solidFill>
+                      <a:srgbClr val="E4EFF7"/>
+                    </a:solidFill>
+                  </a:tcPr>
+                </a:tc>
+                <a:tc>
+                  <a:txBody>
+                    <a:bodyPr/>
+                    <a:lstStyle/>
+                    <a:p>
+                      <a:pPr algn="ctr"/>
+                      <a:r>
+                        <a:rPr sz="1300" b="1">
+                          <a:solidFill>
+                            <a:srgbClr val="4A7CB4"/>
+                          </a:solidFill>
+                        </a:rPr>
+                        <a:t>内容</a:t>
+                      </a:r>
+                    </a:p>
+                  </a:txBody>
+                  <a:tcPr>
+                    <a:solidFill>
+                      <a:srgbClr val="E4EFF7"/>
+                    </a:solidFill>
+                  </a:tcPr>
+                </a:tc>
+                <a:tc>
+                  <a:txBody>
+                    <a:bodyPr/>
+                    <a:lstStyle/>
+                    <a:p>
+                      <a:pPr algn="ctr"/>
+                      <a:r>
+                        <a:rPr sz="1300" b="1">
+                          <a:solidFill>
+                            <a:srgbClr val="4A7CB4"/>
+                          </a:solidFill>
+                        </a:rPr>
+                        <a:t>目標</a:t>
+                      </a:r>
+                    </a:p>
+                  </a:txBody>
+                  <a:tcPr>
+                    <a:solidFill>
+                      <a:srgbClr val="E4EFF7"/>
+                    </a:solidFill>
+                  </a:tcPr>
+                </a:tc>
+              </a:tr>
+              <a:tr h="792480">
+                <a:tc>
+                  <a:txBody>
+                    <a:bodyPr/>
+                    <a:lstStyle/>
+                    <a:p>
+                      <a:r>
+                        <a:rPr sz="1300">
+                          <a:solidFill>
+                            <a:srgbClr val="222222"/>
+                          </a:solidFill>
+                        </a:rPr>
+                        <a:t>省エネ
+改修</a:t>
+                      </a:r>
+                    </a:p>
+                  </a:txBody>
+                  <a:tcPr>
+                    <a:solidFill>
+                      <a:srgbClr val="F4F7FB"/>
+                    </a:solidFill>
+                  </a:tcPr>
+                </a:tc>
+                <a:tc>
+                  <a:txBody>
+                    <a:bodyPr/>
+                    <a:lstStyle/>
+                    <a:p>
+                      <a:r>
+                        <a:rPr sz="1300">
+                          <a:solidFill>
+                            <a:srgbClr val="222222"/>
+                          </a:solidFill>
+                        </a:rPr>
+                        <a:t>断熱窓改修を優先検討（専有部対象）
+補助金・助成金（都・市・国）の活用可能性を調査
+コンサルにも提案を依頼</a:t>
+                      </a:r>
+                    </a:p>
+                  </a:txBody>
+                  <a:tcPr>
+                    <a:solidFill>
+                      <a:srgbClr val="F4F7FB"/>
+                    </a:solidFill>
+                  </a:tcPr>
+                </a:tc>
+                <a:tc>
+                  <a:txBody>
+                    <a:bodyPr/>
+                    <a:lstStyle/>
+                    <a:p>
+                      <a:r>
+                        <a:rPr sz="1300">
+                          <a:solidFill>
+                            <a:srgbClr val="222222"/>
+                          </a:solidFill>
+                        </a:rPr>
+                        <a:t>2027年
+総会への
+提案</a:t>
+                      </a:r>
+                    </a:p>
+                  </a:txBody>
+                  <a:tcPr>
+                    <a:solidFill>
+                      <a:srgbClr val="F4F7FB"/>
+                    </a:solidFill>
+                  </a:tcPr>
+                </a:tc>
+              </a:tr>
+              <a:tr h="792480">
+                <a:tc>
+                  <a:txBody>
+                    <a:bodyPr/>
+                    <a:lstStyle/>
+                    <a:p>
+                      <a:r>
+                        <a:rPr sz="1300">
+                          <a:solidFill>
+                            <a:srgbClr val="222222"/>
+                          </a:solidFill>
+                        </a:rPr>
+                        <a:t>緊急
+修繕</a:t>
+                      </a:r>
+                    </a:p>
+                  </a:txBody>
+                  <a:tcPr>
+                    <a:solidFill>
+                      <a:srgbClr val="FFFFFF"/>
+                    </a:solidFill>
+                  </a:tcPr>
+                </a:tc>
+                <a:tc>
+                  <a:txBody>
+                    <a:bodyPr/>
+                    <a:lstStyle/>
+                    <a:p>
+                      <a:r>
+                        <a:rPr sz="1300">
+                          <a:solidFill>
+                            <a:srgbClr val="222222"/>
+                          </a:solidFill>
+                        </a:rPr>
+                        <a:t>インフラ系（給排水管・電気設備等）の現状把握を優先
+コンサル調査と並行して早期実態把握
+緊急度が高いものは総会を待たず理事会決議で対応</a:t>
+                      </a:r>
+                    </a:p>
+                  </a:txBody>
+                  <a:tcPr>
+                    <a:solidFill>
+                      <a:srgbClr val="FFFFFF"/>
+                    </a:solidFill>
+                  </a:tcPr>
+                </a:tc>
+                <a:tc>
+                  <a:txBody>
+                    <a:bodyPr/>
+                    <a:lstStyle/>
+                    <a:p>
+                      <a:r>
+                        <a:rPr sz="1300">
+                          <a:solidFill>
+                            <a:srgbClr val="222222"/>
+                          </a:solidFill>
+                        </a:rPr>
+                        <a:t>随時
+理事会
+判断</a:t>
+                      </a:r>
+                    </a:p>
+                  </a:txBody>
+                  <a:tcPr>
+                    <a:solidFill>
+                      <a:srgbClr val="FFFFFF"/>
+                    </a:solidFill>
+                  </a:tcPr>
+                </a:tc>
+              </a:tr>
+            </a:tbl>
+          </a:graphicData>
+        </a:graphic>
+      </p:graphicFrame>
+      <p:sp>
+        <p:nvSpPr>
+          <p:cNvPr id="16" name="Rectangle 15"/>
+          <p:cNvSpPr/>
+          <p:nvPr/>
+        </p:nvSpPr>
+        <p:spPr>
+          <a:xfrm>
+            <a:off x="457200" y="7470648"/>
+            <a:ext cx="6647688" cy="548640"/>
+          </a:xfrm>
+          <a:prstGeom prst="rect">
+            <a:avLst/>
+          </a:prstGeom>
+          <a:solidFill>
+            <a:srgbClr val="F4F7FB"/>
+          </a:solidFill>
+          <a:ln w="6350">
+            <a:solidFill>
+              <a:srgbClr val="E4EFF7"/>
+            </a:solidFill>
+          </a:ln>
+        </p:spPr>
+        <p:style>
+          <a:lnRef idx="1">
+            <a:schemeClr val="accent1"/>
+          </a:lnRef>
+          <a:fillRef idx="3">
+            <a:schemeClr val="accent1"/>
+          </a:fillRef>
+          <a:effectRef idx="2">
+            <a:schemeClr val="accent1"/>
+          </a:effectRef>
+          <a:fontRef idx="minor">
+            <a:schemeClr val="lt1"/>
+          </a:fontRef>
+        </p:style>
+        <p:txBody>
+          <a:bodyPr rtlCol="0" anchor="ctr"/>
+          <a:lstStyle/>
+          <a:p>
+            <a:pPr algn="ctr"/>
+          </a:p>
+        </p:txBody>
+      </p:sp>
+      <p:sp>
+        <p:nvSpPr>
+          <p:cNvPr id="17" name="TextBox 16"/>
+          <p:cNvSpPr txBox="1"/>
+          <p:nvPr/>
+        </p:nvSpPr>
+        <p:spPr>
+          <a:xfrm>
+            <a:off x="594360" y="7525512"/>
+            <a:ext cx="6400800" cy="475488"/>
+          </a:xfrm>
+          <a:prstGeom prst="rect">
+            <a:avLst/>
+          </a:prstGeom>
+          <a:noFill/>
+        </p:spPr>
+        <p:txBody>
+          <a:bodyPr wrap="square">
+            <a:spAutoFit/>
+          </a:bodyPr>
+          <a:lstStyle/>
+          <a:p>
+            <a:pPr algn="l"/>
+            <a:r>
+              <a:rPr sz="1300" b="0" i="0">
+                <a:solidFill>
+                  <a:srgbClr val="555555"/>
+                </a:solidFill>
+              </a:rPr>
+              <a:t>● 省エネ改修：補助金差引後の実質負担と積立金残高を照合
+● 緊急修繕：修繕費用の積立金への影響を試算・確認（積立金評価担当設置の場合）</a:t>
+            </a:r>
+          </a:p>
+        </p:txBody>
+      </p:sp>
+    </p:spTree>
+  </p:cSld>
+  <p:clrMapOvr>
+    <a:masterClrMapping/>
+  </p:clrMapOvr>
+</p:sld>
+</file>
+
+<file path=ppt/slides/slide6.xml><?xml version="1.0" encoding="utf-8"?>
+<p:sld xmlns:a="http://schemas.openxmlformats.org/drawingml/2006/main" xmlns:p="http://schemas.openxmlformats.org/presentationml/2006/main" xmlns:r="http://schemas.openxmlformats.org/officeDocument/2006/relationships">
+  <p:cSld>
+    <p:spTree>
+      <p:nvGrpSpPr>
+        <p:cNvPr id="1" name=""/>
+        <p:cNvGrpSpPr/>
+        <p:nvPr/>
+      </p:nvGrpSpPr>
+      <p:grpSpPr/>
+      <p:sp>
+        <p:nvSpPr>
+          <p:cNvPr id="2" name="Rectangle 1"/>
+          <p:cNvSpPr/>
+          <p:nvPr/>
+        </p:nvSpPr>
+        <p:spPr>
+          <a:xfrm>
+            <a:off x="0" y="0"/>
+            <a:ext cx="7562088" cy="164592"/>
+          </a:xfrm>
+          <a:prstGeom prst="rect">
+            <a:avLst/>
+          </a:prstGeom>
+          <a:solidFill>
+            <a:srgbClr val="4A7CB4"/>
+          </a:solidFill>
+          <a:ln>
+            <a:noFill/>
+          </a:ln>
+        </p:spPr>
+        <p:style>
+          <a:lnRef idx="1">
+            <a:schemeClr val="accent1"/>
+          </a:lnRef>
+          <a:fillRef idx="3">
+            <a:schemeClr val="accent1"/>
+          </a:fillRef>
+          <a:effectRef idx="2">
+            <a:schemeClr val="accent1"/>
+          </a:effectRef>
+          <a:fontRef idx="minor">
+            <a:schemeClr val="lt1"/>
+          </a:fontRef>
+        </p:style>
+        <p:txBody>
+          <a:bodyPr rtlCol="0" anchor="ctr"/>
+          <a:lstStyle/>
+          <a:p>
+            <a:pPr algn="ctr"/>
+          </a:p>
+        </p:txBody>
+      </p:sp>
+      <p:sp>
+        <p:nvSpPr>
+          <p:cNvPr id="3" name="TextBox 2"/>
+          <p:cNvSpPr txBox="1"/>
+          <p:nvPr/>
+        </p:nvSpPr>
+        <p:spPr>
+          <a:xfrm>
+            <a:off x="457200" y="228600"/>
+            <a:ext cx="6647688" cy="594360"/>
+          </a:xfrm>
+          <a:prstGeom prst="rect">
+            <a:avLst/>
+          </a:prstGeom>
+          <a:noFill/>
+        </p:spPr>
+        <p:txBody>
+          <a:bodyPr wrap="square">
+            <a:spAutoFit/>
+          </a:bodyPr>
+          <a:lstStyle/>
+          <a:p>
+            <a:pPr algn="l"/>
+            <a:r>
+              <a:rPr sz="2200" b="1" i="0">
+                <a:solidFill>
+                  <a:srgbClr val="222222"/>
+                </a:solidFill>
+              </a:rPr>
+              <a:t>コンサル業者選定の進め方</a:t>
+            </a:r>
+          </a:p>
+        </p:txBody>
+      </p:sp>
+      <p:sp>
+        <p:nvSpPr>
+          <p:cNvPr id="4" name="Rectangle 3"/>
+          <p:cNvSpPr/>
+          <p:nvPr/>
+        </p:nvSpPr>
+        <p:spPr>
+          <a:xfrm>
+            <a:off x="457200" y="822960"/>
+            <a:ext cx="6647688" cy="19050"/>
+          </a:xfrm>
+          <a:prstGeom prst="rect">
+            <a:avLst/>
+          </a:prstGeom>
+          <a:solidFill>
+            <a:srgbClr val="4A7CB4"/>
+          </a:solidFill>
+          <a:ln>
+            <a:noFill/>
+          </a:ln>
+        </p:spPr>
+        <p:style>
+          <a:lnRef idx="1">
+            <a:schemeClr val="accent1"/>
+          </a:lnRef>
+          <a:fillRef idx="3">
+            <a:schemeClr val="accent1"/>
+          </a:fillRef>
+          <a:effectRef idx="2">
+            <a:schemeClr val="accent1"/>
+          </a:effectRef>
+          <a:fontRef idx="minor">
+            <a:schemeClr val="lt1"/>
+          </a:fontRef>
+        </p:style>
+        <p:txBody>
+          <a:bodyPr rtlCol="0" anchor="ctr"/>
+          <a:lstStyle/>
+          <a:p>
+            <a:pPr algn="ctr"/>
+          </a:p>
+        </p:txBody>
+      </p:sp>
+      <p:sp>
+        <p:nvSpPr>
+          <p:cNvPr id="5" name="TextBox 4"/>
+          <p:cNvSpPr txBox="1"/>
+          <p:nvPr/>
+        </p:nvSpPr>
+        <p:spPr>
+          <a:xfrm>
+            <a:off x="457200" y="10241280"/>
+            <a:ext cx="5943600" cy="274320"/>
+          </a:xfrm>
+          <a:prstGeom prst="rect">
+            <a:avLst/>
+          </a:prstGeom>
+          <a:noFill/>
+        </p:spPr>
+        <p:txBody>
+          <a:bodyPr wrap="square">
+            <a:spAutoFit/>
+          </a:bodyPr>
+          <a:lstStyle/>
+          <a:p>
+            <a:pPr algn="l"/>
+            <a:r>
+              <a:rPr sz="1000" b="0" i="0">
+                <a:solidFill>
+                  <a:srgbClr val="555555"/>
+                </a:solidFill>
+              </a:rPr>
+              <a:t>コンフォール井の頭公園南 修繕委員会 第1回定例　2026.6.7</a:t>
+            </a:r>
+          </a:p>
+        </p:txBody>
+      </p:sp>
+      <p:sp>
+        <p:nvSpPr>
+          <p:cNvPr id="6" name="TextBox 5"/>
+          <p:cNvSpPr txBox="1"/>
+          <p:nvPr/>
+        </p:nvSpPr>
+        <p:spPr>
+          <a:xfrm>
+            <a:off x="6858000" y="10241280"/>
+            <a:ext cx="548640" cy="274320"/>
+          </a:xfrm>
+          <a:prstGeom prst="rect">
+            <a:avLst/>
+          </a:prstGeom>
+          <a:noFill/>
+        </p:spPr>
+        <p:txBody>
+          <a:bodyPr wrap="square">
+            <a:spAutoFit/>
+          </a:bodyPr>
+          <a:lstStyle/>
+          <a:p>
+            <a:pPr algn="r"/>
+            <a:r>
+              <a:rPr sz="1000" b="0" i="0">
+                <a:solidFill>
+                  <a:srgbClr val="555555"/>
+                </a:solidFill>
+              </a:rPr>
+              <a:t>6 / 7</a:t>
+            </a:r>
+          </a:p>
+        </p:txBody>
+      </p:sp>
+      <p:sp>
+        <p:nvSpPr>
+          <p:cNvPr id="7" name="Rectangle 6"/>
+          <p:cNvSpPr/>
+          <p:nvPr/>
+        </p:nvSpPr>
+        <p:spPr>
+          <a:xfrm>
+            <a:off x="457200" y="10195560"/>
+            <a:ext cx="6647688" cy="12700"/>
+          </a:xfrm>
+          <a:prstGeom prst="rect">
+            <a:avLst/>
+          </a:prstGeom>
+          <a:solidFill>
+            <a:srgbClr val="E4EFF7"/>
+          </a:solidFill>
+          <a:ln>
+            <a:noFill/>
+          </a:ln>
+        </p:spPr>
+        <p:style>
+          <a:lnRef idx="1">
+            <a:schemeClr val="accent1"/>
+          </a:lnRef>
+          <a:fillRef idx="3">
+            <a:schemeClr val="accent1"/>
+          </a:fillRef>
+          <a:effectRef idx="2">
+            <a:schemeClr val="accent1"/>
+          </a:effectRef>
+          <a:fontRef idx="minor">
+            <a:schemeClr val="lt1"/>
+          </a:fontRef>
+        </p:style>
+        <p:txBody>
+          <a:bodyPr rtlCol="0" anchor="ctr"/>
+          <a:lstStyle/>
+          <a:p>
+            <a:pPr algn="ctr"/>
+          </a:p>
+        </p:txBody>
+      </p:sp>
+      <p:sp>
+        <p:nvSpPr>
+          <p:cNvPr id="8" name="Rectangle 7"/>
+          <p:cNvSpPr/>
+          <p:nvPr/>
+        </p:nvSpPr>
+        <p:spPr>
+          <a:xfrm>
+            <a:off x="457200" y="960120"/>
+            <a:ext cx="6647688" cy="502920"/>
+          </a:xfrm>
+          <a:prstGeom prst="rect">
+            <a:avLst/>
+          </a:prstGeom>
+          <a:solidFill>
+            <a:srgbClr val="F4F7FB"/>
+          </a:solidFill>
+          <a:ln w="12700">
+            <a:solidFill>
+              <a:srgbClr val="4A7CB4"/>
+            </a:solidFill>
+          </a:ln>
+        </p:spPr>
+        <p:style>
+          <a:lnRef idx="1">
+            <a:schemeClr val="accent1"/>
+          </a:lnRef>
+          <a:fillRef idx="3">
+            <a:schemeClr val="accent1"/>
+          </a:fillRef>
+          <a:effectRef idx="2">
+            <a:schemeClr val="accent1"/>
+          </a:effectRef>
+          <a:fontRef idx="minor">
+            <a:schemeClr val="lt1"/>
+          </a:fontRef>
+        </p:style>
+        <p:txBody>
+          <a:bodyPr rtlCol="0" anchor="ctr"/>
+          <a:lstStyle/>
+          <a:p>
+            <a:pPr algn="ctr"/>
+          </a:p>
+        </p:txBody>
+      </p:sp>
+      <p:sp>
+        <p:nvSpPr>
+          <p:cNvPr id="9" name="TextBox 8"/>
+          <p:cNvSpPr txBox="1"/>
+          <p:nvPr/>
+        </p:nvSpPr>
+        <p:spPr>
+          <a:xfrm>
+            <a:off x="594360" y="1024128"/>
+            <a:ext cx="6400800" cy="411480"/>
+          </a:xfrm>
+          <a:prstGeom prst="rect">
+            <a:avLst/>
+          </a:prstGeom>
+          <a:noFill/>
+        </p:spPr>
+        <p:txBody>
+          <a:bodyPr wrap="square">
+            <a:spAutoFit/>
+          </a:bodyPr>
+          <a:lstStyle/>
+          <a:p>
+            <a:pPr algn="ctr"/>
+            <a:r>
+              <a:rPr sz="1600" b="1" i="0">
+                <a:solidFill>
+                  <a:srgbClr val="4A7CB4"/>
+                </a:solidFill>
+              </a:rPr>
+              <a:t>候補3社：　TDS　／　オフィスレコン　／　センターオフィス</a:t>
+            </a:r>
+          </a:p>
+        </p:txBody>
+      </p:sp>
+      <p:sp>
+        <p:nvSpPr>
+          <p:cNvPr id="10" name="Rectangle 9"/>
+          <p:cNvSpPr/>
+          <p:nvPr/>
+        </p:nvSpPr>
+        <p:spPr>
+          <a:xfrm>
+            <a:off x="457200" y="1600200"/>
+            <a:ext cx="6647688" cy="25400"/>
+          </a:xfrm>
+          <a:prstGeom prst="rect">
+            <a:avLst/>
+          </a:prstGeom>
+          <a:solidFill>
+            <a:srgbClr val="4A7CB4"/>
+          </a:solidFill>
+          <a:ln>
+            <a:noFill/>
+          </a:ln>
+        </p:spPr>
+        <p:style>
+          <a:lnRef idx="1">
+            <a:schemeClr val="accent1"/>
+          </a:lnRef>
+          <a:fillRef idx="3">
+            <a:schemeClr val="accent1"/>
+          </a:fillRef>
+          <a:effectRef idx="2">
+            <a:schemeClr val="accent1"/>
+          </a:effectRef>
+          <a:fontRef idx="minor">
+            <a:schemeClr val="lt1"/>
+          </a:fontRef>
+        </p:style>
+        <p:txBody>
+          <a:bodyPr rtlCol="0" anchor="ctr"/>
+          <a:lstStyle/>
+          <a:p>
+            <a:pPr algn="ctr"/>
+          </a:p>
+        </p:txBody>
+      </p:sp>
+      <p:sp>
+        <p:nvSpPr>
+          <p:cNvPr id="11" name="TextBox 10"/>
+          <p:cNvSpPr txBox="1"/>
+          <p:nvPr/>
+        </p:nvSpPr>
+        <p:spPr>
+          <a:xfrm>
+            <a:off x="457200" y="1651000"/>
+            <a:ext cx="6647688" cy="411480"/>
+          </a:xfrm>
+          <a:prstGeom prst="rect">
+            <a:avLst/>
+          </a:prstGeom>
+          <a:noFill/>
+        </p:spPr>
+        <p:txBody>
+          <a:bodyPr wrap="square">
+            <a:spAutoFit/>
+          </a:bodyPr>
+          <a:lstStyle/>
+          <a:p>
+            <a:pPr algn="l"/>
+            <a:r>
+              <a:rPr sz="1700" b="1" i="0">
+                <a:solidFill>
+                  <a:srgbClr val="4A7CB4"/>
+                </a:solidFill>
+              </a:rPr>
+              <a:t>プレゼン実施方針</a:t>
+            </a:r>
+          </a:p>
+        </p:txBody>
+      </p:sp>
+      <p:sp>
+        <p:nvSpPr>
+          <p:cNvPr id="12" name="TextBox 11"/>
+          <p:cNvSpPr txBox="1"/>
+          <p:nvPr/>
+        </p:nvSpPr>
+        <p:spPr>
+          <a:xfrm>
+            <a:off x="548640" y="2148840"/>
+            <a:ext cx="6492240" cy="502920"/>
+          </a:xfrm>
+          <a:prstGeom prst="rect">
+            <a:avLst/>
+          </a:prstGeom>
+          <a:noFill/>
+        </p:spPr>
+        <p:txBody>
+          <a:bodyPr wrap="square">
+            <a:spAutoFit/>
+          </a:bodyPr>
+          <a:lstStyle/>
+          <a:p>
+            <a:pPr algn="l"/>
+            <a:r>
+              <a:rPr sz="1400" b="0" i="0">
+                <a:solidFill>
+                  <a:srgbClr val="222222"/>
+                </a:solidFill>
+              </a:rPr>
+              <a:t>● 7月中に3社それぞれ30分のプレゼンを実施</a:t>
+            </a:r>
+          </a:p>
+        </p:txBody>
+      </p:sp>
+      <p:sp>
+        <p:nvSpPr>
+          <p:cNvPr id="13" name="TextBox 12"/>
+          <p:cNvSpPr txBox="1"/>
+          <p:nvPr/>
+        </p:nvSpPr>
+        <p:spPr>
+          <a:xfrm>
+            <a:off x="548640" y="2606040"/>
+            <a:ext cx="6492240" cy="502920"/>
+          </a:xfrm>
+          <a:prstGeom prst="rect">
+            <a:avLst/>
+          </a:prstGeom>
+          <a:noFill/>
+        </p:spPr>
+        <p:txBody>
+          <a:bodyPr wrap="square">
+            <a:spAutoFit/>
+          </a:bodyPr>
+          <a:lstStyle/>
+          <a:p>
+            <a:pPr algn="l"/>
+            <a:r>
+              <a:rPr sz="1400" b="0" i="0">
+                <a:solidFill>
+                  <a:srgbClr val="222222"/>
+                </a:solidFill>
+              </a:rPr>
+              <a:t>● 場所：会場を1日確保して3社連続、または管理事務室（Web参加可）</a:t>
+            </a:r>
+          </a:p>
+        </p:txBody>
+      </p:sp>
+      <p:sp>
+        <p:nvSpPr>
+          <p:cNvPr id="14" name="TextBox 13"/>
+          <p:cNvSpPr txBox="1"/>
+          <p:nvPr/>
+        </p:nvSpPr>
+        <p:spPr>
+          <a:xfrm>
+            <a:off x="548640" y="3063240"/>
+            <a:ext cx="6492240" cy="502920"/>
+          </a:xfrm>
+          <a:prstGeom prst="rect">
+            <a:avLst/>
+          </a:prstGeom>
+          <a:noFill/>
+        </p:spPr>
+        <p:txBody>
+          <a:bodyPr wrap="square">
+            <a:spAutoFit/>
+          </a:bodyPr>
+          <a:lstStyle/>
+          <a:p>
+            <a:pPr algn="l"/>
+            <a:r>
+              <a:rPr sz="1400" b="0" i="0">
+                <a:solidFill>
+                  <a:srgbClr val="222222"/>
+                </a:solidFill>
+              </a:rPr>
+              <a:t>● 本日：各社への連絡・日程調整・会場確保の担当を決定</a:t>
+            </a:r>
+          </a:p>
+        </p:txBody>
+      </p:sp>
+      <p:sp>
+        <p:nvSpPr>
+          <p:cNvPr id="15" name="Rectangle 14"/>
+          <p:cNvSpPr/>
+          <p:nvPr/>
+        </p:nvSpPr>
+        <p:spPr>
+          <a:xfrm>
+            <a:off x="457200" y="3657600"/>
+            <a:ext cx="6647688" cy="25400"/>
+          </a:xfrm>
+          <a:prstGeom prst="rect">
+            <a:avLst/>
+          </a:prstGeom>
+          <a:solidFill>
+            <a:srgbClr val="4A7CB4"/>
+          </a:solidFill>
+          <a:ln>
+            <a:noFill/>
+          </a:ln>
+        </p:spPr>
+        <p:style>
+          <a:lnRef idx="1">
+            <a:schemeClr val="accent1"/>
+          </a:lnRef>
+          <a:fillRef idx="3">
+            <a:schemeClr val="accent1"/>
+          </a:fillRef>
+          <a:effectRef idx="2">
+            <a:schemeClr val="accent1"/>
+          </a:effectRef>
+          <a:fontRef idx="minor">
+            <a:schemeClr val="lt1"/>
+          </a:fontRef>
+        </p:style>
+        <p:txBody>
+          <a:bodyPr rtlCol="0" anchor="ctr"/>
+          <a:lstStyle/>
+          <a:p>
+            <a:pPr algn="ctr"/>
+          </a:p>
+        </p:txBody>
+      </p:sp>
+      <p:sp>
+        <p:nvSpPr>
+          <p:cNvPr id="16" name="TextBox 15"/>
+          <p:cNvSpPr txBox="1"/>
+          <p:nvPr/>
+        </p:nvSpPr>
+        <p:spPr>
+          <a:xfrm>
+            <a:off x="457200" y="3708400"/>
+            <a:ext cx="6647688" cy="411480"/>
+          </a:xfrm>
+          <a:prstGeom prst="rect">
+            <a:avLst/>
+          </a:prstGeom>
+          <a:noFill/>
+        </p:spPr>
+        <p:txBody>
+          <a:bodyPr wrap="square">
+            <a:spAutoFit/>
+          </a:bodyPr>
+          <a:lstStyle/>
+          <a:p>
+            <a:pPr algn="l"/>
+            <a:r>
+              <a:rPr sz="1700" b="1" i="0">
+                <a:solidFill>
+                  <a:srgbClr val="4A7CB4"/>
+                </a:solidFill>
+              </a:rPr>
+              <a:t>選定基準（3点）</a:t>
+            </a:r>
+          </a:p>
+        </p:txBody>
+      </p:sp>
+      <p:graphicFrame>
+        <p:nvGraphicFramePr>
+          <p:cNvPr id="17" name="Table 16"/>
+          <p:cNvGraphicFramePr>
+            <a:graphicFrameLocks noGrp="1"/>
+          </p:cNvGraphicFramePr>
+          <p:nvPr/>
+        </p:nvGraphicFramePr>
+        <p:xfrm>
+          <a:off x="457200" y="4206240"/>
+          <a:ext cx="6647688" cy="1371600"/>
+        </p:xfrm>
+        <a:graphic>
+          <a:graphicData uri="http://schemas.openxmlformats.org/drawingml/2006/table">
+            <a:tbl>
+              <a:tblPr firstRow="1" bandRow="1">
+                <a:tableStyleId>{5C22544A-7EE6-4342-B048-85BDC9FD1C3A}</a:tableStyleId>
+              </a:tblPr>
+              <a:tblGrid>
+                <a:gridCol w="411480"/>
+                <a:gridCol w="6236208"/>
               </a:tblGrid>
               <a:tr h="342900">
                 <a:tc>
@@ -7638,7 +8784,7 @@
                       <a:r>
                         <a:rPr sz="1400" b="1">
                           <a:solidFill>
-                            <a:srgbClr val="FFFFFF"/>
+                            <a:srgbClr val="4A7CB4"/>
                           </a:solidFill>
                         </a:rPr>
                         <a:t>#</a:t>
@@ -7647,7 +8793,7 @@
                   </a:txBody>
                   <a:tcPr>
                     <a:solidFill>
-                      <a:srgbClr val="2E75B6"/>
+                      <a:srgbClr val="E4EFF7"/>
                     </a:solidFill>
                   </a:tcPr>
                 </a:tc>
@@ -7660,7 +8806,7 @@
                       <a:r>
                         <a:rPr sz="1400" b="1">
                           <a:solidFill>
-                            <a:srgbClr val="FFFFFF"/>
+                            <a:srgbClr val="4A7CB4"/>
                           </a:solidFill>
                         </a:rPr>
                         <a:t>基準</a:t>
@@ -7669,7 +8815,7 @@
                   </a:txBody>
                   <a:tcPr>
                     <a:solidFill>
-                      <a:srgbClr val="2E75B6"/>
+                      <a:srgbClr val="E4EFF7"/>
                     </a:solidFill>
                   </a:tcPr>
                 </a:tc>
@@ -7683,7 +8829,7 @@
                       <a:r>
                         <a:rPr sz="1400">
                           <a:solidFill>
-                            <a:srgbClr val="262626"/>
+                            <a:srgbClr val="222222"/>
                           </a:solidFill>
                         </a:rPr>
                         <a:t>①</a:t>
@@ -7692,7 +8838,7 @@
                   </a:txBody>
                   <a:tcPr>
                     <a:solidFill>
-                      <a:srgbClr val="F2F2F2"/>
+                      <a:srgbClr val="F4F7FB"/>
                     </a:solidFill>
                   </a:tcPr>
                 </a:tc>
@@ -7704,7 +8850,7 @@
                       <a:r>
                         <a:rPr sz="1400">
                           <a:solidFill>
-                            <a:srgbClr val="262626"/>
+                            <a:srgbClr val="222222"/>
                           </a:solidFill>
                         </a:rPr>
                         <a:t>要求仕様を満たしているか</a:t>
@@ -7713,7 +8859,7 @@
                   </a:txBody>
                   <a:tcPr>
                     <a:solidFill>
-                      <a:srgbClr val="F2F2F2"/>
+                      <a:srgbClr val="F4F7FB"/>
                     </a:solidFill>
                   </a:tcPr>
                 </a:tc>
@@ -7727,7 +8873,7 @@
                       <a:r>
                         <a:rPr sz="1400">
                           <a:solidFill>
-                            <a:srgbClr val="262626"/>
+                            <a:srgbClr val="222222"/>
                           </a:solidFill>
                         </a:rPr>
                         <a:t>②</a:t>
@@ -7748,7 +8894,7 @@
                       <a:r>
                         <a:rPr sz="1400">
                           <a:solidFill>
-                            <a:srgbClr val="262626"/>
+                            <a:srgbClr val="222222"/>
                           </a:solidFill>
                         </a:rPr>
                         <a:t>金額が妥当か（想定100〜200万円）</a:t>
@@ -7771,7 +8917,7 @@
                       <a:r>
                         <a:rPr sz="1400">
                           <a:solidFill>
-                            <a:srgbClr val="262626"/>
+                            <a:srgbClr val="222222"/>
                           </a:solidFill>
                         </a:rPr>
                         <a:t>③</a:t>
@@ -7780,7 +8926,7 @@
                   </a:txBody>
                   <a:tcPr>
                     <a:solidFill>
-                      <a:srgbClr val="F2F2F2"/>
+                      <a:srgbClr val="F4F7FB"/>
                     </a:solidFill>
                   </a:tcPr>
                 </a:tc>
@@ -7792,7 +8938,7 @@
                       <a:r>
                         <a:rPr sz="1400">
                           <a:solidFill>
-                            <a:srgbClr val="262626"/>
+                            <a:srgbClr val="222222"/>
                           </a:solidFill>
                         </a:rPr>
                         <a:t>短期計画・省エネ改修のコンサル提案が可能か</a:t>
@@ -7801,7 +8947,7 @@
                   </a:txBody>
                   <a:tcPr>
                     <a:solidFill>
-                      <a:srgbClr val="F2F2F2"/>
+                      <a:srgbClr val="F4F7FB"/>
                     </a:solidFill>
                   </a:tcPr>
                 </a:tc>
@@ -7812,20 +8958,20 @@
       </p:graphicFrame>
       <p:sp>
         <p:nvSpPr>
-          <p:cNvPr id="22" name="Rectangle 21"/>
+          <p:cNvPr id="18" name="Rectangle 17"/>
           <p:cNvSpPr/>
           <p:nvPr/>
         </p:nvSpPr>
         <p:spPr>
           <a:xfrm>
-            <a:off x="6126480" y="3566160"/>
-            <a:ext cx="5669280" cy="402336"/>
+            <a:off x="457200" y="5760720"/>
+            <a:ext cx="6647688" cy="25400"/>
           </a:xfrm>
           <a:prstGeom prst="rect">
             <a:avLst/>
           </a:prstGeom>
           <a:solidFill>
-            <a:srgbClr val="FFF0CC"/>
+            <a:srgbClr val="4A7CB4"/>
           </a:solidFill>
           <a:ln>
             <a:noFill/>
@@ -7855,14 +9001,14 @@
       </p:sp>
       <p:sp>
         <p:nvSpPr>
-          <p:cNvPr id="23" name="TextBox 22"/>
+          <p:cNvPr id="19" name="TextBox 18"/>
           <p:cNvSpPr txBox="1"/>
           <p:nvPr/>
         </p:nvSpPr>
         <p:spPr>
           <a:xfrm>
-            <a:off x="6263640" y="3593592"/>
-            <a:ext cx="5486400" cy="347472"/>
+            <a:off x="457200" y="5811520"/>
+            <a:ext cx="6647688" cy="411480"/>
           </a:xfrm>
           <a:prstGeom prst="rect">
             <a:avLst/>
@@ -7877,26 +9023,26 @@
           <a:p>
             <a:pPr algn="l"/>
             <a:r>
-              <a:rPr sz="1400" b="1">
+              <a:rPr sz="1700" b="1" i="0">
                 <a:solidFill>
-                  <a:srgbClr val="804000"/>
+                  <a:srgbClr val="4A7CB4"/>
                 </a:solidFill>
               </a:rPr>
-              <a:t>【議題】見積事業者選定プロセスの追加について</a:t>
-            </a:r>
-          </a:p>
-        </p:txBody>
-      </p:sp>
-      <p:sp>
-        <p:nvSpPr>
-          <p:cNvPr id="24" name="TextBox 23"/>
+              <a:t>依頼内容</a:t>
+            </a:r>
+          </a:p>
+        </p:txBody>
+      </p:sp>
+      <p:sp>
+        <p:nvSpPr>
+          <p:cNvPr id="20" name="TextBox 19"/>
           <p:cNvSpPr txBox="1"/>
           <p:nvPr/>
         </p:nvSpPr>
         <p:spPr>
           <a:xfrm>
-            <a:off x="6263640" y="4069080"/>
-            <a:ext cx="5394960" cy="685800"/>
+            <a:off x="548640" y="6309360"/>
+            <a:ext cx="6492240" cy="502920"/>
           </a:xfrm>
           <a:prstGeom prst="rect">
             <a:avLst/>
@@ -7911,27 +9057,26 @@
           <a:p>
             <a:pPr algn="l"/>
             <a:r>
-              <a:rPr sz="1400" b="0">
+              <a:rPr sz="1400" b="0" i="0">
                 <a:solidFill>
-                  <a:srgbClr val="262626"/>
+                  <a:srgbClr val="222222"/>
                 </a:solidFill>
               </a:rPr>
-              <a:t>● 管理会社任せにせず、委員会として選定基準・
-　 比較評価プロセスを持つことで透明性が高まる</a:t>
-            </a:r>
-          </a:p>
-        </p:txBody>
-      </p:sp>
-      <p:sp>
-        <p:nvSpPr>
-          <p:cNvPr id="25" name="TextBox 24"/>
+              <a:t>● 劣化診断調査（第3回大規模修繕に向けた建物調査）</a:t>
+            </a:r>
+          </a:p>
+        </p:txBody>
+      </p:sp>
+      <p:sp>
+        <p:nvSpPr>
+          <p:cNvPr id="21" name="TextBox 20"/>
           <p:cNvSpPr txBox="1"/>
           <p:nvPr/>
         </p:nvSpPr>
         <p:spPr>
           <a:xfrm>
-            <a:off x="6263640" y="4754880"/>
-            <a:ext cx="5394960" cy="685800"/>
+            <a:off x="548640" y="6766560"/>
+            <a:ext cx="6492240" cy="502920"/>
           </a:xfrm>
           <a:prstGeom prst="rect">
             <a:avLst/>
@@ -7946,27 +9091,26 @@
           <a:p>
             <a:pPr algn="l"/>
             <a:r>
-              <a:rPr sz="1400" b="0">
+              <a:rPr sz="1400" b="0" i="0">
                 <a:solidFill>
-                  <a:srgbClr val="262626"/>
+                  <a:srgbClr val="222222"/>
                 </a:solidFill>
               </a:rPr>
-              <a:t>● 一方、現時点では計画策定が優先。
-　 コンサル選定後に整備する選択肢もある</a:t>
-            </a:r>
-          </a:p>
-        </p:txBody>
-      </p:sp>
-      <p:sp>
-        <p:nvSpPr>
-          <p:cNvPr id="26" name="TextBox 25"/>
+              <a:t>● 30年中長期修繕計画の作成・修繕積立金の評価</a:t>
+            </a:r>
+          </a:p>
+        </p:txBody>
+      </p:sp>
+      <p:sp>
+        <p:nvSpPr>
+          <p:cNvPr id="22" name="TextBox 21"/>
           <p:cNvSpPr txBox="1"/>
           <p:nvPr/>
         </p:nvSpPr>
         <p:spPr>
           <a:xfrm>
-            <a:off x="6263640" y="5440680"/>
-            <a:ext cx="5394960" cy="685800"/>
+            <a:off x="548640" y="7223760"/>
+            <a:ext cx="6492240" cy="502920"/>
           </a:xfrm>
           <a:prstGeom prst="rect">
             <a:avLst/>
@@ -7981,53 +9125,71 @@
           <a:p>
             <a:pPr algn="l"/>
             <a:r>
-              <a:rPr sz="1400" b="0">
+              <a:rPr sz="1400" b="0" i="0">
                 <a:solidFill>
-                  <a:srgbClr val="262626"/>
+                  <a:srgbClr val="222222"/>
                 </a:solidFill>
               </a:rPr>
-              <a:t>● 論点：今の段階で検討するか、後回しにするか</a:t>
-            </a:r>
-          </a:p>
-        </p:txBody>
-      </p:sp>
-    </p:spTree>
-  </p:cSld>
-  <p:clrMapOvr>
-    <a:masterClrMapping/>
-  </p:clrMapOvr>
-</p:sld>
-</file>
-
-<file path=ppt/slides/slide6.xml><?xml version="1.0" encoding="utf-8"?>
-<p:sld xmlns:a="http://schemas.openxmlformats.org/drawingml/2006/main" xmlns:p="http://schemas.openxmlformats.org/presentationml/2006/main" xmlns:r="http://schemas.openxmlformats.org/officeDocument/2006/relationships">
-  <p:cSld>
-    <p:spTree>
-      <p:nvGrpSpPr>
-        <p:cNvPr id="1" name=""/>
-        <p:cNvGrpSpPr/>
-        <p:nvPr/>
-      </p:nvGrpSpPr>
-      <p:grpSpPr/>
-      <p:sp>
-        <p:nvSpPr>
-          <p:cNvPr id="2" name="Rectangle 1"/>
+              <a:t>● 短期修繕計画（5年）の立案（追加依頼）</a:t>
+            </a:r>
+          </a:p>
+        </p:txBody>
+      </p:sp>
+      <p:sp>
+        <p:nvSpPr>
+          <p:cNvPr id="23" name="TextBox 22"/>
+          <p:cNvSpPr txBox="1"/>
+          <p:nvPr/>
+        </p:nvSpPr>
+        <p:spPr>
+          <a:xfrm>
+            <a:off x="548640" y="7680960"/>
+            <a:ext cx="6492240" cy="502920"/>
+          </a:xfrm>
+          <a:prstGeom prst="rect">
+            <a:avLst/>
+          </a:prstGeom>
+          <a:noFill/>
+        </p:spPr>
+        <p:txBody>
+          <a:bodyPr wrap="square">
+            <a:spAutoFit/>
+          </a:bodyPr>
+          <a:lstStyle/>
+          <a:p>
+            <a:pPr algn="l"/>
+            <a:r>
+              <a:rPr sz="1400" b="0" i="0">
+                <a:solidFill>
+                  <a:srgbClr val="222222"/>
+                </a:solidFill>
+              </a:rPr>
+              <a:t>● 省エネ改修提案（追加依頼）</a:t>
+            </a:r>
+          </a:p>
+        </p:txBody>
+      </p:sp>
+      <p:sp>
+        <p:nvSpPr>
+          <p:cNvPr id="24" name="Rectangle 23"/>
           <p:cNvSpPr/>
           <p:nvPr/>
         </p:nvSpPr>
         <p:spPr>
           <a:xfrm>
-            <a:off x="0" y="0"/>
-            <a:ext cx="12188952" cy="960120"/>
+            <a:off x="457200" y="8321040"/>
+            <a:ext cx="6647688" cy="1417320"/>
           </a:xfrm>
           <a:prstGeom prst="rect">
             <a:avLst/>
           </a:prstGeom>
           <a:solidFill>
-            <a:srgbClr val="1F3564"/>
+            <a:srgbClr val="FFF3DC"/>
           </a:solidFill>
-          <a:ln>
-            <a:noFill/>
+          <a:ln w="9525">
+            <a:solidFill>
+              <a:srgbClr val="E0A030"/>
+            </a:solidFill>
           </a:ln>
         </p:spPr>
         <p:style>
@@ -8054,14 +9216,14 @@
       </p:sp>
       <p:sp>
         <p:nvSpPr>
-          <p:cNvPr id="3" name="TextBox 2"/>
+          <p:cNvPr id="25" name="TextBox 24"/>
           <p:cNvSpPr txBox="1"/>
           <p:nvPr/>
         </p:nvSpPr>
         <p:spPr>
           <a:xfrm>
-            <a:off x="365760" y="137160"/>
-            <a:ext cx="10972800" cy="685800"/>
+            <a:off x="566928" y="8375904"/>
+            <a:ext cx="6483096" cy="1325880"/>
           </a:xfrm>
           <a:prstGeom prst="rect">
             <a:avLst/>
@@ -8076,531 +9238,15 @@
           <a:p>
             <a:pPr algn="l"/>
             <a:r>
-              <a:rPr sz="2400" b="1">
+              <a:rPr sz="1300" b="0" i="0">
                 <a:solidFill>
-                  <a:srgbClr val="FFFFFF"/>
+                  <a:srgbClr val="6B4000"/>
                 </a:solidFill>
               </a:rPr>
-              <a:t>新テーマ：省エネ改修・緊急修繕の来年総会提案</a:t>
-            </a:r>
-          </a:p>
-        </p:txBody>
-      </p:sp>
-      <p:sp>
-        <p:nvSpPr>
-          <p:cNvPr id="4" name="TextBox 3"/>
-          <p:cNvSpPr txBox="1"/>
-          <p:nvPr/>
-        </p:nvSpPr>
-        <p:spPr>
-          <a:xfrm>
-            <a:off x="365760" y="6492240"/>
-            <a:ext cx="9144000" cy="274320"/>
-          </a:xfrm>
-          <a:prstGeom prst="rect">
-            <a:avLst/>
-          </a:prstGeom>
-          <a:noFill/>
-        </p:spPr>
-        <p:txBody>
-          <a:bodyPr wrap="square">
-            <a:spAutoFit/>
-          </a:bodyPr>
-          <a:lstStyle/>
-          <a:p>
-            <a:pPr algn="l"/>
-            <a:r>
-              <a:rPr sz="1000" b="0">
-                <a:solidFill>
-                  <a:srgbClr val="808080"/>
-                </a:solidFill>
-              </a:rPr>
-              <a:t>コンフォール井の頭公園南 修繕委員会 第1回定例　2026.6.7</a:t>
-            </a:r>
-          </a:p>
-        </p:txBody>
-      </p:sp>
-      <p:sp>
-        <p:nvSpPr>
-          <p:cNvPr id="5" name="TextBox 4"/>
-          <p:cNvSpPr txBox="1"/>
-          <p:nvPr/>
-        </p:nvSpPr>
-        <p:spPr>
-          <a:xfrm>
-            <a:off x="11430000" y="6492240"/>
-            <a:ext cx="640080" cy="274320"/>
-          </a:xfrm>
-          <a:prstGeom prst="rect">
-            <a:avLst/>
-          </a:prstGeom>
-          <a:noFill/>
-        </p:spPr>
-        <p:txBody>
-          <a:bodyPr wrap="square">
-            <a:spAutoFit/>
-          </a:bodyPr>
-          <a:lstStyle/>
-          <a:p>
-            <a:pPr algn="r"/>
-            <a:r>
-              <a:rPr sz="1000" b="0">
-                <a:solidFill>
-                  <a:srgbClr val="808080"/>
-                </a:solidFill>
-              </a:rPr>
-              <a:t>6 / 7</a:t>
-            </a:r>
-          </a:p>
-        </p:txBody>
-      </p:sp>
-      <p:sp>
-        <p:nvSpPr>
-          <p:cNvPr id="6" name="Rectangle 5"/>
-          <p:cNvSpPr/>
-          <p:nvPr/>
-        </p:nvSpPr>
-        <p:spPr>
-          <a:xfrm>
-            <a:off x="365760" y="1024128"/>
-            <a:ext cx="11430000" cy="438912"/>
-          </a:xfrm>
-          <a:prstGeom prst="rect">
-            <a:avLst/>
-          </a:prstGeom>
-          <a:solidFill>
-            <a:srgbClr val="D6E4F0"/>
-          </a:solidFill>
-          <a:ln>
-            <a:noFill/>
-          </a:ln>
-        </p:spPr>
-        <p:style>
-          <a:lnRef idx="1">
-            <a:schemeClr val="accent1"/>
-          </a:lnRef>
-          <a:fillRef idx="3">
-            <a:schemeClr val="accent1"/>
-          </a:fillRef>
-          <a:effectRef idx="2">
-            <a:schemeClr val="accent1"/>
-          </a:effectRef>
-          <a:fontRef idx="minor">
-            <a:schemeClr val="lt1"/>
-          </a:fontRef>
-        </p:style>
-        <p:txBody>
-          <a:bodyPr rtlCol="0" anchor="ctr"/>
-          <a:lstStyle/>
-          <a:p>
-            <a:pPr algn="ctr"/>
-          </a:p>
-        </p:txBody>
-      </p:sp>
-      <p:sp>
-        <p:nvSpPr>
-          <p:cNvPr id="7" name="TextBox 6"/>
-          <p:cNvSpPr txBox="1"/>
-          <p:nvPr/>
-        </p:nvSpPr>
-        <p:spPr>
-          <a:xfrm>
-            <a:off x="502920" y="1042415"/>
-            <a:ext cx="11155680" cy="384048"/>
-          </a:xfrm>
-          <a:prstGeom prst="rect">
-            <a:avLst/>
-          </a:prstGeom>
-          <a:noFill/>
-        </p:spPr>
-        <p:txBody>
-          <a:bodyPr wrap="square">
-            <a:spAutoFit/>
-          </a:bodyPr>
-          <a:lstStyle/>
-          <a:p>
-            <a:pPr algn="l"/>
-            <a:r>
-              <a:rPr sz="1400" b="0">
-                <a:solidFill>
-                  <a:srgbClr val="1F3564"/>
-                </a:solidFill>
-              </a:rPr>
-              <a:t>長期計画策定と並行し、省エネ改修・緊急修繕は早期に独立した検討ラインで動く。各提案は修繕積立金への影響を確認しながら進める。</a:t>
-            </a:r>
-          </a:p>
-        </p:txBody>
-      </p:sp>
-      <p:graphicFrame>
-        <p:nvGraphicFramePr>
-          <p:cNvPr id="8" name="Table 7"/>
-          <p:cNvGraphicFramePr>
-            <a:graphicFrameLocks noGrp="1"/>
-          </p:cNvGraphicFramePr>
-          <p:nvPr/>
-        </p:nvGraphicFramePr>
-        <p:xfrm>
-          <a:off x="365760" y="1572768"/>
-          <a:ext cx="11430000" cy="2651760"/>
-        </p:xfrm>
-        <a:graphic>
-          <a:graphicData uri="http://schemas.openxmlformats.org/drawingml/2006/table">
-            <a:tbl>
-              <a:tblPr firstRow="1" bandRow="1">
-                <a:tableStyleId>{5C22544A-7EE6-4342-B048-85BDC9FD1C3A}</a:tableStyleId>
-              </a:tblPr>
-              <a:tblGrid>
-                <a:gridCol w="1645920"/>
-                <a:gridCol w="7772400"/>
-                <a:gridCol w="2011680"/>
-              </a:tblGrid>
-              <a:tr h="883920">
-                <a:tc>
-                  <a:txBody>
-                    <a:bodyPr/>
-                    <a:lstStyle/>
-                    <a:p>
-                      <a:pPr algn="ctr"/>
-                      <a:r>
-                        <a:rPr sz="1500" b="1">
-                          <a:solidFill>
-                            <a:srgbClr val="FFFFFF"/>
-                          </a:solidFill>
-                        </a:rPr>
-                        <a:t>テーマ</a:t>
-                      </a:r>
-                    </a:p>
-                  </a:txBody>
-                  <a:tcPr>
-                    <a:solidFill>
-                      <a:srgbClr val="2E75B6"/>
-                    </a:solidFill>
-                  </a:tcPr>
-                </a:tc>
-                <a:tc>
-                  <a:txBody>
-                    <a:bodyPr/>
-                    <a:lstStyle/>
-                    <a:p>
-                      <a:pPr algn="ctr"/>
-                      <a:r>
-                        <a:rPr sz="1500" b="1">
-                          <a:solidFill>
-                            <a:srgbClr val="FFFFFF"/>
-                          </a:solidFill>
-                        </a:rPr>
-                        <a:t>内容</a:t>
-                      </a:r>
-                    </a:p>
-                  </a:txBody>
-                  <a:tcPr>
-                    <a:solidFill>
-                      <a:srgbClr val="2E75B6"/>
-                    </a:solidFill>
-                  </a:tcPr>
-                </a:tc>
-                <a:tc>
-                  <a:txBody>
-                    <a:bodyPr/>
-                    <a:lstStyle/>
-                    <a:p>
-                      <a:pPr algn="ctr"/>
-                      <a:r>
-                        <a:rPr sz="1500" b="1">
-                          <a:solidFill>
-                            <a:srgbClr val="FFFFFF"/>
-                          </a:solidFill>
-                        </a:rPr>
-                        <a:t>目標</a:t>
-                      </a:r>
-                    </a:p>
-                  </a:txBody>
-                  <a:tcPr>
-                    <a:solidFill>
-                      <a:srgbClr val="2E75B6"/>
-                    </a:solidFill>
-                  </a:tcPr>
-                </a:tc>
-              </a:tr>
-              <a:tr h="883920">
-                <a:tc>
-                  <a:txBody>
-                    <a:bodyPr/>
-                    <a:lstStyle/>
-                    <a:p>
-                      <a:r>
-                        <a:rPr sz="1400">
-                          <a:solidFill>
-                            <a:srgbClr val="262626"/>
-                          </a:solidFill>
-                        </a:rPr>
-                        <a:t>省エネ改修</a:t>
-                      </a:r>
-                    </a:p>
-                  </a:txBody>
-                  <a:tcPr>
-                    <a:solidFill>
-                      <a:srgbClr val="F2F2F2"/>
-                    </a:solidFill>
-                  </a:tcPr>
-                </a:tc>
-                <a:tc>
-                  <a:txBody>
-                    <a:bodyPr/>
-                    <a:lstStyle/>
-                    <a:p>
-                      <a:r>
-                        <a:rPr sz="1400">
-                          <a:solidFill>
-                            <a:srgbClr val="262626"/>
-                          </a:solidFill>
-                        </a:rPr>
-                        <a:t>断熱窓改修を優先検討（専有部対象）
-補助金・助成金（都・市・国）の活用可能性を調査
-コンサルにも提案を依頼</a:t>
-                      </a:r>
-                    </a:p>
-                  </a:txBody>
-                  <a:tcPr>
-                    <a:solidFill>
-                      <a:srgbClr val="F2F2F2"/>
-                    </a:solidFill>
-                  </a:tcPr>
-                </a:tc>
-                <a:tc>
-                  <a:txBody>
-                    <a:bodyPr/>
-                    <a:lstStyle/>
-                    <a:p>
-                      <a:r>
-                        <a:rPr sz="1400">
-                          <a:solidFill>
-                            <a:srgbClr val="262626"/>
-                          </a:solidFill>
-                        </a:rPr>
-                        <a:t>2027年総会への提案</a:t>
-                      </a:r>
-                    </a:p>
-                  </a:txBody>
-                  <a:tcPr>
-                    <a:solidFill>
-                      <a:srgbClr val="F2F2F2"/>
-                    </a:solidFill>
-                  </a:tcPr>
-                </a:tc>
-              </a:tr>
-              <a:tr h="883920">
-                <a:tc>
-                  <a:txBody>
-                    <a:bodyPr/>
-                    <a:lstStyle/>
-                    <a:p>
-                      <a:r>
-                        <a:rPr sz="1400">
-                          <a:solidFill>
-                            <a:srgbClr val="262626"/>
-                          </a:solidFill>
-                        </a:rPr>
-                        <a:t>緊急修繕</a:t>
-                      </a:r>
-                    </a:p>
-                  </a:txBody>
-                  <a:tcPr>
-                    <a:solidFill>
-                      <a:srgbClr val="FFFFFF"/>
-                    </a:solidFill>
-                  </a:tcPr>
-                </a:tc>
-                <a:tc>
-                  <a:txBody>
-                    <a:bodyPr/>
-                    <a:lstStyle/>
-                    <a:p>
-                      <a:r>
-                        <a:rPr sz="1400">
-                          <a:solidFill>
-                            <a:srgbClr val="262626"/>
-                          </a:solidFill>
-                        </a:rPr>
-                        <a:t>インフラ系（給排水管・電気設備等）の現状把握を優先
-コンサル調査と並行して早期実態把握
-緊急度が高いものは総会を待たず理事会決議で対応</a:t>
-                      </a:r>
-                    </a:p>
-                  </a:txBody>
-                  <a:tcPr>
-                    <a:solidFill>
-                      <a:srgbClr val="FFFFFF"/>
-                    </a:solidFill>
-                  </a:tcPr>
-                </a:tc>
-                <a:tc>
-                  <a:txBody>
-                    <a:bodyPr/>
-                    <a:lstStyle/>
-                    <a:p>
-                      <a:r>
-                        <a:rPr sz="1400">
-                          <a:solidFill>
-                            <a:srgbClr val="262626"/>
-                          </a:solidFill>
-                        </a:rPr>
-                        <a:t>随時・理事会判断</a:t>
-                      </a:r>
-                    </a:p>
-                  </a:txBody>
-                  <a:tcPr>
-                    <a:solidFill>
-                      <a:srgbClr val="FFFFFF"/>
-                    </a:solidFill>
-                  </a:tcPr>
-                </a:tc>
-              </a:tr>
-            </a:tbl>
-          </a:graphicData>
-        </a:graphic>
-      </p:graphicFrame>
-      <p:sp>
-        <p:nvSpPr>
-          <p:cNvPr id="9" name="Rectangle 8"/>
-          <p:cNvSpPr/>
-          <p:nvPr/>
-        </p:nvSpPr>
-        <p:spPr>
-          <a:xfrm>
-            <a:off x="365760" y="4407408"/>
-            <a:ext cx="11430000" cy="402336"/>
-          </a:xfrm>
-          <a:prstGeom prst="rect">
-            <a:avLst/>
-          </a:prstGeom>
-          <a:solidFill>
-            <a:srgbClr val="1F3564"/>
-          </a:solidFill>
-          <a:ln>
-            <a:noFill/>
-          </a:ln>
-        </p:spPr>
-        <p:style>
-          <a:lnRef idx="1">
-            <a:schemeClr val="accent1"/>
-          </a:lnRef>
-          <a:fillRef idx="3">
-            <a:schemeClr val="accent1"/>
-          </a:fillRef>
-          <a:effectRef idx="2">
-            <a:schemeClr val="accent1"/>
-          </a:effectRef>
-          <a:fontRef idx="minor">
-            <a:schemeClr val="lt1"/>
-          </a:fontRef>
-        </p:style>
-        <p:txBody>
-          <a:bodyPr rtlCol="0" anchor="ctr"/>
-          <a:lstStyle/>
-          <a:p>
-            <a:pPr algn="ctr"/>
-          </a:p>
-        </p:txBody>
-      </p:sp>
-      <p:sp>
-        <p:nvSpPr>
-          <p:cNvPr id="10" name="TextBox 9"/>
-          <p:cNvSpPr txBox="1"/>
-          <p:nvPr/>
-        </p:nvSpPr>
-        <p:spPr>
-          <a:xfrm>
-            <a:off x="502920" y="4434840"/>
-            <a:ext cx="11155680" cy="347472"/>
-          </a:xfrm>
-          <a:prstGeom prst="rect">
-            <a:avLst/>
-          </a:prstGeom>
-          <a:noFill/>
-        </p:spPr>
-        <p:txBody>
-          <a:bodyPr wrap="square">
-            <a:spAutoFit/>
-          </a:bodyPr>
-          <a:lstStyle/>
-          <a:p>
-            <a:pPr algn="l"/>
-            <a:r>
-              <a:rPr sz="1500" b="1">
-                <a:solidFill>
-                  <a:srgbClr val="FFFFFF"/>
-                </a:solidFill>
-              </a:rPr>
-              <a:t>修繕積立金との整合性確認（積立金評価担当が設置された場合）</a:t>
-            </a:r>
-          </a:p>
-        </p:txBody>
-      </p:sp>
-      <p:sp>
-        <p:nvSpPr>
-          <p:cNvPr id="11" name="TextBox 10"/>
-          <p:cNvSpPr txBox="1"/>
-          <p:nvPr/>
-        </p:nvSpPr>
-        <p:spPr>
-          <a:xfrm>
-            <a:off x="548640" y="4937760"/>
-            <a:ext cx="11155680" cy="475488"/>
-          </a:xfrm>
-          <a:prstGeom prst="rect">
-            <a:avLst/>
-          </a:prstGeom>
-          <a:noFill/>
-        </p:spPr>
-        <p:txBody>
-          <a:bodyPr wrap="square">
-            <a:spAutoFit/>
-          </a:bodyPr>
-          <a:lstStyle/>
-          <a:p>
-            <a:pPr algn="l"/>
-            <a:r>
-              <a:rPr sz="1500" b="0">
-                <a:solidFill>
-                  <a:srgbClr val="262626"/>
-                </a:solidFill>
-              </a:rPr>
-              <a:t>● 省エネ改修：費用・補助金差引後の実質負担と積立金残高を照合</a:t>
-            </a:r>
-          </a:p>
-        </p:txBody>
-      </p:sp>
-      <p:sp>
-        <p:nvSpPr>
-          <p:cNvPr id="12" name="TextBox 11"/>
-          <p:cNvSpPr txBox="1"/>
-          <p:nvPr/>
-        </p:nvSpPr>
-        <p:spPr>
-          <a:xfrm>
-            <a:off x="548640" y="5440680"/>
-            <a:ext cx="11155680" cy="475488"/>
-          </a:xfrm>
-          <a:prstGeom prst="rect">
-            <a:avLst/>
-          </a:prstGeom>
-          <a:noFill/>
-        </p:spPr>
-        <p:txBody>
-          <a:bodyPr wrap="square">
-            <a:spAutoFit/>
-          </a:bodyPr>
-          <a:lstStyle/>
-          <a:p>
-            <a:pPr algn="l"/>
-            <a:r>
-              <a:rPr sz="1500" b="0">
-                <a:solidFill>
-                  <a:srgbClr val="262626"/>
-                </a:solidFill>
-              </a:rPr>
-              <a:t>● 緊急修繕：修繕費用の積立金への影響を試算・確認し、緊急度判断の材料とする</a:t>
+              <a:t>【議題】見積事業者選定プロセスの追加について
+● 管理会社任せにせず、委員会として選定基準・比較評価プロセスを持つことで透明性が高まる
+● 一方、現時点では計画策定が優先。コンサル選定後に整備する選択肢もある
+● 論点：今の段階で仕組みを検討するか、後回しにするか</a:t>
             </a:r>
           </a:p>
         </p:txBody>
@@ -8632,13 +9278,13 @@
         <p:spPr>
           <a:xfrm>
             <a:off x="0" y="0"/>
-            <a:ext cx="12188952" cy="960120"/>
+            <a:ext cx="7562088" cy="164592"/>
           </a:xfrm>
           <a:prstGeom prst="rect">
             <a:avLst/>
           </a:prstGeom>
           <a:solidFill>
-            <a:srgbClr val="1F3564"/>
+            <a:srgbClr val="4A7CB4"/>
           </a:solidFill>
           <a:ln>
             <a:noFill/>
@@ -8674,8 +9320,8 @@
         </p:nvSpPr>
         <p:spPr>
           <a:xfrm>
-            <a:off x="365760" y="137160"/>
-            <a:ext cx="10972800" cy="685800"/>
+            <a:off x="457200" y="228600"/>
+            <a:ext cx="6647688" cy="594360"/>
           </a:xfrm>
           <a:prstGeom prst="rect">
             <a:avLst/>
@@ -8690,9 +9336,9 @@
           <a:p>
             <a:pPr algn="l"/>
             <a:r>
-              <a:rPr sz="2400" b="1">
+              <a:rPr sz="2200" b="1" i="0">
                 <a:solidFill>
-                  <a:srgbClr val="FFFFFF"/>
+                  <a:srgbClr val="222222"/>
                 </a:solidFill>
               </a:rPr>
               <a:t>運営ルール・本日の決定事項・次回予定</a:t>
@@ -8702,88 +9348,20 @@
       </p:sp>
       <p:sp>
         <p:nvSpPr>
-          <p:cNvPr id="4" name="TextBox 3"/>
-          <p:cNvSpPr txBox="1"/>
-          <p:nvPr/>
-        </p:nvSpPr>
-        <p:spPr>
-          <a:xfrm>
-            <a:off x="365760" y="6492240"/>
-            <a:ext cx="9144000" cy="274320"/>
-          </a:xfrm>
-          <a:prstGeom prst="rect">
-            <a:avLst/>
-          </a:prstGeom>
-          <a:noFill/>
-        </p:spPr>
-        <p:txBody>
-          <a:bodyPr wrap="square">
-            <a:spAutoFit/>
-          </a:bodyPr>
-          <a:lstStyle/>
-          <a:p>
-            <a:pPr algn="l"/>
-            <a:r>
-              <a:rPr sz="1000" b="0">
-                <a:solidFill>
-                  <a:srgbClr val="808080"/>
-                </a:solidFill>
-              </a:rPr>
-              <a:t>コンフォール井の頭公園南 修繕委員会 第1回定例　2026.6.7</a:t>
-            </a:r>
-          </a:p>
-        </p:txBody>
-      </p:sp>
-      <p:sp>
-        <p:nvSpPr>
-          <p:cNvPr id="5" name="TextBox 4"/>
-          <p:cNvSpPr txBox="1"/>
-          <p:nvPr/>
-        </p:nvSpPr>
-        <p:spPr>
-          <a:xfrm>
-            <a:off x="11430000" y="6492240"/>
-            <a:ext cx="640080" cy="274320"/>
-          </a:xfrm>
-          <a:prstGeom prst="rect">
-            <a:avLst/>
-          </a:prstGeom>
-          <a:noFill/>
-        </p:spPr>
-        <p:txBody>
-          <a:bodyPr wrap="square">
-            <a:spAutoFit/>
-          </a:bodyPr>
-          <a:lstStyle/>
-          <a:p>
-            <a:pPr algn="r"/>
-            <a:r>
-              <a:rPr sz="1000" b="0">
-                <a:solidFill>
-                  <a:srgbClr val="808080"/>
-                </a:solidFill>
-              </a:rPr>
-              <a:t>7 / 7</a:t>
-            </a:r>
-          </a:p>
-        </p:txBody>
-      </p:sp>
-      <p:sp>
-        <p:nvSpPr>
-          <p:cNvPr id="6" name="Rectangle 5"/>
+          <p:cNvPr id="4" name="Rectangle 3"/>
           <p:cNvSpPr/>
           <p:nvPr/>
         </p:nvSpPr>
         <p:spPr>
           <a:xfrm>
-            <a:off x="365760" y="1024128"/>
-            <a:ext cx="5394960" cy="402336"/>
+            <a:off x="457200" y="822960"/>
+            <a:ext cx="6647688" cy="19050"/>
           </a:xfrm>
           <a:prstGeom prst="rect">
             <a:avLst/>
           </a:prstGeom>
           <a:solidFill>
-            <a:srgbClr val="2E75B6"/>
+            <a:srgbClr val="4A7CB4"/>
           </a:solidFill>
           <a:ln>
             <a:noFill/>
@@ -8813,14 +9391,14 @@
       </p:sp>
       <p:sp>
         <p:nvSpPr>
-          <p:cNvPr id="7" name="TextBox 6"/>
+          <p:cNvPr id="5" name="TextBox 4"/>
           <p:cNvSpPr txBox="1"/>
           <p:nvPr/>
         </p:nvSpPr>
         <p:spPr>
           <a:xfrm>
-            <a:off x="502920" y="1051560"/>
-            <a:ext cx="5212080" cy="347472"/>
+            <a:off x="457200" y="10241280"/>
+            <a:ext cx="5943600" cy="274320"/>
           </a:xfrm>
           <a:prstGeom prst="rect">
             <a:avLst/>
@@ -8835,9 +9413,163 @@
           <a:p>
             <a:pPr algn="l"/>
             <a:r>
-              <a:rPr sz="1600" b="1">
+              <a:rPr sz="1000" b="0" i="0">
                 <a:solidFill>
-                  <a:srgbClr val="FFFFFF"/>
+                  <a:srgbClr val="555555"/>
+                </a:solidFill>
+              </a:rPr>
+              <a:t>コンフォール井の頭公園南 修繕委員会 第1回定例　2026.6.7</a:t>
+            </a:r>
+          </a:p>
+        </p:txBody>
+      </p:sp>
+      <p:sp>
+        <p:nvSpPr>
+          <p:cNvPr id="6" name="TextBox 5"/>
+          <p:cNvSpPr txBox="1"/>
+          <p:nvPr/>
+        </p:nvSpPr>
+        <p:spPr>
+          <a:xfrm>
+            <a:off x="6858000" y="10241280"/>
+            <a:ext cx="548640" cy="274320"/>
+          </a:xfrm>
+          <a:prstGeom prst="rect">
+            <a:avLst/>
+          </a:prstGeom>
+          <a:noFill/>
+        </p:spPr>
+        <p:txBody>
+          <a:bodyPr wrap="square">
+            <a:spAutoFit/>
+          </a:bodyPr>
+          <a:lstStyle/>
+          <a:p>
+            <a:pPr algn="r"/>
+            <a:r>
+              <a:rPr sz="1000" b="0" i="0">
+                <a:solidFill>
+                  <a:srgbClr val="555555"/>
+                </a:solidFill>
+              </a:rPr>
+              <a:t>7 / 7</a:t>
+            </a:r>
+          </a:p>
+        </p:txBody>
+      </p:sp>
+      <p:sp>
+        <p:nvSpPr>
+          <p:cNvPr id="7" name="Rectangle 6"/>
+          <p:cNvSpPr/>
+          <p:nvPr/>
+        </p:nvSpPr>
+        <p:spPr>
+          <a:xfrm>
+            <a:off x="457200" y="10195560"/>
+            <a:ext cx="6647688" cy="12700"/>
+          </a:xfrm>
+          <a:prstGeom prst="rect">
+            <a:avLst/>
+          </a:prstGeom>
+          <a:solidFill>
+            <a:srgbClr val="E4EFF7"/>
+          </a:solidFill>
+          <a:ln>
+            <a:noFill/>
+          </a:ln>
+        </p:spPr>
+        <p:style>
+          <a:lnRef idx="1">
+            <a:schemeClr val="accent1"/>
+          </a:lnRef>
+          <a:fillRef idx="3">
+            <a:schemeClr val="accent1"/>
+          </a:fillRef>
+          <a:effectRef idx="2">
+            <a:schemeClr val="accent1"/>
+          </a:effectRef>
+          <a:fontRef idx="minor">
+            <a:schemeClr val="lt1"/>
+          </a:fontRef>
+        </p:style>
+        <p:txBody>
+          <a:bodyPr rtlCol="0" anchor="ctr"/>
+          <a:lstStyle/>
+          <a:p>
+            <a:pPr algn="ctr"/>
+          </a:p>
+        </p:txBody>
+      </p:sp>
+      <p:sp>
+        <p:nvSpPr>
+          <p:cNvPr id="8" name="Rectangle 7"/>
+          <p:cNvSpPr/>
+          <p:nvPr/>
+        </p:nvSpPr>
+        <p:spPr>
+          <a:xfrm>
+            <a:off x="457200" y="960120"/>
+            <a:ext cx="6647688" cy="25400"/>
+          </a:xfrm>
+          <a:prstGeom prst="rect">
+            <a:avLst/>
+          </a:prstGeom>
+          <a:solidFill>
+            <a:srgbClr val="4A7CB4"/>
+          </a:solidFill>
+          <a:ln>
+            <a:noFill/>
+          </a:ln>
+        </p:spPr>
+        <p:style>
+          <a:lnRef idx="1">
+            <a:schemeClr val="accent1"/>
+          </a:lnRef>
+          <a:fillRef idx="3">
+            <a:schemeClr val="accent1"/>
+          </a:fillRef>
+          <a:effectRef idx="2">
+            <a:schemeClr val="accent1"/>
+          </a:effectRef>
+          <a:fontRef idx="minor">
+            <a:schemeClr val="lt1"/>
+          </a:fontRef>
+        </p:style>
+        <p:txBody>
+          <a:bodyPr rtlCol="0" anchor="ctr"/>
+          <a:lstStyle/>
+          <a:p>
+            <a:pPr algn="ctr"/>
+          </a:p>
+        </p:txBody>
+      </p:sp>
+      <p:sp>
+        <p:nvSpPr>
+          <p:cNvPr id="9" name="TextBox 8"/>
+          <p:cNvSpPr txBox="1"/>
+          <p:nvPr/>
+        </p:nvSpPr>
+        <p:spPr>
+          <a:xfrm>
+            <a:off x="457200" y="1010920"/>
+            <a:ext cx="6647688" cy="411480"/>
+          </a:xfrm>
+          <a:prstGeom prst="rect">
+            <a:avLst/>
+          </a:prstGeom>
+          <a:noFill/>
+        </p:spPr>
+        <p:txBody>
+          <a:bodyPr wrap="square">
+            <a:spAutoFit/>
+          </a:bodyPr>
+          <a:lstStyle/>
+          <a:p>
+            <a:pPr algn="l"/>
+            <a:r>
+              <a:rPr sz="1700" b="1" i="0">
+                <a:solidFill>
+                  <a:srgbClr val="4A7CB4"/>
                 </a:solidFill>
               </a:rPr>
               <a:t>運営ルール</a:t>
@@ -8847,15 +9579,15 @@
       </p:sp>
       <p:graphicFrame>
         <p:nvGraphicFramePr>
-          <p:cNvPr id="8" name="Table 7"/>
+          <p:cNvPr id="10" name="Table 9"/>
           <p:cNvGraphicFramePr>
             <a:graphicFrameLocks noGrp="1"/>
           </p:cNvGraphicFramePr>
           <p:nvPr/>
         </p:nvGraphicFramePr>
         <p:xfrm>
-          <a:off x="365760" y="1499616"/>
-          <a:ext cx="5394960" cy="1920240"/>
+          <a:off x="457200" y="1508760"/>
+          <a:ext cx="6647688" cy="1463040"/>
         </p:xfrm>
         <a:graphic>
           <a:graphicData uri="http://schemas.openxmlformats.org/drawingml/2006/table">
@@ -8864,10 +9596,10 @@
                 <a:tableStyleId>{5C22544A-7EE6-4342-B048-85BDC9FD1C3A}</a:tableStyleId>
               </a:tblPr>
               <a:tblGrid>
-                <a:gridCol w="1920240"/>
-                <a:gridCol w="3474720"/>
+                <a:gridCol w="1828800"/>
+                <a:gridCol w="4818888"/>
               </a:tblGrid>
-              <a:tr h="480060">
+              <a:tr h="365760">
                 <a:tc>
                   <a:txBody>
                     <a:bodyPr/>
@@ -8875,9 +9607,9 @@
                     <a:p>
                       <a:pPr algn="ctr"/>
                       <a:r>
-                        <a:rPr sz="1500" b="1">
+                        <a:rPr sz="1400" b="1">
                           <a:solidFill>
-                            <a:srgbClr val="FFFFFF"/>
+                            <a:srgbClr val="4A7CB4"/>
                           </a:solidFill>
                         </a:rPr>
                         <a:t>項目</a:t>
@@ -8886,7 +9618,7 @@
                   </a:txBody>
                   <a:tcPr>
                     <a:solidFill>
-                      <a:srgbClr val="2E75B6"/>
+                      <a:srgbClr val="E4EFF7"/>
                     </a:solidFill>
                   </a:tcPr>
                 </a:tc>
@@ -8897,9 +9629,9 @@
                     <a:p>
                       <a:pPr algn="ctr"/>
                       <a:r>
-                        <a:rPr sz="1500" b="1">
+                        <a:rPr sz="1400" b="1">
                           <a:solidFill>
-                            <a:srgbClr val="FFFFFF"/>
+                            <a:srgbClr val="4A7CB4"/>
                           </a:solidFill>
                         </a:rPr>
                         <a:t>内容</a:t>
@@ -8908,21 +9640,21 @@
                   </a:txBody>
                   <a:tcPr>
                     <a:solidFill>
-                      <a:srgbClr val="2E75B6"/>
+                      <a:srgbClr val="E4EFF7"/>
                     </a:solidFill>
                   </a:tcPr>
                 </a:tc>
               </a:tr>
-              <a:tr h="480060">
+              <a:tr h="365760">
                 <a:tc>
                   <a:txBody>
                     <a:bodyPr/>
                     <a:lstStyle/>
                     <a:p>
                       <a:r>
-                        <a:rPr sz="1500">
+                        <a:rPr sz="1400">
                           <a:solidFill>
-                            <a:srgbClr val="262626"/>
+                            <a:srgbClr val="222222"/>
                           </a:solidFill>
                         </a:rPr>
                         <a:t>打合せ頻度</a:t>
@@ -8931,7 +9663,7 @@
                   </a:txBody>
                   <a:tcPr>
                     <a:solidFill>
-                      <a:srgbClr val="F2F2F2"/>
+                      <a:srgbClr val="F4F7FB"/>
                     </a:solidFill>
                   </a:tcPr>
                 </a:tc>
@@ -8941,9 +9673,9 @@
                     <a:lstStyle/>
                     <a:p>
                       <a:r>
-                        <a:rPr sz="1500">
+                        <a:rPr sz="1400">
                           <a:solidFill>
-                            <a:srgbClr val="262626"/>
+                            <a:srgbClr val="222222"/>
                           </a:solidFill>
                         </a:rPr>
                         <a:t>月1回程度</a:t>
@@ -8952,21 +9684,21 @@
                   </a:txBody>
                   <a:tcPr>
                     <a:solidFill>
-                      <a:srgbClr val="F2F2F2"/>
+                      <a:srgbClr val="F4F7FB"/>
                     </a:solidFill>
                   </a:tcPr>
                 </a:tc>
               </a:tr>
-              <a:tr h="480060">
+              <a:tr h="365760">
                 <a:tc>
                   <a:txBody>
                     <a:bodyPr/>
                     <a:lstStyle/>
                     <a:p>
                       <a:r>
-                        <a:rPr sz="1500">
+                        <a:rPr sz="1400">
                           <a:solidFill>
-                            <a:srgbClr val="262626"/>
+                            <a:srgbClr val="222222"/>
                           </a:solidFill>
                         </a:rPr>
                         <a:t>コミュニケーション</a:t>
@@ -8985,13 +9717,12 @@
                     <a:lstStyle/>
                     <a:p>
                       <a:r>
-                        <a:rPr sz="1500">
+                        <a:rPr sz="1400">
                           <a:solidFill>
-                            <a:srgbClr val="262626"/>
+                            <a:srgbClr val="222222"/>
                           </a:solidFill>
                         </a:rPr>
-                        <a:t>Google Meet・チャット＋メール
-必要に応じ書面・対面</a:t>
+                        <a:t>Google Meet・チャット＋メール、必要に応じ書面・対面</a:t>
                       </a:r>
                     </a:p>
                   </a:txBody>
@@ -9002,16 +9733,16 @@
                   </a:tcPr>
                 </a:tc>
               </a:tr>
-              <a:tr h="480060">
+              <a:tr h="365760">
                 <a:tc>
                   <a:txBody>
                     <a:bodyPr/>
                     <a:lstStyle/>
                     <a:p>
                       <a:r>
-                        <a:rPr sz="1500">
+                        <a:rPr sz="1400">
                           <a:solidFill>
-                            <a:srgbClr val="262626"/>
+                            <a:srgbClr val="222222"/>
                           </a:solidFill>
                         </a:rPr>
                         <a:t>議事録</a:t>
@@ -9020,7 +9751,7 @@
                   </a:txBody>
                   <a:tcPr>
                     <a:solidFill>
-                      <a:srgbClr val="F2F2F2"/>
+                      <a:srgbClr val="F4F7FB"/>
                     </a:solidFill>
                   </a:tcPr>
                 </a:tc>
@@ -9030,9 +9761,9 @@
                     <a:lstStyle/>
                     <a:p>
                       <a:r>
-                        <a:rPr sz="1500">
+                        <a:rPr sz="1400">
                           <a:solidFill>
-                            <a:srgbClr val="262626"/>
+                            <a:srgbClr val="222222"/>
                           </a:solidFill>
                         </a:rPr>
                         <a:t>副委員長（AIツール活用）</a:t>
@@ -9041,7 +9772,7 @@
                   </a:txBody>
                   <a:tcPr>
                     <a:solidFill>
-                      <a:srgbClr val="F2F2F2"/>
+                      <a:srgbClr val="F4F7FB"/>
                     </a:solidFill>
                   </a:tcPr>
                 </a:tc>
@@ -9052,20 +9783,20 @@
       </p:graphicFrame>
       <p:sp>
         <p:nvSpPr>
-          <p:cNvPr id="9" name="Rectangle 8"/>
+          <p:cNvPr id="11" name="Rectangle 10"/>
           <p:cNvSpPr/>
           <p:nvPr/>
         </p:nvSpPr>
         <p:spPr>
           <a:xfrm>
-            <a:off x="6126480" y="1024128"/>
-            <a:ext cx="5669280" cy="402336"/>
+            <a:off x="457200" y="3154680"/>
+            <a:ext cx="6647688" cy="25400"/>
           </a:xfrm>
           <a:prstGeom prst="rect">
             <a:avLst/>
           </a:prstGeom>
           <a:solidFill>
-            <a:srgbClr val="2E75B6"/>
+            <a:srgbClr val="4A7CB4"/>
           </a:solidFill>
           <a:ln>
             <a:noFill/>
@@ -9095,14 +9826,14 @@
       </p:sp>
       <p:sp>
         <p:nvSpPr>
-          <p:cNvPr id="10" name="TextBox 9"/>
+          <p:cNvPr id="12" name="TextBox 11"/>
           <p:cNvSpPr txBox="1"/>
           <p:nvPr/>
         </p:nvSpPr>
         <p:spPr>
           <a:xfrm>
-            <a:off x="6263640" y="1051560"/>
-            <a:ext cx="5486400" cy="347472"/>
+            <a:off x="457200" y="3205480"/>
+            <a:ext cx="6647688" cy="411480"/>
           </a:xfrm>
           <a:prstGeom prst="rect">
             <a:avLst/>
@@ -9117,9 +9848,9 @@
           <a:p>
             <a:pPr algn="l"/>
             <a:r>
-              <a:rPr sz="1600" b="1">
+              <a:rPr sz="1700" b="1" i="0">
                 <a:solidFill>
-                  <a:srgbClr val="FFFFFF"/>
+                  <a:srgbClr val="4A7CB4"/>
                 </a:solidFill>
               </a:rPr>
               <a:t>本日の決定事項</a:t>
@@ -9129,24 +9860,24 @@
       </p:sp>
       <p:sp>
         <p:nvSpPr>
-          <p:cNvPr id="11" name="Rectangle 10"/>
+          <p:cNvPr id="13" name="Rectangle 12"/>
           <p:cNvSpPr/>
           <p:nvPr/>
         </p:nvSpPr>
         <p:spPr>
           <a:xfrm>
-            <a:off x="6126480" y="1499616"/>
-            <a:ext cx="5669280" cy="457200"/>
+            <a:off x="457200" y="3703320"/>
+            <a:ext cx="6647688" cy="457200"/>
           </a:xfrm>
           <a:prstGeom prst="rect">
             <a:avLst/>
           </a:prstGeom>
           <a:solidFill>
-            <a:srgbClr val="F2F2F2"/>
+            <a:srgbClr val="F4F7FB"/>
           </a:solidFill>
-          <a:ln w="9525">
+          <a:ln w="6350">
             <a:solidFill>
-              <a:srgbClr val="D6E4F0"/>
+              <a:srgbClr val="E4EFF7"/>
             </a:solidFill>
           </a:ln>
         </p:spPr>
@@ -9174,14 +9905,14 @@
       </p:sp>
       <p:sp>
         <p:nvSpPr>
-          <p:cNvPr id="12" name="TextBox 11"/>
+          <p:cNvPr id="14" name="TextBox 13"/>
           <p:cNvSpPr txBox="1"/>
           <p:nvPr/>
         </p:nvSpPr>
         <p:spPr>
           <a:xfrm>
-            <a:off x="6291072" y="1554480"/>
-            <a:ext cx="5394960" cy="384048"/>
+            <a:off x="621792" y="3776472"/>
+            <a:ext cx="6400800" cy="347472"/>
           </a:xfrm>
           <a:prstGeom prst="rect">
             <a:avLst/>
@@ -9196,9 +9927,9 @@
           <a:p>
             <a:pPr algn="l"/>
             <a:r>
-              <a:rPr sz="1400" b="0">
+              <a:rPr sz="1400" b="0" i="0">
                 <a:solidFill>
-                  <a:srgbClr val="262626"/>
+                  <a:srgbClr val="222222"/>
                 </a:solidFill>
               </a:rPr>
               <a:t>□　役割分担（委員長・副委員長・その他担当）</a:t>
@@ -9208,14 +9939,14 @@
       </p:sp>
       <p:sp>
         <p:nvSpPr>
-          <p:cNvPr id="13" name="Rectangle 12"/>
+          <p:cNvPr id="15" name="Rectangle 14"/>
           <p:cNvSpPr/>
           <p:nvPr/>
         </p:nvSpPr>
         <p:spPr>
           <a:xfrm>
-            <a:off x="6126480" y="1956816"/>
-            <a:ext cx="5669280" cy="457200"/>
+            <a:off x="457200" y="4160520"/>
+            <a:ext cx="6647688" cy="457200"/>
           </a:xfrm>
           <a:prstGeom prst="rect">
             <a:avLst/>
@@ -9223,9 +9954,9 @@
           <a:solidFill>
             <a:srgbClr val="FFFFFF"/>
           </a:solidFill>
-          <a:ln w="9525">
+          <a:ln w="6350">
             <a:solidFill>
-              <a:srgbClr val="D6E4F0"/>
+              <a:srgbClr val="E4EFF7"/>
             </a:solidFill>
           </a:ln>
         </p:spPr>
@@ -9253,14 +9984,14 @@
       </p:sp>
       <p:sp>
         <p:nvSpPr>
-          <p:cNvPr id="14" name="TextBox 13"/>
+          <p:cNvPr id="16" name="TextBox 15"/>
           <p:cNvSpPr txBox="1"/>
           <p:nvPr/>
         </p:nvSpPr>
         <p:spPr>
           <a:xfrm>
-            <a:off x="6291072" y="2011680"/>
-            <a:ext cx="5394960" cy="384048"/>
+            <a:off x="621792" y="4233672"/>
+            <a:ext cx="6400800" cy="347472"/>
           </a:xfrm>
           <a:prstGeom prst="rect">
             <a:avLst/>
@@ -9275,9 +10006,9 @@
           <a:p>
             <a:pPr algn="l"/>
             <a:r>
-              <a:rPr sz="1400" b="0">
+              <a:rPr sz="1400" b="0" i="0">
                 <a:solidFill>
-                  <a:srgbClr val="262626"/>
+                  <a:srgbClr val="222222"/>
                 </a:solidFill>
               </a:rPr>
               <a:t>□　コンサル3社への連絡・プレゼン日程調整・会場確保の担当</a:t>
@@ -9287,24 +10018,24 @@
       </p:sp>
       <p:sp>
         <p:nvSpPr>
-          <p:cNvPr id="15" name="Rectangle 14"/>
+          <p:cNvPr id="17" name="Rectangle 16"/>
           <p:cNvSpPr/>
           <p:nvPr/>
         </p:nvSpPr>
         <p:spPr>
           <a:xfrm>
-            <a:off x="6126480" y="2414016"/>
-            <a:ext cx="5669280" cy="457200"/>
+            <a:off x="457200" y="4617720"/>
+            <a:ext cx="6647688" cy="457200"/>
           </a:xfrm>
           <a:prstGeom prst="rect">
             <a:avLst/>
           </a:prstGeom>
           <a:solidFill>
-            <a:srgbClr val="F2F2F2"/>
+            <a:srgbClr val="F4F7FB"/>
           </a:solidFill>
-          <a:ln w="9525">
+          <a:ln w="6350">
             <a:solidFill>
-              <a:srgbClr val="D6E4F0"/>
+              <a:srgbClr val="E4EFF7"/>
             </a:solidFill>
           </a:ln>
         </p:spPr>
@@ -9332,14 +10063,14 @@
       </p:sp>
       <p:sp>
         <p:nvSpPr>
-          <p:cNvPr id="16" name="TextBox 15"/>
+          <p:cNvPr id="18" name="TextBox 17"/>
           <p:cNvSpPr txBox="1"/>
           <p:nvPr/>
         </p:nvSpPr>
         <p:spPr>
           <a:xfrm>
-            <a:off x="6291072" y="2468880"/>
-            <a:ext cx="5394960" cy="384048"/>
+            <a:off x="621792" y="4690872"/>
+            <a:ext cx="6400800" cy="347472"/>
           </a:xfrm>
           <a:prstGeom prst="rect">
             <a:avLst/>
@@ -9354,9 +10085,9 @@
           <a:p>
             <a:pPr algn="l"/>
             <a:r>
-              <a:rPr sz="1400" b="0">
+              <a:rPr sz="1400" b="0" i="0">
                 <a:solidFill>
-                  <a:srgbClr val="262626"/>
+                  <a:srgbClr val="222222"/>
                 </a:solidFill>
               </a:rPr>
               <a:t>□　見積事業者選定プロセスを今設けるか後回しにするか</a:t>
@@ -9366,14 +10097,14 @@
       </p:sp>
       <p:sp>
         <p:nvSpPr>
-          <p:cNvPr id="17" name="Rectangle 16"/>
+          <p:cNvPr id="19" name="Rectangle 18"/>
           <p:cNvSpPr/>
           <p:nvPr/>
         </p:nvSpPr>
         <p:spPr>
           <a:xfrm>
-            <a:off x="6126480" y="2871216"/>
-            <a:ext cx="5669280" cy="457200"/>
+            <a:off x="457200" y="5074920"/>
+            <a:ext cx="6647688" cy="457200"/>
           </a:xfrm>
           <a:prstGeom prst="rect">
             <a:avLst/>
@@ -9381,9 +10112,9 @@
           <a:solidFill>
             <a:srgbClr val="FFFFFF"/>
           </a:solidFill>
-          <a:ln w="9525">
+          <a:ln w="6350">
             <a:solidFill>
-              <a:srgbClr val="D6E4F0"/>
+              <a:srgbClr val="E4EFF7"/>
             </a:solidFill>
           </a:ln>
         </p:spPr>
@@ -9411,14 +10142,14 @@
       </p:sp>
       <p:sp>
         <p:nvSpPr>
-          <p:cNvPr id="18" name="TextBox 17"/>
+          <p:cNvPr id="20" name="TextBox 19"/>
           <p:cNvSpPr txBox="1"/>
           <p:nvPr/>
         </p:nvSpPr>
         <p:spPr>
           <a:xfrm>
-            <a:off x="6291072" y="2926080"/>
-            <a:ext cx="5394960" cy="384048"/>
+            <a:off x="621792" y="5148072"/>
+            <a:ext cx="6400800" cy="347472"/>
           </a:xfrm>
           <a:prstGeom prst="rect">
             <a:avLst/>
@@ -9433,9 +10164,9 @@
           <a:p>
             <a:pPr algn="l"/>
             <a:r>
-              <a:rPr sz="1400" b="0">
+              <a:rPr sz="1400" b="0" i="0">
                 <a:solidFill>
-                  <a:srgbClr val="262626"/>
+                  <a:srgbClr val="222222"/>
                 </a:solidFill>
               </a:rPr>
               <a:t>□　省エネ改修・緊急修繕の優先確認事項</a:t>
@@ -9445,24 +10176,24 @@
       </p:sp>
       <p:sp>
         <p:nvSpPr>
-          <p:cNvPr id="19" name="Rectangle 18"/>
+          <p:cNvPr id="21" name="Rectangle 20"/>
           <p:cNvSpPr/>
           <p:nvPr/>
         </p:nvSpPr>
         <p:spPr>
           <a:xfrm>
-            <a:off x="6126480" y="3328416"/>
-            <a:ext cx="5669280" cy="457200"/>
+            <a:off x="457200" y="5532120"/>
+            <a:ext cx="6647688" cy="457200"/>
           </a:xfrm>
           <a:prstGeom prst="rect">
             <a:avLst/>
           </a:prstGeom>
           <a:solidFill>
-            <a:srgbClr val="F2F2F2"/>
+            <a:srgbClr val="F4F7FB"/>
           </a:solidFill>
-          <a:ln w="9525">
+          <a:ln w="6350">
             <a:solidFill>
-              <a:srgbClr val="D6E4F0"/>
+              <a:srgbClr val="E4EFF7"/>
             </a:solidFill>
           </a:ln>
         </p:spPr>
@@ -9490,14 +10221,14 @@
       </p:sp>
       <p:sp>
         <p:nvSpPr>
-          <p:cNvPr id="20" name="TextBox 19"/>
+          <p:cNvPr id="22" name="TextBox 21"/>
           <p:cNvSpPr txBox="1"/>
           <p:nvPr/>
         </p:nvSpPr>
         <p:spPr>
           <a:xfrm>
-            <a:off x="6291072" y="3383280"/>
-            <a:ext cx="5394960" cy="384048"/>
+            <a:off x="621792" y="5605272"/>
+            <a:ext cx="6400800" cy="347472"/>
           </a:xfrm>
           <a:prstGeom prst="rect">
             <a:avLst/>
@@ -9512,9 +10243,9 @@
           <a:p>
             <a:pPr algn="l"/>
             <a:r>
-              <a:rPr sz="1400" b="0">
+              <a:rPr sz="1400" b="0" i="0">
                 <a:solidFill>
-                  <a:srgbClr val="262626"/>
+                  <a:srgbClr val="222222"/>
                 </a:solidFill>
               </a:rPr>
               <a:t>□　次回開催日程</a:t>
@@ -9524,20 +10255,20 @@
       </p:sp>
       <p:sp>
         <p:nvSpPr>
-          <p:cNvPr id="21" name="Rectangle 20"/>
+          <p:cNvPr id="23" name="Rectangle 22"/>
           <p:cNvSpPr/>
           <p:nvPr/>
         </p:nvSpPr>
         <p:spPr>
           <a:xfrm>
-            <a:off x="365760" y="3611880"/>
-            <a:ext cx="11430000" cy="420624"/>
+            <a:off x="457200" y="6172200"/>
+            <a:ext cx="6647688" cy="25400"/>
           </a:xfrm>
           <a:prstGeom prst="rect">
             <a:avLst/>
           </a:prstGeom>
           <a:solidFill>
-            <a:srgbClr val="1F3564"/>
+            <a:srgbClr val="4A7CB4"/>
           </a:solidFill>
           <a:ln>
             <a:noFill/>
@@ -9567,14 +10298,14 @@
       </p:sp>
       <p:sp>
         <p:nvSpPr>
-          <p:cNvPr id="22" name="TextBox 21"/>
+          <p:cNvPr id="24" name="TextBox 23"/>
           <p:cNvSpPr txBox="1"/>
           <p:nvPr/>
         </p:nvSpPr>
         <p:spPr>
           <a:xfrm>
-            <a:off x="502920" y="3639312"/>
-            <a:ext cx="11155680" cy="365760"/>
+            <a:off x="457200" y="6223000"/>
+            <a:ext cx="6647688" cy="411480"/>
           </a:xfrm>
           <a:prstGeom prst="rect">
             <a:avLst/>
@@ -9589,26 +10320,26 @@
           <a:p>
             <a:pPr algn="l"/>
             <a:r>
-              <a:rPr sz="1600" b="1">
+              <a:rPr sz="1700" b="1" i="0">
                 <a:solidFill>
-                  <a:srgbClr val="FFFFFF"/>
+                  <a:srgbClr val="4A7CB4"/>
                 </a:solidFill>
               </a:rPr>
-              <a:t>次回（7月）　コンサル3社プレゼン実施　→　業者選定に向けた評価・議論</a:t>
-            </a:r>
-          </a:p>
-        </p:txBody>
-      </p:sp>
-      <p:sp>
-        <p:nvSpPr>
-          <p:cNvPr id="23" name="TextBox 22"/>
+              <a:t>次回（7月）　コンサル3社プレゼン実施　→　業者選定の議論</a:t>
+            </a:r>
+          </a:p>
+        </p:txBody>
+      </p:sp>
+      <p:sp>
+        <p:nvSpPr>
+          <p:cNvPr id="25" name="TextBox 24"/>
           <p:cNvSpPr txBox="1"/>
           <p:nvPr/>
         </p:nvSpPr>
         <p:spPr>
           <a:xfrm>
-            <a:off x="548640" y="4160520"/>
-            <a:ext cx="11155680" cy="502920"/>
+            <a:off x="548640" y="6720840"/>
+            <a:ext cx="6492240" cy="521208"/>
           </a:xfrm>
           <a:prstGeom prst="rect">
             <a:avLst/>
@@ -9623,9 +10354,9 @@
           <a:p>
             <a:pPr algn="l"/>
             <a:r>
-              <a:rPr sz="1500" b="0">
+              <a:rPr sz="1400" b="0" i="0">
                 <a:solidFill>
-                  <a:srgbClr val="262626"/>
+                  <a:srgbClr val="222222"/>
                 </a:solidFill>
               </a:rPr>
               <a:t>● コンサル3社（TDS・オフィスレコン・センターオフィス）のプレゼンを実施（各30分）</a:t>
@@ -9635,14 +10366,14 @@
       </p:sp>
       <p:sp>
         <p:nvSpPr>
-          <p:cNvPr id="24" name="TextBox 23"/>
+          <p:cNvPr id="26" name="TextBox 25"/>
           <p:cNvSpPr txBox="1"/>
           <p:nvPr/>
         </p:nvSpPr>
         <p:spPr>
           <a:xfrm>
-            <a:off x="548640" y="4690872"/>
-            <a:ext cx="11155680" cy="502920"/>
+            <a:off x="548640" y="7196328"/>
+            <a:ext cx="6492240" cy="521208"/>
           </a:xfrm>
           <a:prstGeom prst="rect">
             <a:avLst/>
@@ -9657,9 +10388,9 @@
           <a:p>
             <a:pPr algn="l"/>
             <a:r>
-              <a:rPr sz="1500" b="0">
+              <a:rPr sz="1400" b="0" i="0">
                 <a:solidFill>
-                  <a:srgbClr val="262626"/>
+                  <a:srgbClr val="222222"/>
                 </a:solidFill>
               </a:rPr>
               <a:t>● 各社の提案内容・金額・対応範囲を委員会内で評価・比較</a:t>
@@ -9669,14 +10400,14 @@
       </p:sp>
       <p:sp>
         <p:nvSpPr>
-          <p:cNvPr id="25" name="TextBox 24"/>
+          <p:cNvPr id="27" name="TextBox 26"/>
           <p:cNvSpPr txBox="1"/>
           <p:nvPr/>
         </p:nvSpPr>
         <p:spPr>
           <a:xfrm>
-            <a:off x="548640" y="5221224"/>
-            <a:ext cx="11155680" cy="502920"/>
+            <a:off x="548640" y="7671816"/>
+            <a:ext cx="6492240" cy="521208"/>
           </a:xfrm>
           <a:prstGeom prst="rect">
             <a:avLst/>
@@ -9691,9 +10422,9 @@
           <a:p>
             <a:pPr algn="l"/>
             <a:r>
-              <a:rPr sz="1500" b="0">
+              <a:rPr sz="1400" b="0" i="0">
                 <a:solidFill>
-                  <a:srgbClr val="262626"/>
+                  <a:srgbClr val="222222"/>
                 </a:solidFill>
               </a:rPr>
               <a:t>● 業者選定の方向性を議論し、8月の理事会決議へ向けて準備</a:t>
